--- a/Bible-Timeline.pptx
+++ b/Bible-Timeline.pptx
@@ -2307,7 +2307,7 @@
         </p:nvSpPr>
         <p:spPr>
           <a:xfrm>
-            <a:off x="5090008" y="822960"/>
+            <a:off x="5090008" y="685800"/>
             <a:ext cx="2011680" cy="2011680"/>
           </a:xfrm>
           <a:prstGeom prst="ellipse">
@@ -2319,16 +2319,40 @@
           <a:ln/>
         </p:spPr>
       </p:sp>
-      <p:sp>
-        <p:nvSpPr>
-          <p:cNvPr id="3" name="Text 1"/>
-          <p:cNvSpPr txBox="1"/>
-          <p:nvPr/>
-        </p:nvSpPr>
-        <p:spPr>
-          <a:xfrm>
-            <a:off x="5090008" y="822960"/>
-            <a:ext cx="2011680" cy="2011680"/>
+      <p:pic>
+        <p:nvPicPr>
+          <p:cNvPr id="3" name="Image 0" descr="icons/cover.png">    </p:cNvPr>
+          <p:cNvPicPr>
+            <a:picLocks noChangeAspect="1"/>
+          </p:cNvPicPr>
+          <p:nvPr/>
+        </p:nvPicPr>
+        <p:blipFill>
+          <a:blip r:embed="rId1"/>
+          <a:stretch>
+            <a:fillRect/>
+          </a:stretch>
+        </p:blipFill>
+        <p:spPr>
+          <a:xfrm>
+            <a:off x="5410048" y="1005840"/>
+            <a:ext cx="1371600" cy="1371600"/>
+          </a:xfrm>
+          <a:prstGeom prst="rect">
+            <a:avLst/>
+          </a:prstGeom>
+        </p:spPr>
+      </p:pic>
+      <p:sp>
+        <p:nvSpPr>
+          <p:cNvPr id="4" name="Text 1"/>
+          <p:cNvSpPr txBox="1"/>
+          <p:nvPr/>
+        </p:nvSpPr>
+        <p:spPr>
+          <a:xfrm>
+            <a:off x="731520" y="2971800"/>
+            <a:ext cx="10728655" cy="1005840"/>
           </a:xfrm>
           <a:prstGeom prst="rect">
             <a:avLst/>
@@ -2344,30 +2368,69 @@
               <a:buNone/>
             </a:pPr>
             <a:r>
-              <a:rPr lang="en-US" sz="6600" dirty="0">
-                <a:solidFill>
-                  <a:srgbClr val="16213E"/>
+              <a:rPr lang="en-US" sz="4800" b="1" dirty="0">
+                <a:solidFill>
+                  <a:srgbClr val="FBF8F1"/>
+                </a:solidFill>
+                <a:latin typeface="Cambria" pitchFamily="34" charset="0"/>
+                <a:ea typeface="Cambria" pitchFamily="34" charset="-122"/>
+                <a:cs typeface="Cambria" pitchFamily="34" charset="-120"/>
+              </a:rPr>
+              <a:t>The Bible in Timeline Order</a:t>
+            </a:r>
+            <a:endParaRPr lang="en-US" sz="4800" dirty="0"/>
+          </a:p>
+        </p:txBody>
+      </p:sp>
+      <p:sp>
+        <p:nvSpPr>
+          <p:cNvPr id="5" name="Text 2"/>
+          <p:cNvSpPr txBox="1"/>
+          <p:nvPr/>
+        </p:nvSpPr>
+        <p:spPr>
+          <a:xfrm>
+            <a:off x="731520" y="3977640"/>
+            <a:ext cx="10728655" cy="548640"/>
+          </a:xfrm>
+          <a:prstGeom prst="rect">
+            <a:avLst/>
+          </a:prstGeom>
+          <a:noFill/>
+          <a:ln/>
+        </p:spPr>
+        <p:txBody>
+          <a:bodyPr wrap="square" lIns="0" tIns="0" rIns="0" bIns="0" rtlCol="0" anchor="ctr"/>
+          <a:lstStyle/>
+          <a:p>
+            <a:pPr algn="ctr" indent="0" marL="0">
+              <a:buNone/>
+            </a:pPr>
+            <a:r>
+              <a:rPr lang="en-US" sz="2200" i="1" dirty="0">
+                <a:solidFill>
+                  <a:srgbClr val="D4A437"/>
                 </a:solidFill>
                 <a:latin typeface="Calibri" pitchFamily="34" charset="0"/>
                 <a:ea typeface="Calibri" pitchFamily="34" charset="-122"/>
                 <a:cs typeface="Calibri" pitchFamily="34" charset="-120"/>
               </a:rPr>
-              <a:t>✝</a:t>
-            </a:r>
-            <a:endParaRPr lang="en-US" sz="6600" dirty="0"/>
-          </a:p>
-        </p:txBody>
-      </p:sp>
-      <p:sp>
-        <p:nvSpPr>
-          <p:cNvPr id="4" name="Text 2"/>
-          <p:cNvSpPr txBox="1"/>
-          <p:nvPr/>
-        </p:nvSpPr>
-        <p:spPr>
-          <a:xfrm>
-            <a:off x="731520" y="3108960"/>
-            <a:ext cx="10728655" cy="1005840"/>
+              <a:t>From Creation to Revelation · 14 eras</a:t>
+            </a:r>
+            <a:endParaRPr lang="en-US" sz="2200" dirty="0"/>
+          </a:p>
+        </p:txBody>
+      </p:sp>
+      <p:sp>
+        <p:nvSpPr>
+          <p:cNvPr id="6" name="Text 3"/>
+          <p:cNvSpPr txBox="1"/>
+          <p:nvPr/>
+        </p:nvSpPr>
+        <p:spPr>
+          <a:xfrm>
+            <a:off x="731520" y="4617720"/>
+            <a:ext cx="10728655" cy="365760"/>
           </a:xfrm>
           <a:prstGeom prst="rect">
             <a:avLst/>
@@ -2383,62 +2446,23 @@
               <a:buNone/>
             </a:pPr>
             <a:r>
-              <a:rPr lang="en-US" sz="4800" b="1" dirty="0">
-                <a:solidFill>
-                  <a:srgbClr val="FBF8F1"/>
-                </a:solidFill>
-                <a:latin typeface="Cambria" pitchFamily="34" charset="0"/>
-                <a:ea typeface="Cambria" pitchFamily="34" charset="-122"/>
-                <a:cs typeface="Cambria" pitchFamily="34" charset="-120"/>
-              </a:rPr>
-              <a:t>The Bible in Timeline Order</a:t>
-            </a:r>
-            <a:endParaRPr lang="en-US" sz="4800" dirty="0"/>
-          </a:p>
-        </p:txBody>
-      </p:sp>
-      <p:sp>
-        <p:nvSpPr>
-          <p:cNvPr id="5" name="Text 3"/>
-          <p:cNvSpPr txBox="1"/>
-          <p:nvPr/>
-        </p:nvSpPr>
-        <p:spPr>
-          <a:xfrm>
-            <a:off x="731520" y="4114800"/>
-            <a:ext cx="10728655" cy="548640"/>
-          </a:xfrm>
-          <a:prstGeom prst="rect">
-            <a:avLst/>
-          </a:prstGeom>
-          <a:noFill/>
-          <a:ln/>
-        </p:spPr>
-        <p:txBody>
-          <a:bodyPr wrap="square" lIns="0" tIns="0" rIns="0" bIns="0" rtlCol="0" anchor="ctr"/>
-          <a:lstStyle/>
-          <a:p>
-            <a:pPr algn="ctr" indent="0" marL="0">
-              <a:buNone/>
-            </a:pPr>
-            <a:r>
-              <a:rPr lang="en-US" sz="2200" i="1" dirty="0">
-                <a:solidFill>
-                  <a:srgbClr val="D4A437"/>
+              <a:rPr lang="en-US" sz="1400" b="1" dirty="0">
+                <a:solidFill>
+                  <a:srgbClr val="8B93A8"/>
                 </a:solidFill>
                 <a:latin typeface="Calibri" pitchFamily="34" charset="0"/>
                 <a:ea typeface="Calibri" pitchFamily="34" charset="-122"/>
                 <a:cs typeface="Calibri" pitchFamily="34" charset="-120"/>
               </a:rPr>
-              <a:t>From Creation to Revelation · 14 eras</a:t>
-            </a:r>
-            <a:endParaRPr lang="en-US" sz="2200" dirty="0"/>
-          </a:p>
-        </p:txBody>
-      </p:sp>
-      <p:sp>
-        <p:nvSpPr>
-          <p:cNvPr id="6" name="Text 4"/>
+              <a:t>Made with Claude Sonnet 5 · Effort: Low</a:t>
+            </a:r>
+            <a:endParaRPr lang="en-US" sz="1400" dirty="0"/>
+          </a:p>
+        </p:txBody>
+      </p:sp>
+      <p:sp>
+        <p:nvSpPr>
+          <p:cNvPr id="7" name="Text 4"/>
           <p:cNvSpPr txBox="1"/>
           <p:nvPr/>
         </p:nvSpPr>
@@ -2477,23 +2501,23 @@
       </p:sp>
       <p:pic>
         <p:nvPicPr>
-          <p:cNvPr id="3" name="Media 0">
+          <p:cNvPr id="4" name="Media 0">
             <a:hlinkClick r:id="" action="ppaction://media"/>
           </p:cNvPr>
           <p:cNvPicPr>
             <a:picLocks noChangeAspect="1"/>
           </p:cNvPicPr>
           <p:nvPr>
-            <a:videoFile r:link="rId1"/>
+            <a:videoFile r:link="rId2"/>
             <p:extLst>
               <p:ext uri="{DAA4B4D4-6D71-4841-9C94-3DE7FCFB9230}">
-                <p14:media xmlns:p14="http://schemas.microsoft.com/office/powerpoint/2010/main" r:embed="rId2"/>
+                <p14:media xmlns:p14="http://schemas.microsoft.com/office/powerpoint/2010/main" r:embed="rId3"/>
               </p:ext>
             </p:extLst>
           </p:nvPr>
         </p:nvPicPr>
         <p:blipFill>
-          <a:blip r:embed="rId3"/>
+          <a:blip r:embed="rId4"/>
           <a:stretch>
             <a:fillRect/>
           </a:stretch>
@@ -2619,9 +2643,33 @@
           </a:p>
         </p:txBody>
       </p:sp>
-      <p:sp>
-        <p:nvSpPr>
-          <p:cNvPr id="5" name="Text 3"/>
+      <p:pic>
+        <p:nvPicPr>
+          <p:cNvPr id="5" name="Image 0" descr="icons/8.png">    </p:cNvPr>
+          <p:cNvPicPr>
+            <a:picLocks noChangeAspect="1"/>
+          </p:cNvPicPr>
+          <p:nvPr/>
+        </p:nvPicPr>
+        <p:blipFill>
+          <a:blip r:embed="rId1"/>
+          <a:stretch>
+            <a:fillRect/>
+          </a:stretch>
+        </p:blipFill>
+        <p:spPr>
+          <a:xfrm>
+            <a:off x="2514600" y="914400"/>
+            <a:ext cx="1188720" cy="1188720"/>
+          </a:xfrm>
+          <a:prstGeom prst="rect">
+            <a:avLst/>
+          </a:prstGeom>
+        </p:spPr>
+      </p:pic>
+      <p:sp>
+        <p:nvSpPr>
+          <p:cNvPr id="6" name="Text 3"/>
           <p:cNvSpPr txBox="1"/>
           <p:nvPr/>
         </p:nvSpPr>
@@ -2660,7 +2708,7 @@
       </p:sp>
       <p:sp>
         <p:nvSpPr>
-          <p:cNvPr id="6" name="Text 4"/>
+          <p:cNvPr id="7" name="Text 4"/>
           <p:cNvSpPr txBox="1"/>
           <p:nvPr/>
         </p:nvSpPr>
@@ -2699,7 +2747,7 @@
       </p:sp>
       <p:sp>
         <p:nvSpPr>
-          <p:cNvPr id="7" name="Text 5"/>
+          <p:cNvPr id="8" name="Text 5"/>
           <p:cNvSpPr txBox="1"/>
           <p:nvPr/>
         </p:nvSpPr>
@@ -2738,7 +2786,7 @@
       </p:sp>
       <p:sp>
         <p:nvSpPr>
-          <p:cNvPr id="8" name="Text 6"/>
+          <p:cNvPr id="9" name="Text 6"/>
           <p:cNvSpPr txBox="1"/>
           <p:nvPr/>
         </p:nvSpPr>
@@ -2777,7 +2825,7 @@
       </p:sp>
       <p:sp>
         <p:nvSpPr>
-          <p:cNvPr id="9" name="Text 7"/>
+          <p:cNvPr id="10" name="Text 7"/>
           <p:cNvSpPr txBox="1"/>
           <p:nvPr/>
         </p:nvSpPr>
@@ -2816,7 +2864,7 @@
       </p:sp>
       <p:sp>
         <p:nvSpPr>
-          <p:cNvPr id="10" name="Shape 8"/>
+          <p:cNvPr id="11" name="Shape 8"/>
           <p:cNvSpPr/>
           <p:nvPr/>
         </p:nvSpPr>
@@ -2836,7 +2884,7 @@
       </p:sp>
       <p:sp>
         <p:nvSpPr>
-          <p:cNvPr id="11" name="Text 9"/>
+          <p:cNvPr id="12" name="Text 9"/>
           <p:cNvSpPr txBox="1"/>
           <p:nvPr/>
         </p:nvSpPr>
@@ -2875,7 +2923,7 @@
       </p:sp>
       <p:sp>
         <p:nvSpPr>
-          <p:cNvPr id="12" name="Text 10"/>
+          <p:cNvPr id="13" name="Text 10"/>
           <p:cNvSpPr txBox="1"/>
           <p:nvPr/>
         </p:nvSpPr>
@@ -2914,7 +2962,7 @@
       </p:sp>
       <p:sp>
         <p:nvSpPr>
-          <p:cNvPr id="13" name="Shape 11"/>
+          <p:cNvPr id="14" name="Shape 11"/>
           <p:cNvSpPr/>
           <p:nvPr/>
         </p:nvSpPr>
@@ -2934,7 +2982,7 @@
       </p:sp>
       <p:sp>
         <p:nvSpPr>
-          <p:cNvPr id="14" name="Text 12"/>
+          <p:cNvPr id="15" name="Text 12"/>
           <p:cNvSpPr txBox="1"/>
           <p:nvPr/>
         </p:nvSpPr>
@@ -2973,7 +3021,7 @@
       </p:sp>
       <p:sp>
         <p:nvSpPr>
-          <p:cNvPr id="15" name="Text 13"/>
+          <p:cNvPr id="16" name="Text 13"/>
           <p:cNvSpPr txBox="1"/>
           <p:nvPr/>
         </p:nvSpPr>
@@ -3012,7 +3060,7 @@
       </p:sp>
       <p:sp>
         <p:nvSpPr>
-          <p:cNvPr id="16" name="Shape 14"/>
+          <p:cNvPr id="17" name="Shape 14"/>
           <p:cNvSpPr/>
           <p:nvPr/>
         </p:nvSpPr>
@@ -3032,7 +3080,7 @@
       </p:sp>
       <p:sp>
         <p:nvSpPr>
-          <p:cNvPr id="17" name="Text 15"/>
+          <p:cNvPr id="18" name="Text 15"/>
           <p:cNvSpPr txBox="1"/>
           <p:nvPr/>
         </p:nvSpPr>
@@ -3071,7 +3119,7 @@
       </p:sp>
       <p:sp>
         <p:nvSpPr>
-          <p:cNvPr id="18" name="Text 16"/>
+          <p:cNvPr id="19" name="Text 16"/>
           <p:cNvSpPr txBox="1"/>
           <p:nvPr/>
         </p:nvSpPr>
@@ -3110,7 +3158,7 @@
       </p:sp>
       <p:sp>
         <p:nvSpPr>
-          <p:cNvPr id="19" name="Shape 17"/>
+          <p:cNvPr id="20" name="Shape 17"/>
           <p:cNvSpPr/>
           <p:nvPr/>
         </p:nvSpPr>
@@ -3130,7 +3178,7 @@
       </p:sp>
       <p:sp>
         <p:nvSpPr>
-          <p:cNvPr id="20" name="Text 18"/>
+          <p:cNvPr id="21" name="Text 18"/>
           <p:cNvSpPr txBox="1"/>
           <p:nvPr/>
         </p:nvSpPr>
@@ -3169,7 +3217,7 @@
       </p:sp>
       <p:sp>
         <p:nvSpPr>
-          <p:cNvPr id="21" name="Text 19"/>
+          <p:cNvPr id="22" name="Text 19"/>
           <p:cNvSpPr txBox="1"/>
           <p:nvPr/>
         </p:nvSpPr>
@@ -3208,7 +3256,7 @@
       </p:sp>
       <p:sp>
         <p:nvSpPr>
-          <p:cNvPr id="22" name="Shape 20"/>
+          <p:cNvPr id="23" name="Shape 20"/>
           <p:cNvSpPr/>
           <p:nvPr/>
         </p:nvSpPr>
@@ -3231,7 +3279,7 @@
       </p:sp>
       <p:sp>
         <p:nvSpPr>
-          <p:cNvPr id="23" name="Shape 21"/>
+          <p:cNvPr id="24" name="Shape 21"/>
           <p:cNvSpPr/>
           <p:nvPr/>
         </p:nvSpPr>
@@ -3256,7 +3304,7 @@
       </p:sp>
       <p:sp>
         <p:nvSpPr>
-          <p:cNvPr id="24" name="Shape 22"/>
+          <p:cNvPr id="25" name="Shape 22"/>
           <p:cNvSpPr/>
           <p:nvPr/>
         </p:nvSpPr>
@@ -3281,7 +3329,7 @@
       </p:sp>
       <p:sp>
         <p:nvSpPr>
-          <p:cNvPr id="25" name="Shape 23"/>
+          <p:cNvPr id="26" name="Shape 23"/>
           <p:cNvSpPr/>
           <p:nvPr/>
         </p:nvSpPr>
@@ -3306,7 +3354,7 @@
       </p:sp>
       <p:sp>
         <p:nvSpPr>
-          <p:cNvPr id="26" name="Shape 24"/>
+          <p:cNvPr id="27" name="Shape 24"/>
           <p:cNvSpPr/>
           <p:nvPr/>
         </p:nvSpPr>
@@ -3331,7 +3379,7 @@
       </p:sp>
       <p:sp>
         <p:nvSpPr>
-          <p:cNvPr id="27" name="Shape 25"/>
+          <p:cNvPr id="28" name="Shape 25"/>
           <p:cNvSpPr/>
           <p:nvPr/>
         </p:nvSpPr>
@@ -3356,7 +3404,7 @@
       </p:sp>
       <p:sp>
         <p:nvSpPr>
-          <p:cNvPr id="28" name="Shape 26"/>
+          <p:cNvPr id="29" name="Shape 26"/>
           <p:cNvSpPr/>
           <p:nvPr/>
         </p:nvSpPr>
@@ -3381,7 +3429,7 @@
       </p:sp>
       <p:sp>
         <p:nvSpPr>
-          <p:cNvPr id="29" name="Shape 27"/>
+          <p:cNvPr id="30" name="Shape 27"/>
           <p:cNvSpPr/>
           <p:nvPr/>
         </p:nvSpPr>
@@ -3406,7 +3454,7 @@
       </p:sp>
       <p:sp>
         <p:nvSpPr>
-          <p:cNvPr id="30" name="Shape 28"/>
+          <p:cNvPr id="31" name="Shape 28"/>
           <p:cNvSpPr/>
           <p:nvPr/>
         </p:nvSpPr>
@@ -3431,7 +3479,7 @@
       </p:sp>
       <p:sp>
         <p:nvSpPr>
-          <p:cNvPr id="31" name="Shape 29"/>
+          <p:cNvPr id="32" name="Shape 29"/>
           <p:cNvSpPr/>
           <p:nvPr/>
         </p:nvSpPr>
@@ -3456,7 +3504,7 @@
       </p:sp>
       <p:sp>
         <p:nvSpPr>
-          <p:cNvPr id="32" name="Shape 30"/>
+          <p:cNvPr id="33" name="Shape 30"/>
           <p:cNvSpPr/>
           <p:nvPr/>
         </p:nvSpPr>
@@ -3481,7 +3529,7 @@
       </p:sp>
       <p:sp>
         <p:nvSpPr>
-          <p:cNvPr id="33" name="Shape 31"/>
+          <p:cNvPr id="34" name="Shape 31"/>
           <p:cNvSpPr/>
           <p:nvPr/>
         </p:nvSpPr>
@@ -3506,7 +3554,7 @@
       </p:sp>
       <p:sp>
         <p:nvSpPr>
-          <p:cNvPr id="34" name="Shape 32"/>
+          <p:cNvPr id="35" name="Shape 32"/>
           <p:cNvSpPr/>
           <p:nvPr/>
         </p:nvSpPr>
@@ -3531,7 +3579,7 @@
       </p:sp>
       <p:sp>
         <p:nvSpPr>
-          <p:cNvPr id="35" name="Shape 33"/>
+          <p:cNvPr id="36" name="Shape 33"/>
           <p:cNvSpPr/>
           <p:nvPr/>
         </p:nvSpPr>
@@ -3556,7 +3604,7 @@
       </p:sp>
       <p:sp>
         <p:nvSpPr>
-          <p:cNvPr id="36" name="Shape 34"/>
+          <p:cNvPr id="37" name="Shape 34"/>
           <p:cNvSpPr/>
           <p:nvPr/>
         </p:nvSpPr>
@@ -3581,23 +3629,23 @@
       </p:sp>
       <p:pic>
         <p:nvPicPr>
-          <p:cNvPr id="3" name="Media 0">
+          <p:cNvPr id="4" name="Media 0">
             <a:hlinkClick r:id="" action="ppaction://media"/>
           </p:cNvPr>
           <p:cNvPicPr>
             <a:picLocks noChangeAspect="1"/>
           </p:cNvPicPr>
           <p:nvPr>
-            <a:videoFile r:link="rId1"/>
+            <a:videoFile r:link="rId2"/>
             <p:extLst>
               <p:ext uri="{DAA4B4D4-6D71-4841-9C94-3DE7FCFB9230}">
-                <p14:media xmlns:p14="http://schemas.microsoft.com/office/powerpoint/2010/main" r:embed="rId2"/>
+                <p14:media xmlns:p14="http://schemas.microsoft.com/office/powerpoint/2010/main" r:embed="rId3"/>
               </p:ext>
             </p:extLst>
           </p:nvPr>
         </p:nvPicPr>
         <p:blipFill>
-          <a:blip r:embed="rId3"/>
+          <a:blip r:embed="rId4"/>
           <a:stretch>
             <a:fillRect/>
           </a:stretch>
@@ -3723,9 +3771,33 @@
           </a:p>
         </p:txBody>
       </p:sp>
-      <p:sp>
-        <p:nvSpPr>
-          <p:cNvPr id="5" name="Text 3"/>
+      <p:pic>
+        <p:nvPicPr>
+          <p:cNvPr id="5" name="Image 0" descr="icons/9.png">    </p:cNvPr>
+          <p:cNvPicPr>
+            <a:picLocks noChangeAspect="1"/>
+          </p:cNvPicPr>
+          <p:nvPr/>
+        </p:nvPicPr>
+        <p:blipFill>
+          <a:blip r:embed="rId1"/>
+          <a:stretch>
+            <a:fillRect/>
+          </a:stretch>
+        </p:blipFill>
+        <p:spPr>
+          <a:xfrm>
+            <a:off x="2514600" y="914400"/>
+            <a:ext cx="1188720" cy="1188720"/>
+          </a:xfrm>
+          <a:prstGeom prst="rect">
+            <a:avLst/>
+          </a:prstGeom>
+        </p:spPr>
+      </p:pic>
+      <p:sp>
+        <p:nvSpPr>
+          <p:cNvPr id="6" name="Text 3"/>
           <p:cNvSpPr txBox="1"/>
           <p:nvPr/>
         </p:nvSpPr>
@@ -3764,7 +3836,7 @@
       </p:sp>
       <p:sp>
         <p:nvSpPr>
-          <p:cNvPr id="6" name="Text 4"/>
+          <p:cNvPr id="7" name="Text 4"/>
           <p:cNvSpPr txBox="1"/>
           <p:nvPr/>
         </p:nvSpPr>
@@ -3803,7 +3875,7 @@
       </p:sp>
       <p:sp>
         <p:nvSpPr>
-          <p:cNvPr id="7" name="Text 5"/>
+          <p:cNvPr id="8" name="Text 5"/>
           <p:cNvSpPr txBox="1"/>
           <p:nvPr/>
         </p:nvSpPr>
@@ -3842,7 +3914,7 @@
       </p:sp>
       <p:sp>
         <p:nvSpPr>
-          <p:cNvPr id="8" name="Text 6"/>
+          <p:cNvPr id="9" name="Text 6"/>
           <p:cNvSpPr txBox="1"/>
           <p:nvPr/>
         </p:nvSpPr>
@@ -3881,7 +3953,7 @@
       </p:sp>
       <p:sp>
         <p:nvSpPr>
-          <p:cNvPr id="9" name="Text 7"/>
+          <p:cNvPr id="10" name="Text 7"/>
           <p:cNvSpPr txBox="1"/>
           <p:nvPr/>
         </p:nvSpPr>
@@ -3920,7 +3992,7 @@
       </p:sp>
       <p:sp>
         <p:nvSpPr>
-          <p:cNvPr id="10" name="Shape 8"/>
+          <p:cNvPr id="11" name="Shape 8"/>
           <p:cNvSpPr/>
           <p:nvPr/>
         </p:nvSpPr>
@@ -3940,7 +4012,7 @@
       </p:sp>
       <p:sp>
         <p:nvSpPr>
-          <p:cNvPr id="11" name="Text 9"/>
+          <p:cNvPr id="12" name="Text 9"/>
           <p:cNvSpPr txBox="1"/>
           <p:nvPr/>
         </p:nvSpPr>
@@ -3979,7 +4051,7 @@
       </p:sp>
       <p:sp>
         <p:nvSpPr>
-          <p:cNvPr id="12" name="Text 10"/>
+          <p:cNvPr id="13" name="Text 10"/>
           <p:cNvSpPr txBox="1"/>
           <p:nvPr/>
         </p:nvSpPr>
@@ -4018,7 +4090,7 @@
       </p:sp>
       <p:sp>
         <p:nvSpPr>
-          <p:cNvPr id="13" name="Shape 11"/>
+          <p:cNvPr id="14" name="Shape 11"/>
           <p:cNvSpPr/>
           <p:nvPr/>
         </p:nvSpPr>
@@ -4038,7 +4110,7 @@
       </p:sp>
       <p:sp>
         <p:nvSpPr>
-          <p:cNvPr id="14" name="Text 12"/>
+          <p:cNvPr id="15" name="Text 12"/>
           <p:cNvSpPr txBox="1"/>
           <p:nvPr/>
         </p:nvSpPr>
@@ -4077,7 +4149,7 @@
       </p:sp>
       <p:sp>
         <p:nvSpPr>
-          <p:cNvPr id="15" name="Text 13"/>
+          <p:cNvPr id="16" name="Text 13"/>
           <p:cNvSpPr txBox="1"/>
           <p:nvPr/>
         </p:nvSpPr>
@@ -4116,7 +4188,7 @@
       </p:sp>
       <p:sp>
         <p:nvSpPr>
-          <p:cNvPr id="16" name="Shape 14"/>
+          <p:cNvPr id="17" name="Shape 14"/>
           <p:cNvSpPr/>
           <p:nvPr/>
         </p:nvSpPr>
@@ -4136,7 +4208,7 @@
       </p:sp>
       <p:sp>
         <p:nvSpPr>
-          <p:cNvPr id="17" name="Text 15"/>
+          <p:cNvPr id="18" name="Text 15"/>
           <p:cNvSpPr txBox="1"/>
           <p:nvPr/>
         </p:nvSpPr>
@@ -4175,7 +4247,7 @@
       </p:sp>
       <p:sp>
         <p:nvSpPr>
-          <p:cNvPr id="18" name="Text 16"/>
+          <p:cNvPr id="19" name="Text 16"/>
           <p:cNvSpPr txBox="1"/>
           <p:nvPr/>
         </p:nvSpPr>
@@ -4214,7 +4286,7 @@
       </p:sp>
       <p:sp>
         <p:nvSpPr>
-          <p:cNvPr id="19" name="Shape 17"/>
+          <p:cNvPr id="20" name="Shape 17"/>
           <p:cNvSpPr/>
           <p:nvPr/>
         </p:nvSpPr>
@@ -4234,7 +4306,7 @@
       </p:sp>
       <p:sp>
         <p:nvSpPr>
-          <p:cNvPr id="20" name="Text 18"/>
+          <p:cNvPr id="21" name="Text 18"/>
           <p:cNvSpPr txBox="1"/>
           <p:nvPr/>
         </p:nvSpPr>
@@ -4273,7 +4345,7 @@
       </p:sp>
       <p:sp>
         <p:nvSpPr>
-          <p:cNvPr id="21" name="Text 19"/>
+          <p:cNvPr id="22" name="Text 19"/>
           <p:cNvSpPr txBox="1"/>
           <p:nvPr/>
         </p:nvSpPr>
@@ -4312,7 +4384,7 @@
       </p:sp>
       <p:sp>
         <p:nvSpPr>
-          <p:cNvPr id="22" name="Shape 20"/>
+          <p:cNvPr id="23" name="Shape 20"/>
           <p:cNvSpPr/>
           <p:nvPr/>
         </p:nvSpPr>
@@ -4335,7 +4407,7 @@
       </p:sp>
       <p:sp>
         <p:nvSpPr>
-          <p:cNvPr id="23" name="Shape 21"/>
+          <p:cNvPr id="24" name="Shape 21"/>
           <p:cNvSpPr/>
           <p:nvPr/>
         </p:nvSpPr>
@@ -4360,7 +4432,7 @@
       </p:sp>
       <p:sp>
         <p:nvSpPr>
-          <p:cNvPr id="24" name="Shape 22"/>
+          <p:cNvPr id="25" name="Shape 22"/>
           <p:cNvSpPr/>
           <p:nvPr/>
         </p:nvSpPr>
@@ -4385,7 +4457,7 @@
       </p:sp>
       <p:sp>
         <p:nvSpPr>
-          <p:cNvPr id="25" name="Shape 23"/>
+          <p:cNvPr id="26" name="Shape 23"/>
           <p:cNvSpPr/>
           <p:nvPr/>
         </p:nvSpPr>
@@ -4410,7 +4482,7 @@
       </p:sp>
       <p:sp>
         <p:nvSpPr>
-          <p:cNvPr id="26" name="Shape 24"/>
+          <p:cNvPr id="27" name="Shape 24"/>
           <p:cNvSpPr/>
           <p:nvPr/>
         </p:nvSpPr>
@@ -4435,7 +4507,7 @@
       </p:sp>
       <p:sp>
         <p:nvSpPr>
-          <p:cNvPr id="27" name="Shape 25"/>
+          <p:cNvPr id="28" name="Shape 25"/>
           <p:cNvSpPr/>
           <p:nvPr/>
         </p:nvSpPr>
@@ -4460,7 +4532,7 @@
       </p:sp>
       <p:sp>
         <p:nvSpPr>
-          <p:cNvPr id="28" name="Shape 26"/>
+          <p:cNvPr id="29" name="Shape 26"/>
           <p:cNvSpPr/>
           <p:nvPr/>
         </p:nvSpPr>
@@ -4485,7 +4557,7 @@
       </p:sp>
       <p:sp>
         <p:nvSpPr>
-          <p:cNvPr id="29" name="Shape 27"/>
+          <p:cNvPr id="30" name="Shape 27"/>
           <p:cNvSpPr/>
           <p:nvPr/>
         </p:nvSpPr>
@@ -4510,7 +4582,7 @@
       </p:sp>
       <p:sp>
         <p:nvSpPr>
-          <p:cNvPr id="30" name="Shape 28"/>
+          <p:cNvPr id="31" name="Shape 28"/>
           <p:cNvSpPr/>
           <p:nvPr/>
         </p:nvSpPr>
@@ -4535,7 +4607,7 @@
       </p:sp>
       <p:sp>
         <p:nvSpPr>
-          <p:cNvPr id="31" name="Shape 29"/>
+          <p:cNvPr id="32" name="Shape 29"/>
           <p:cNvSpPr/>
           <p:nvPr/>
         </p:nvSpPr>
@@ -4560,7 +4632,7 @@
       </p:sp>
       <p:sp>
         <p:nvSpPr>
-          <p:cNvPr id="32" name="Shape 30"/>
+          <p:cNvPr id="33" name="Shape 30"/>
           <p:cNvSpPr/>
           <p:nvPr/>
         </p:nvSpPr>
@@ -4585,7 +4657,7 @@
       </p:sp>
       <p:sp>
         <p:nvSpPr>
-          <p:cNvPr id="33" name="Shape 31"/>
+          <p:cNvPr id="34" name="Shape 31"/>
           <p:cNvSpPr/>
           <p:nvPr/>
         </p:nvSpPr>
@@ -4610,7 +4682,7 @@
       </p:sp>
       <p:sp>
         <p:nvSpPr>
-          <p:cNvPr id="34" name="Shape 32"/>
+          <p:cNvPr id="35" name="Shape 32"/>
           <p:cNvSpPr/>
           <p:nvPr/>
         </p:nvSpPr>
@@ -4635,7 +4707,7 @@
       </p:sp>
       <p:sp>
         <p:nvSpPr>
-          <p:cNvPr id="35" name="Shape 33"/>
+          <p:cNvPr id="36" name="Shape 33"/>
           <p:cNvSpPr/>
           <p:nvPr/>
         </p:nvSpPr>
@@ -4660,7 +4732,7 @@
       </p:sp>
       <p:sp>
         <p:nvSpPr>
-          <p:cNvPr id="36" name="Shape 34"/>
+          <p:cNvPr id="37" name="Shape 34"/>
           <p:cNvSpPr/>
           <p:nvPr/>
         </p:nvSpPr>
@@ -4685,23 +4757,23 @@
       </p:sp>
       <p:pic>
         <p:nvPicPr>
-          <p:cNvPr id="3" name="Media 0">
+          <p:cNvPr id="4" name="Media 0">
             <a:hlinkClick r:id="" action="ppaction://media"/>
           </p:cNvPr>
           <p:cNvPicPr>
             <a:picLocks noChangeAspect="1"/>
           </p:cNvPicPr>
           <p:nvPr>
-            <a:videoFile r:link="rId1"/>
+            <a:videoFile r:link="rId2"/>
             <p:extLst>
               <p:ext uri="{DAA4B4D4-6D71-4841-9C94-3DE7FCFB9230}">
-                <p14:media xmlns:p14="http://schemas.microsoft.com/office/powerpoint/2010/main" r:embed="rId2"/>
+                <p14:media xmlns:p14="http://schemas.microsoft.com/office/powerpoint/2010/main" r:embed="rId3"/>
               </p:ext>
             </p:extLst>
           </p:nvPr>
         </p:nvPicPr>
         <p:blipFill>
-          <a:blip r:embed="rId3"/>
+          <a:blip r:embed="rId4"/>
           <a:stretch>
             <a:fillRect/>
           </a:stretch>
@@ -4827,9 +4899,33 @@
           </a:p>
         </p:txBody>
       </p:sp>
-      <p:sp>
-        <p:nvSpPr>
-          <p:cNvPr id="5" name="Text 3"/>
+      <p:pic>
+        <p:nvPicPr>
+          <p:cNvPr id="5" name="Image 0" descr="icons/10.png">    </p:cNvPr>
+          <p:cNvPicPr>
+            <a:picLocks noChangeAspect="1"/>
+          </p:cNvPicPr>
+          <p:nvPr/>
+        </p:nvPicPr>
+        <p:blipFill>
+          <a:blip r:embed="rId1"/>
+          <a:stretch>
+            <a:fillRect/>
+          </a:stretch>
+        </p:blipFill>
+        <p:spPr>
+          <a:xfrm>
+            <a:off x="2514600" y="914400"/>
+            <a:ext cx="1188720" cy="1188720"/>
+          </a:xfrm>
+          <a:prstGeom prst="rect">
+            <a:avLst/>
+          </a:prstGeom>
+        </p:spPr>
+      </p:pic>
+      <p:sp>
+        <p:nvSpPr>
+          <p:cNvPr id="6" name="Text 3"/>
           <p:cNvSpPr txBox="1"/>
           <p:nvPr/>
         </p:nvSpPr>
@@ -4868,7 +4964,7 @@
       </p:sp>
       <p:sp>
         <p:nvSpPr>
-          <p:cNvPr id="6" name="Text 4"/>
+          <p:cNvPr id="7" name="Text 4"/>
           <p:cNvSpPr txBox="1"/>
           <p:nvPr/>
         </p:nvSpPr>
@@ -4907,7 +5003,7 @@
       </p:sp>
       <p:sp>
         <p:nvSpPr>
-          <p:cNvPr id="7" name="Text 5"/>
+          <p:cNvPr id="8" name="Text 5"/>
           <p:cNvSpPr txBox="1"/>
           <p:nvPr/>
         </p:nvSpPr>
@@ -4946,7 +5042,7 @@
       </p:sp>
       <p:sp>
         <p:nvSpPr>
-          <p:cNvPr id="8" name="Text 6"/>
+          <p:cNvPr id="9" name="Text 6"/>
           <p:cNvSpPr txBox="1"/>
           <p:nvPr/>
         </p:nvSpPr>
@@ -4985,7 +5081,7 @@
       </p:sp>
       <p:sp>
         <p:nvSpPr>
-          <p:cNvPr id="9" name="Text 7"/>
+          <p:cNvPr id="10" name="Text 7"/>
           <p:cNvSpPr txBox="1"/>
           <p:nvPr/>
         </p:nvSpPr>
@@ -5024,7 +5120,7 @@
       </p:sp>
       <p:sp>
         <p:nvSpPr>
-          <p:cNvPr id="10" name="Shape 8"/>
+          <p:cNvPr id="11" name="Shape 8"/>
           <p:cNvSpPr/>
           <p:nvPr/>
         </p:nvSpPr>
@@ -5044,7 +5140,7 @@
       </p:sp>
       <p:sp>
         <p:nvSpPr>
-          <p:cNvPr id="11" name="Text 9"/>
+          <p:cNvPr id="12" name="Text 9"/>
           <p:cNvSpPr txBox="1"/>
           <p:nvPr/>
         </p:nvSpPr>
@@ -5083,7 +5179,7 @@
       </p:sp>
       <p:sp>
         <p:nvSpPr>
-          <p:cNvPr id="12" name="Text 10"/>
+          <p:cNvPr id="13" name="Text 10"/>
           <p:cNvSpPr txBox="1"/>
           <p:nvPr/>
         </p:nvSpPr>
@@ -5122,7 +5218,7 @@
       </p:sp>
       <p:sp>
         <p:nvSpPr>
-          <p:cNvPr id="13" name="Shape 11"/>
+          <p:cNvPr id="14" name="Shape 11"/>
           <p:cNvSpPr/>
           <p:nvPr/>
         </p:nvSpPr>
@@ -5142,7 +5238,7 @@
       </p:sp>
       <p:sp>
         <p:nvSpPr>
-          <p:cNvPr id="14" name="Text 12"/>
+          <p:cNvPr id="15" name="Text 12"/>
           <p:cNvSpPr txBox="1"/>
           <p:nvPr/>
         </p:nvSpPr>
@@ -5181,7 +5277,7 @@
       </p:sp>
       <p:sp>
         <p:nvSpPr>
-          <p:cNvPr id="15" name="Text 13"/>
+          <p:cNvPr id="16" name="Text 13"/>
           <p:cNvSpPr txBox="1"/>
           <p:nvPr/>
         </p:nvSpPr>
@@ -5220,7 +5316,7 @@
       </p:sp>
       <p:sp>
         <p:nvSpPr>
-          <p:cNvPr id="16" name="Shape 14"/>
+          <p:cNvPr id="17" name="Shape 14"/>
           <p:cNvSpPr/>
           <p:nvPr/>
         </p:nvSpPr>
@@ -5240,7 +5336,7 @@
       </p:sp>
       <p:sp>
         <p:nvSpPr>
-          <p:cNvPr id="17" name="Text 15"/>
+          <p:cNvPr id="18" name="Text 15"/>
           <p:cNvSpPr txBox="1"/>
           <p:nvPr/>
         </p:nvSpPr>
@@ -5279,7 +5375,7 @@
       </p:sp>
       <p:sp>
         <p:nvSpPr>
-          <p:cNvPr id="18" name="Text 16"/>
+          <p:cNvPr id="19" name="Text 16"/>
           <p:cNvSpPr txBox="1"/>
           <p:nvPr/>
         </p:nvSpPr>
@@ -5318,7 +5414,7 @@
       </p:sp>
       <p:sp>
         <p:nvSpPr>
-          <p:cNvPr id="19" name="Shape 17"/>
+          <p:cNvPr id="20" name="Shape 17"/>
           <p:cNvSpPr/>
           <p:nvPr/>
         </p:nvSpPr>
@@ -5338,7 +5434,7 @@
       </p:sp>
       <p:sp>
         <p:nvSpPr>
-          <p:cNvPr id="20" name="Text 18"/>
+          <p:cNvPr id="21" name="Text 18"/>
           <p:cNvSpPr txBox="1"/>
           <p:nvPr/>
         </p:nvSpPr>
@@ -5377,7 +5473,7 @@
       </p:sp>
       <p:sp>
         <p:nvSpPr>
-          <p:cNvPr id="21" name="Text 19"/>
+          <p:cNvPr id="22" name="Text 19"/>
           <p:cNvSpPr txBox="1"/>
           <p:nvPr/>
         </p:nvSpPr>
@@ -5416,7 +5512,7 @@
       </p:sp>
       <p:sp>
         <p:nvSpPr>
-          <p:cNvPr id="22" name="Shape 20"/>
+          <p:cNvPr id="23" name="Shape 20"/>
           <p:cNvSpPr/>
           <p:nvPr/>
         </p:nvSpPr>
@@ -5439,7 +5535,7 @@
       </p:sp>
       <p:sp>
         <p:nvSpPr>
-          <p:cNvPr id="23" name="Shape 21"/>
+          <p:cNvPr id="24" name="Shape 21"/>
           <p:cNvSpPr/>
           <p:nvPr/>
         </p:nvSpPr>
@@ -5464,7 +5560,7 @@
       </p:sp>
       <p:sp>
         <p:nvSpPr>
-          <p:cNvPr id="24" name="Shape 22"/>
+          <p:cNvPr id="25" name="Shape 22"/>
           <p:cNvSpPr/>
           <p:nvPr/>
         </p:nvSpPr>
@@ -5489,7 +5585,7 @@
       </p:sp>
       <p:sp>
         <p:nvSpPr>
-          <p:cNvPr id="25" name="Shape 23"/>
+          <p:cNvPr id="26" name="Shape 23"/>
           <p:cNvSpPr/>
           <p:nvPr/>
         </p:nvSpPr>
@@ -5514,7 +5610,7 @@
       </p:sp>
       <p:sp>
         <p:nvSpPr>
-          <p:cNvPr id="26" name="Shape 24"/>
+          <p:cNvPr id="27" name="Shape 24"/>
           <p:cNvSpPr/>
           <p:nvPr/>
         </p:nvSpPr>
@@ -5539,7 +5635,7 @@
       </p:sp>
       <p:sp>
         <p:nvSpPr>
-          <p:cNvPr id="27" name="Shape 25"/>
+          <p:cNvPr id="28" name="Shape 25"/>
           <p:cNvSpPr/>
           <p:nvPr/>
         </p:nvSpPr>
@@ -5564,7 +5660,7 @@
       </p:sp>
       <p:sp>
         <p:nvSpPr>
-          <p:cNvPr id="28" name="Shape 26"/>
+          <p:cNvPr id="29" name="Shape 26"/>
           <p:cNvSpPr/>
           <p:nvPr/>
         </p:nvSpPr>
@@ -5589,7 +5685,7 @@
       </p:sp>
       <p:sp>
         <p:nvSpPr>
-          <p:cNvPr id="29" name="Shape 27"/>
+          <p:cNvPr id="30" name="Shape 27"/>
           <p:cNvSpPr/>
           <p:nvPr/>
         </p:nvSpPr>
@@ -5614,7 +5710,7 @@
       </p:sp>
       <p:sp>
         <p:nvSpPr>
-          <p:cNvPr id="30" name="Shape 28"/>
+          <p:cNvPr id="31" name="Shape 28"/>
           <p:cNvSpPr/>
           <p:nvPr/>
         </p:nvSpPr>
@@ -5639,7 +5735,7 @@
       </p:sp>
       <p:sp>
         <p:nvSpPr>
-          <p:cNvPr id="31" name="Shape 29"/>
+          <p:cNvPr id="32" name="Shape 29"/>
           <p:cNvSpPr/>
           <p:nvPr/>
         </p:nvSpPr>
@@ -5664,7 +5760,7 @@
       </p:sp>
       <p:sp>
         <p:nvSpPr>
-          <p:cNvPr id="32" name="Shape 30"/>
+          <p:cNvPr id="33" name="Shape 30"/>
           <p:cNvSpPr/>
           <p:nvPr/>
         </p:nvSpPr>
@@ -5689,7 +5785,7 @@
       </p:sp>
       <p:sp>
         <p:nvSpPr>
-          <p:cNvPr id="33" name="Shape 31"/>
+          <p:cNvPr id="34" name="Shape 31"/>
           <p:cNvSpPr/>
           <p:nvPr/>
         </p:nvSpPr>
@@ -5714,7 +5810,7 @@
       </p:sp>
       <p:sp>
         <p:nvSpPr>
-          <p:cNvPr id="34" name="Shape 32"/>
+          <p:cNvPr id="35" name="Shape 32"/>
           <p:cNvSpPr/>
           <p:nvPr/>
         </p:nvSpPr>
@@ -5739,7 +5835,7 @@
       </p:sp>
       <p:sp>
         <p:nvSpPr>
-          <p:cNvPr id="35" name="Shape 33"/>
+          <p:cNvPr id="36" name="Shape 33"/>
           <p:cNvSpPr/>
           <p:nvPr/>
         </p:nvSpPr>
@@ -5764,7 +5860,7 @@
       </p:sp>
       <p:sp>
         <p:nvSpPr>
-          <p:cNvPr id="36" name="Shape 34"/>
+          <p:cNvPr id="37" name="Shape 34"/>
           <p:cNvSpPr/>
           <p:nvPr/>
         </p:nvSpPr>
@@ -5789,23 +5885,23 @@
       </p:sp>
       <p:pic>
         <p:nvPicPr>
-          <p:cNvPr id="3" name="Media 0">
+          <p:cNvPr id="4" name="Media 0">
             <a:hlinkClick r:id="" action="ppaction://media"/>
           </p:cNvPr>
           <p:cNvPicPr>
             <a:picLocks noChangeAspect="1"/>
           </p:cNvPicPr>
           <p:nvPr>
-            <a:videoFile r:link="rId1"/>
+            <a:videoFile r:link="rId2"/>
             <p:extLst>
               <p:ext uri="{DAA4B4D4-6D71-4841-9C94-3DE7FCFB9230}">
-                <p14:media xmlns:p14="http://schemas.microsoft.com/office/powerpoint/2010/main" r:embed="rId2"/>
+                <p14:media xmlns:p14="http://schemas.microsoft.com/office/powerpoint/2010/main" r:embed="rId3"/>
               </p:ext>
             </p:extLst>
           </p:nvPr>
         </p:nvPicPr>
         <p:blipFill>
-          <a:blip r:embed="rId3"/>
+          <a:blip r:embed="rId4"/>
           <a:stretch>
             <a:fillRect/>
           </a:stretch>
@@ -5931,9 +6027,33 @@
           </a:p>
         </p:txBody>
       </p:sp>
-      <p:sp>
-        <p:nvSpPr>
-          <p:cNvPr id="5" name="Text 3"/>
+      <p:pic>
+        <p:nvPicPr>
+          <p:cNvPr id="5" name="Image 0" descr="icons/11.png">    </p:cNvPr>
+          <p:cNvPicPr>
+            <a:picLocks noChangeAspect="1"/>
+          </p:cNvPicPr>
+          <p:nvPr/>
+        </p:nvPicPr>
+        <p:blipFill>
+          <a:blip r:embed="rId1"/>
+          <a:stretch>
+            <a:fillRect/>
+          </a:stretch>
+        </p:blipFill>
+        <p:spPr>
+          <a:xfrm>
+            <a:off x="2514600" y="914400"/>
+            <a:ext cx="1188720" cy="1188720"/>
+          </a:xfrm>
+          <a:prstGeom prst="rect">
+            <a:avLst/>
+          </a:prstGeom>
+        </p:spPr>
+      </p:pic>
+      <p:sp>
+        <p:nvSpPr>
+          <p:cNvPr id="6" name="Text 3"/>
           <p:cNvSpPr txBox="1"/>
           <p:nvPr/>
         </p:nvSpPr>
@@ -5972,7 +6092,7 @@
       </p:sp>
       <p:sp>
         <p:nvSpPr>
-          <p:cNvPr id="6" name="Text 4"/>
+          <p:cNvPr id="7" name="Text 4"/>
           <p:cNvSpPr txBox="1"/>
           <p:nvPr/>
         </p:nvSpPr>
@@ -6011,7 +6131,7 @@
       </p:sp>
       <p:sp>
         <p:nvSpPr>
-          <p:cNvPr id="7" name="Text 5"/>
+          <p:cNvPr id="8" name="Text 5"/>
           <p:cNvSpPr txBox="1"/>
           <p:nvPr/>
         </p:nvSpPr>
@@ -6050,7 +6170,7 @@
       </p:sp>
       <p:sp>
         <p:nvSpPr>
-          <p:cNvPr id="8" name="Text 6"/>
+          <p:cNvPr id="9" name="Text 6"/>
           <p:cNvSpPr txBox="1"/>
           <p:nvPr/>
         </p:nvSpPr>
@@ -6089,7 +6209,7 @@
       </p:sp>
       <p:sp>
         <p:nvSpPr>
-          <p:cNvPr id="9" name="Text 7"/>
+          <p:cNvPr id="10" name="Text 7"/>
           <p:cNvSpPr txBox="1"/>
           <p:nvPr/>
         </p:nvSpPr>
@@ -6128,7 +6248,7 @@
       </p:sp>
       <p:sp>
         <p:nvSpPr>
-          <p:cNvPr id="10" name="Shape 8"/>
+          <p:cNvPr id="11" name="Shape 8"/>
           <p:cNvSpPr/>
           <p:nvPr/>
         </p:nvSpPr>
@@ -6148,7 +6268,7 @@
       </p:sp>
       <p:sp>
         <p:nvSpPr>
-          <p:cNvPr id="11" name="Text 9"/>
+          <p:cNvPr id="12" name="Text 9"/>
           <p:cNvSpPr txBox="1"/>
           <p:nvPr/>
         </p:nvSpPr>
@@ -6187,7 +6307,7 @@
       </p:sp>
       <p:sp>
         <p:nvSpPr>
-          <p:cNvPr id="12" name="Text 10"/>
+          <p:cNvPr id="13" name="Text 10"/>
           <p:cNvSpPr txBox="1"/>
           <p:nvPr/>
         </p:nvSpPr>
@@ -6226,7 +6346,7 @@
       </p:sp>
       <p:sp>
         <p:nvSpPr>
-          <p:cNvPr id="13" name="Shape 11"/>
+          <p:cNvPr id="14" name="Shape 11"/>
           <p:cNvSpPr/>
           <p:nvPr/>
         </p:nvSpPr>
@@ -6246,7 +6366,7 @@
       </p:sp>
       <p:sp>
         <p:nvSpPr>
-          <p:cNvPr id="14" name="Text 12"/>
+          <p:cNvPr id="15" name="Text 12"/>
           <p:cNvSpPr txBox="1"/>
           <p:nvPr/>
         </p:nvSpPr>
@@ -6285,7 +6405,7 @@
       </p:sp>
       <p:sp>
         <p:nvSpPr>
-          <p:cNvPr id="15" name="Text 13"/>
+          <p:cNvPr id="16" name="Text 13"/>
           <p:cNvSpPr txBox="1"/>
           <p:nvPr/>
         </p:nvSpPr>
@@ -6324,7 +6444,7 @@
       </p:sp>
       <p:sp>
         <p:nvSpPr>
-          <p:cNvPr id="16" name="Shape 14"/>
+          <p:cNvPr id="17" name="Shape 14"/>
           <p:cNvSpPr/>
           <p:nvPr/>
         </p:nvSpPr>
@@ -6344,7 +6464,7 @@
       </p:sp>
       <p:sp>
         <p:nvSpPr>
-          <p:cNvPr id="17" name="Text 15"/>
+          <p:cNvPr id="18" name="Text 15"/>
           <p:cNvSpPr txBox="1"/>
           <p:nvPr/>
         </p:nvSpPr>
@@ -6383,7 +6503,7 @@
       </p:sp>
       <p:sp>
         <p:nvSpPr>
-          <p:cNvPr id="18" name="Text 16"/>
+          <p:cNvPr id="19" name="Text 16"/>
           <p:cNvSpPr txBox="1"/>
           <p:nvPr/>
         </p:nvSpPr>
@@ -6422,7 +6542,7 @@
       </p:sp>
       <p:sp>
         <p:nvSpPr>
-          <p:cNvPr id="19" name="Shape 17"/>
+          <p:cNvPr id="20" name="Shape 17"/>
           <p:cNvSpPr/>
           <p:nvPr/>
         </p:nvSpPr>
@@ -6442,7 +6562,7 @@
       </p:sp>
       <p:sp>
         <p:nvSpPr>
-          <p:cNvPr id="20" name="Text 18"/>
+          <p:cNvPr id="21" name="Text 18"/>
           <p:cNvSpPr txBox="1"/>
           <p:nvPr/>
         </p:nvSpPr>
@@ -6481,7 +6601,7 @@
       </p:sp>
       <p:sp>
         <p:nvSpPr>
-          <p:cNvPr id="21" name="Text 19"/>
+          <p:cNvPr id="22" name="Text 19"/>
           <p:cNvSpPr txBox="1"/>
           <p:nvPr/>
         </p:nvSpPr>
@@ -6520,7 +6640,7 @@
       </p:sp>
       <p:sp>
         <p:nvSpPr>
-          <p:cNvPr id="22" name="Shape 20"/>
+          <p:cNvPr id="23" name="Shape 20"/>
           <p:cNvSpPr/>
           <p:nvPr/>
         </p:nvSpPr>
@@ -6543,7 +6663,7 @@
       </p:sp>
       <p:sp>
         <p:nvSpPr>
-          <p:cNvPr id="23" name="Shape 21"/>
+          <p:cNvPr id="24" name="Shape 21"/>
           <p:cNvSpPr/>
           <p:nvPr/>
         </p:nvSpPr>
@@ -6568,7 +6688,7 @@
       </p:sp>
       <p:sp>
         <p:nvSpPr>
-          <p:cNvPr id="24" name="Shape 22"/>
+          <p:cNvPr id="25" name="Shape 22"/>
           <p:cNvSpPr/>
           <p:nvPr/>
         </p:nvSpPr>
@@ -6593,7 +6713,7 @@
       </p:sp>
       <p:sp>
         <p:nvSpPr>
-          <p:cNvPr id="25" name="Shape 23"/>
+          <p:cNvPr id="26" name="Shape 23"/>
           <p:cNvSpPr/>
           <p:nvPr/>
         </p:nvSpPr>
@@ -6618,7 +6738,7 @@
       </p:sp>
       <p:sp>
         <p:nvSpPr>
-          <p:cNvPr id="26" name="Shape 24"/>
+          <p:cNvPr id="27" name="Shape 24"/>
           <p:cNvSpPr/>
           <p:nvPr/>
         </p:nvSpPr>
@@ -6643,7 +6763,7 @@
       </p:sp>
       <p:sp>
         <p:nvSpPr>
-          <p:cNvPr id="27" name="Shape 25"/>
+          <p:cNvPr id="28" name="Shape 25"/>
           <p:cNvSpPr/>
           <p:nvPr/>
         </p:nvSpPr>
@@ -6668,7 +6788,7 @@
       </p:sp>
       <p:sp>
         <p:nvSpPr>
-          <p:cNvPr id="28" name="Shape 26"/>
+          <p:cNvPr id="29" name="Shape 26"/>
           <p:cNvSpPr/>
           <p:nvPr/>
         </p:nvSpPr>
@@ -6693,7 +6813,7 @@
       </p:sp>
       <p:sp>
         <p:nvSpPr>
-          <p:cNvPr id="29" name="Shape 27"/>
+          <p:cNvPr id="30" name="Shape 27"/>
           <p:cNvSpPr/>
           <p:nvPr/>
         </p:nvSpPr>
@@ -6718,7 +6838,7 @@
       </p:sp>
       <p:sp>
         <p:nvSpPr>
-          <p:cNvPr id="30" name="Shape 28"/>
+          <p:cNvPr id="31" name="Shape 28"/>
           <p:cNvSpPr/>
           <p:nvPr/>
         </p:nvSpPr>
@@ -6743,7 +6863,7 @@
       </p:sp>
       <p:sp>
         <p:nvSpPr>
-          <p:cNvPr id="31" name="Shape 29"/>
+          <p:cNvPr id="32" name="Shape 29"/>
           <p:cNvSpPr/>
           <p:nvPr/>
         </p:nvSpPr>
@@ -6768,7 +6888,7 @@
       </p:sp>
       <p:sp>
         <p:nvSpPr>
-          <p:cNvPr id="32" name="Shape 30"/>
+          <p:cNvPr id="33" name="Shape 30"/>
           <p:cNvSpPr/>
           <p:nvPr/>
         </p:nvSpPr>
@@ -6793,7 +6913,7 @@
       </p:sp>
       <p:sp>
         <p:nvSpPr>
-          <p:cNvPr id="33" name="Shape 31"/>
+          <p:cNvPr id="34" name="Shape 31"/>
           <p:cNvSpPr/>
           <p:nvPr/>
         </p:nvSpPr>
@@ -6818,7 +6938,7 @@
       </p:sp>
       <p:sp>
         <p:nvSpPr>
-          <p:cNvPr id="34" name="Shape 32"/>
+          <p:cNvPr id="35" name="Shape 32"/>
           <p:cNvSpPr/>
           <p:nvPr/>
         </p:nvSpPr>
@@ -6843,7 +6963,7 @@
       </p:sp>
       <p:sp>
         <p:nvSpPr>
-          <p:cNvPr id="35" name="Shape 33"/>
+          <p:cNvPr id="36" name="Shape 33"/>
           <p:cNvSpPr/>
           <p:nvPr/>
         </p:nvSpPr>
@@ -6868,7 +6988,7 @@
       </p:sp>
       <p:sp>
         <p:nvSpPr>
-          <p:cNvPr id="36" name="Shape 34"/>
+          <p:cNvPr id="37" name="Shape 34"/>
           <p:cNvSpPr/>
           <p:nvPr/>
         </p:nvSpPr>
@@ -6893,23 +7013,23 @@
       </p:sp>
       <p:pic>
         <p:nvPicPr>
-          <p:cNvPr id="3" name="Media 0">
+          <p:cNvPr id="4" name="Media 0">
             <a:hlinkClick r:id="" action="ppaction://media"/>
           </p:cNvPr>
           <p:cNvPicPr>
             <a:picLocks noChangeAspect="1"/>
           </p:cNvPicPr>
           <p:nvPr>
-            <a:videoFile r:link="rId1"/>
+            <a:videoFile r:link="rId2"/>
             <p:extLst>
               <p:ext uri="{DAA4B4D4-6D71-4841-9C94-3DE7FCFB9230}">
-                <p14:media xmlns:p14="http://schemas.microsoft.com/office/powerpoint/2010/main" r:embed="rId2"/>
+                <p14:media xmlns:p14="http://schemas.microsoft.com/office/powerpoint/2010/main" r:embed="rId3"/>
               </p:ext>
             </p:extLst>
           </p:nvPr>
         </p:nvPicPr>
         <p:blipFill>
-          <a:blip r:embed="rId3"/>
+          <a:blip r:embed="rId4"/>
           <a:stretch>
             <a:fillRect/>
           </a:stretch>
@@ -7035,9 +7155,33 @@
           </a:p>
         </p:txBody>
       </p:sp>
-      <p:sp>
-        <p:nvSpPr>
-          <p:cNvPr id="5" name="Text 3"/>
+      <p:pic>
+        <p:nvPicPr>
+          <p:cNvPr id="5" name="Image 0" descr="icons/12.png">    </p:cNvPr>
+          <p:cNvPicPr>
+            <a:picLocks noChangeAspect="1"/>
+          </p:cNvPicPr>
+          <p:nvPr/>
+        </p:nvPicPr>
+        <p:blipFill>
+          <a:blip r:embed="rId1"/>
+          <a:stretch>
+            <a:fillRect/>
+          </a:stretch>
+        </p:blipFill>
+        <p:spPr>
+          <a:xfrm>
+            <a:off x="2514600" y="914400"/>
+            <a:ext cx="1188720" cy="1188720"/>
+          </a:xfrm>
+          <a:prstGeom prst="rect">
+            <a:avLst/>
+          </a:prstGeom>
+        </p:spPr>
+      </p:pic>
+      <p:sp>
+        <p:nvSpPr>
+          <p:cNvPr id="6" name="Text 3"/>
           <p:cNvSpPr txBox="1"/>
           <p:nvPr/>
         </p:nvSpPr>
@@ -7076,7 +7220,7 @@
       </p:sp>
       <p:sp>
         <p:nvSpPr>
-          <p:cNvPr id="6" name="Text 4"/>
+          <p:cNvPr id="7" name="Text 4"/>
           <p:cNvSpPr txBox="1"/>
           <p:nvPr/>
         </p:nvSpPr>
@@ -7115,7 +7259,7 @@
       </p:sp>
       <p:sp>
         <p:nvSpPr>
-          <p:cNvPr id="7" name="Text 5"/>
+          <p:cNvPr id="8" name="Text 5"/>
           <p:cNvSpPr txBox="1"/>
           <p:nvPr/>
         </p:nvSpPr>
@@ -7154,7 +7298,7 @@
       </p:sp>
       <p:sp>
         <p:nvSpPr>
-          <p:cNvPr id="8" name="Text 6"/>
+          <p:cNvPr id="9" name="Text 6"/>
           <p:cNvSpPr txBox="1"/>
           <p:nvPr/>
         </p:nvSpPr>
@@ -7193,7 +7337,7 @@
       </p:sp>
       <p:sp>
         <p:nvSpPr>
-          <p:cNvPr id="9" name="Text 7"/>
+          <p:cNvPr id="10" name="Text 7"/>
           <p:cNvSpPr txBox="1"/>
           <p:nvPr/>
         </p:nvSpPr>
@@ -7232,7 +7376,7 @@
       </p:sp>
       <p:sp>
         <p:nvSpPr>
-          <p:cNvPr id="10" name="Shape 8"/>
+          <p:cNvPr id="11" name="Shape 8"/>
           <p:cNvSpPr/>
           <p:nvPr/>
         </p:nvSpPr>
@@ -7252,7 +7396,7 @@
       </p:sp>
       <p:sp>
         <p:nvSpPr>
-          <p:cNvPr id="11" name="Text 9"/>
+          <p:cNvPr id="12" name="Text 9"/>
           <p:cNvSpPr txBox="1"/>
           <p:nvPr/>
         </p:nvSpPr>
@@ -7291,7 +7435,7 @@
       </p:sp>
       <p:sp>
         <p:nvSpPr>
-          <p:cNvPr id="12" name="Text 10"/>
+          <p:cNvPr id="13" name="Text 10"/>
           <p:cNvSpPr txBox="1"/>
           <p:nvPr/>
         </p:nvSpPr>
@@ -7330,7 +7474,7 @@
       </p:sp>
       <p:sp>
         <p:nvSpPr>
-          <p:cNvPr id="13" name="Shape 11"/>
+          <p:cNvPr id="14" name="Shape 11"/>
           <p:cNvSpPr/>
           <p:nvPr/>
         </p:nvSpPr>
@@ -7350,7 +7494,7 @@
       </p:sp>
       <p:sp>
         <p:nvSpPr>
-          <p:cNvPr id="14" name="Text 12"/>
+          <p:cNvPr id="15" name="Text 12"/>
           <p:cNvSpPr txBox="1"/>
           <p:nvPr/>
         </p:nvSpPr>
@@ -7389,7 +7533,7 @@
       </p:sp>
       <p:sp>
         <p:nvSpPr>
-          <p:cNvPr id="15" name="Text 13"/>
+          <p:cNvPr id="16" name="Text 13"/>
           <p:cNvSpPr txBox="1"/>
           <p:nvPr/>
         </p:nvSpPr>
@@ -7428,7 +7572,7 @@
       </p:sp>
       <p:sp>
         <p:nvSpPr>
-          <p:cNvPr id="16" name="Shape 14"/>
+          <p:cNvPr id="17" name="Shape 14"/>
           <p:cNvSpPr/>
           <p:nvPr/>
         </p:nvSpPr>
@@ -7448,7 +7592,7 @@
       </p:sp>
       <p:sp>
         <p:nvSpPr>
-          <p:cNvPr id="17" name="Text 15"/>
+          <p:cNvPr id="18" name="Text 15"/>
           <p:cNvSpPr txBox="1"/>
           <p:nvPr/>
         </p:nvSpPr>
@@ -7487,7 +7631,7 @@
       </p:sp>
       <p:sp>
         <p:nvSpPr>
-          <p:cNvPr id="18" name="Text 16"/>
+          <p:cNvPr id="19" name="Text 16"/>
           <p:cNvSpPr txBox="1"/>
           <p:nvPr/>
         </p:nvSpPr>
@@ -7526,7 +7670,7 @@
       </p:sp>
       <p:sp>
         <p:nvSpPr>
-          <p:cNvPr id="19" name="Shape 17"/>
+          <p:cNvPr id="20" name="Shape 17"/>
           <p:cNvSpPr/>
           <p:nvPr/>
         </p:nvSpPr>
@@ -7546,7 +7690,7 @@
       </p:sp>
       <p:sp>
         <p:nvSpPr>
-          <p:cNvPr id="20" name="Text 18"/>
+          <p:cNvPr id="21" name="Text 18"/>
           <p:cNvSpPr txBox="1"/>
           <p:nvPr/>
         </p:nvSpPr>
@@ -7585,7 +7729,7 @@
       </p:sp>
       <p:sp>
         <p:nvSpPr>
-          <p:cNvPr id="21" name="Text 19"/>
+          <p:cNvPr id="22" name="Text 19"/>
           <p:cNvSpPr txBox="1"/>
           <p:nvPr/>
         </p:nvSpPr>
@@ -7624,7 +7768,7 @@
       </p:sp>
       <p:sp>
         <p:nvSpPr>
-          <p:cNvPr id="22" name="Shape 20"/>
+          <p:cNvPr id="23" name="Shape 20"/>
           <p:cNvSpPr/>
           <p:nvPr/>
         </p:nvSpPr>
@@ -7647,7 +7791,7 @@
       </p:sp>
       <p:sp>
         <p:nvSpPr>
-          <p:cNvPr id="23" name="Shape 21"/>
+          <p:cNvPr id="24" name="Shape 21"/>
           <p:cNvSpPr/>
           <p:nvPr/>
         </p:nvSpPr>
@@ -7672,7 +7816,7 @@
       </p:sp>
       <p:sp>
         <p:nvSpPr>
-          <p:cNvPr id="24" name="Shape 22"/>
+          <p:cNvPr id="25" name="Shape 22"/>
           <p:cNvSpPr/>
           <p:nvPr/>
         </p:nvSpPr>
@@ -7697,7 +7841,7 @@
       </p:sp>
       <p:sp>
         <p:nvSpPr>
-          <p:cNvPr id="25" name="Shape 23"/>
+          <p:cNvPr id="26" name="Shape 23"/>
           <p:cNvSpPr/>
           <p:nvPr/>
         </p:nvSpPr>
@@ -7722,7 +7866,7 @@
       </p:sp>
       <p:sp>
         <p:nvSpPr>
-          <p:cNvPr id="26" name="Shape 24"/>
+          <p:cNvPr id="27" name="Shape 24"/>
           <p:cNvSpPr/>
           <p:nvPr/>
         </p:nvSpPr>
@@ -7747,7 +7891,7 @@
       </p:sp>
       <p:sp>
         <p:nvSpPr>
-          <p:cNvPr id="27" name="Shape 25"/>
+          <p:cNvPr id="28" name="Shape 25"/>
           <p:cNvSpPr/>
           <p:nvPr/>
         </p:nvSpPr>
@@ -7772,7 +7916,7 @@
       </p:sp>
       <p:sp>
         <p:nvSpPr>
-          <p:cNvPr id="28" name="Shape 26"/>
+          <p:cNvPr id="29" name="Shape 26"/>
           <p:cNvSpPr/>
           <p:nvPr/>
         </p:nvSpPr>
@@ -7797,7 +7941,7 @@
       </p:sp>
       <p:sp>
         <p:nvSpPr>
-          <p:cNvPr id="29" name="Shape 27"/>
+          <p:cNvPr id="30" name="Shape 27"/>
           <p:cNvSpPr/>
           <p:nvPr/>
         </p:nvSpPr>
@@ -7822,7 +7966,7 @@
       </p:sp>
       <p:sp>
         <p:nvSpPr>
-          <p:cNvPr id="30" name="Shape 28"/>
+          <p:cNvPr id="31" name="Shape 28"/>
           <p:cNvSpPr/>
           <p:nvPr/>
         </p:nvSpPr>
@@ -7847,7 +7991,7 @@
       </p:sp>
       <p:sp>
         <p:nvSpPr>
-          <p:cNvPr id="31" name="Shape 29"/>
+          <p:cNvPr id="32" name="Shape 29"/>
           <p:cNvSpPr/>
           <p:nvPr/>
         </p:nvSpPr>
@@ -7872,7 +8016,7 @@
       </p:sp>
       <p:sp>
         <p:nvSpPr>
-          <p:cNvPr id="32" name="Shape 30"/>
+          <p:cNvPr id="33" name="Shape 30"/>
           <p:cNvSpPr/>
           <p:nvPr/>
         </p:nvSpPr>
@@ -7897,7 +8041,7 @@
       </p:sp>
       <p:sp>
         <p:nvSpPr>
-          <p:cNvPr id="33" name="Shape 31"/>
+          <p:cNvPr id="34" name="Shape 31"/>
           <p:cNvSpPr/>
           <p:nvPr/>
         </p:nvSpPr>
@@ -7922,7 +8066,7 @@
       </p:sp>
       <p:sp>
         <p:nvSpPr>
-          <p:cNvPr id="34" name="Shape 32"/>
+          <p:cNvPr id="35" name="Shape 32"/>
           <p:cNvSpPr/>
           <p:nvPr/>
         </p:nvSpPr>
@@ -7947,7 +8091,7 @@
       </p:sp>
       <p:sp>
         <p:nvSpPr>
-          <p:cNvPr id="35" name="Shape 33"/>
+          <p:cNvPr id="36" name="Shape 33"/>
           <p:cNvSpPr/>
           <p:nvPr/>
         </p:nvSpPr>
@@ -7972,7 +8116,7 @@
       </p:sp>
       <p:sp>
         <p:nvSpPr>
-          <p:cNvPr id="36" name="Shape 34"/>
+          <p:cNvPr id="37" name="Shape 34"/>
           <p:cNvSpPr/>
           <p:nvPr/>
         </p:nvSpPr>
@@ -7997,23 +8141,23 @@
       </p:sp>
       <p:pic>
         <p:nvPicPr>
-          <p:cNvPr id="3" name="Media 0">
+          <p:cNvPr id="4" name="Media 0">
             <a:hlinkClick r:id="" action="ppaction://media"/>
           </p:cNvPr>
           <p:cNvPicPr>
             <a:picLocks noChangeAspect="1"/>
           </p:cNvPicPr>
           <p:nvPr>
-            <a:videoFile r:link="rId1"/>
+            <a:videoFile r:link="rId2"/>
             <p:extLst>
               <p:ext uri="{DAA4B4D4-6D71-4841-9C94-3DE7FCFB9230}">
-                <p14:media xmlns:p14="http://schemas.microsoft.com/office/powerpoint/2010/main" r:embed="rId2"/>
+                <p14:media xmlns:p14="http://schemas.microsoft.com/office/powerpoint/2010/main" r:embed="rId3"/>
               </p:ext>
             </p:extLst>
           </p:nvPr>
         </p:nvPicPr>
         <p:blipFill>
-          <a:blip r:embed="rId3"/>
+          <a:blip r:embed="rId4"/>
           <a:stretch>
             <a:fillRect/>
           </a:stretch>
@@ -8139,9 +8283,33 @@
           </a:p>
         </p:txBody>
       </p:sp>
-      <p:sp>
-        <p:nvSpPr>
-          <p:cNvPr id="5" name="Text 3"/>
+      <p:pic>
+        <p:nvPicPr>
+          <p:cNvPr id="5" name="Image 0" descr="icons/13.png">    </p:cNvPr>
+          <p:cNvPicPr>
+            <a:picLocks noChangeAspect="1"/>
+          </p:cNvPicPr>
+          <p:nvPr/>
+        </p:nvPicPr>
+        <p:blipFill>
+          <a:blip r:embed="rId1"/>
+          <a:stretch>
+            <a:fillRect/>
+          </a:stretch>
+        </p:blipFill>
+        <p:spPr>
+          <a:xfrm>
+            <a:off x="2514600" y="914400"/>
+            <a:ext cx="1188720" cy="1188720"/>
+          </a:xfrm>
+          <a:prstGeom prst="rect">
+            <a:avLst/>
+          </a:prstGeom>
+        </p:spPr>
+      </p:pic>
+      <p:sp>
+        <p:nvSpPr>
+          <p:cNvPr id="6" name="Text 3"/>
           <p:cNvSpPr txBox="1"/>
           <p:nvPr/>
         </p:nvSpPr>
@@ -8180,7 +8348,7 @@
       </p:sp>
       <p:sp>
         <p:nvSpPr>
-          <p:cNvPr id="6" name="Text 4"/>
+          <p:cNvPr id="7" name="Text 4"/>
           <p:cNvSpPr txBox="1"/>
           <p:nvPr/>
         </p:nvSpPr>
@@ -8219,7 +8387,7 @@
       </p:sp>
       <p:sp>
         <p:nvSpPr>
-          <p:cNvPr id="7" name="Text 5"/>
+          <p:cNvPr id="8" name="Text 5"/>
           <p:cNvSpPr txBox="1"/>
           <p:nvPr/>
         </p:nvSpPr>
@@ -8258,7 +8426,7 @@
       </p:sp>
       <p:sp>
         <p:nvSpPr>
-          <p:cNvPr id="8" name="Text 6"/>
+          <p:cNvPr id="9" name="Text 6"/>
           <p:cNvSpPr txBox="1"/>
           <p:nvPr/>
         </p:nvSpPr>
@@ -8297,7 +8465,7 @@
       </p:sp>
       <p:sp>
         <p:nvSpPr>
-          <p:cNvPr id="9" name="Text 7"/>
+          <p:cNvPr id="10" name="Text 7"/>
           <p:cNvSpPr txBox="1"/>
           <p:nvPr/>
         </p:nvSpPr>
@@ -8336,7 +8504,7 @@
       </p:sp>
       <p:sp>
         <p:nvSpPr>
-          <p:cNvPr id="10" name="Shape 8"/>
+          <p:cNvPr id="11" name="Shape 8"/>
           <p:cNvSpPr/>
           <p:nvPr/>
         </p:nvSpPr>
@@ -8356,7 +8524,7 @@
       </p:sp>
       <p:sp>
         <p:nvSpPr>
-          <p:cNvPr id="11" name="Text 9"/>
+          <p:cNvPr id="12" name="Text 9"/>
           <p:cNvSpPr txBox="1"/>
           <p:nvPr/>
         </p:nvSpPr>
@@ -8395,7 +8563,7 @@
       </p:sp>
       <p:sp>
         <p:nvSpPr>
-          <p:cNvPr id="12" name="Text 10"/>
+          <p:cNvPr id="13" name="Text 10"/>
           <p:cNvSpPr txBox="1"/>
           <p:nvPr/>
         </p:nvSpPr>
@@ -8434,7 +8602,7 @@
       </p:sp>
       <p:sp>
         <p:nvSpPr>
-          <p:cNvPr id="13" name="Shape 11"/>
+          <p:cNvPr id="14" name="Shape 11"/>
           <p:cNvSpPr/>
           <p:nvPr/>
         </p:nvSpPr>
@@ -8454,7 +8622,7 @@
       </p:sp>
       <p:sp>
         <p:nvSpPr>
-          <p:cNvPr id="14" name="Text 12"/>
+          <p:cNvPr id="15" name="Text 12"/>
           <p:cNvSpPr txBox="1"/>
           <p:nvPr/>
         </p:nvSpPr>
@@ -8493,7 +8661,7 @@
       </p:sp>
       <p:sp>
         <p:nvSpPr>
-          <p:cNvPr id="15" name="Text 13"/>
+          <p:cNvPr id="16" name="Text 13"/>
           <p:cNvSpPr txBox="1"/>
           <p:nvPr/>
         </p:nvSpPr>
@@ -8532,7 +8700,7 @@
       </p:sp>
       <p:sp>
         <p:nvSpPr>
-          <p:cNvPr id="16" name="Shape 14"/>
+          <p:cNvPr id="17" name="Shape 14"/>
           <p:cNvSpPr/>
           <p:nvPr/>
         </p:nvSpPr>
@@ -8552,7 +8720,7 @@
       </p:sp>
       <p:sp>
         <p:nvSpPr>
-          <p:cNvPr id="17" name="Text 15"/>
+          <p:cNvPr id="18" name="Text 15"/>
           <p:cNvSpPr txBox="1"/>
           <p:nvPr/>
         </p:nvSpPr>
@@ -8591,7 +8759,7 @@
       </p:sp>
       <p:sp>
         <p:nvSpPr>
-          <p:cNvPr id="18" name="Text 16"/>
+          <p:cNvPr id="19" name="Text 16"/>
           <p:cNvSpPr txBox="1"/>
           <p:nvPr/>
         </p:nvSpPr>
@@ -8630,7 +8798,7 @@
       </p:sp>
       <p:sp>
         <p:nvSpPr>
-          <p:cNvPr id="19" name="Shape 17"/>
+          <p:cNvPr id="20" name="Shape 17"/>
           <p:cNvSpPr/>
           <p:nvPr/>
         </p:nvSpPr>
@@ -8650,7 +8818,7 @@
       </p:sp>
       <p:sp>
         <p:nvSpPr>
-          <p:cNvPr id="20" name="Text 18"/>
+          <p:cNvPr id="21" name="Text 18"/>
           <p:cNvSpPr txBox="1"/>
           <p:nvPr/>
         </p:nvSpPr>
@@ -8689,7 +8857,7 @@
       </p:sp>
       <p:sp>
         <p:nvSpPr>
-          <p:cNvPr id="21" name="Text 19"/>
+          <p:cNvPr id="22" name="Text 19"/>
           <p:cNvSpPr txBox="1"/>
           <p:nvPr/>
         </p:nvSpPr>
@@ -8728,7 +8896,7 @@
       </p:sp>
       <p:sp>
         <p:nvSpPr>
-          <p:cNvPr id="22" name="Shape 20"/>
+          <p:cNvPr id="23" name="Shape 20"/>
           <p:cNvSpPr/>
           <p:nvPr/>
         </p:nvSpPr>
@@ -8751,7 +8919,7 @@
       </p:sp>
       <p:sp>
         <p:nvSpPr>
-          <p:cNvPr id="23" name="Shape 21"/>
+          <p:cNvPr id="24" name="Shape 21"/>
           <p:cNvSpPr/>
           <p:nvPr/>
         </p:nvSpPr>
@@ -8776,7 +8944,7 @@
       </p:sp>
       <p:sp>
         <p:nvSpPr>
-          <p:cNvPr id="24" name="Shape 22"/>
+          <p:cNvPr id="25" name="Shape 22"/>
           <p:cNvSpPr/>
           <p:nvPr/>
         </p:nvSpPr>
@@ -8801,7 +8969,7 @@
       </p:sp>
       <p:sp>
         <p:nvSpPr>
-          <p:cNvPr id="25" name="Shape 23"/>
+          <p:cNvPr id="26" name="Shape 23"/>
           <p:cNvSpPr/>
           <p:nvPr/>
         </p:nvSpPr>
@@ -8826,7 +8994,7 @@
       </p:sp>
       <p:sp>
         <p:nvSpPr>
-          <p:cNvPr id="26" name="Shape 24"/>
+          <p:cNvPr id="27" name="Shape 24"/>
           <p:cNvSpPr/>
           <p:nvPr/>
         </p:nvSpPr>
@@ -8851,7 +9019,7 @@
       </p:sp>
       <p:sp>
         <p:nvSpPr>
-          <p:cNvPr id="27" name="Shape 25"/>
+          <p:cNvPr id="28" name="Shape 25"/>
           <p:cNvSpPr/>
           <p:nvPr/>
         </p:nvSpPr>
@@ -8876,7 +9044,7 @@
       </p:sp>
       <p:sp>
         <p:nvSpPr>
-          <p:cNvPr id="28" name="Shape 26"/>
+          <p:cNvPr id="29" name="Shape 26"/>
           <p:cNvSpPr/>
           <p:nvPr/>
         </p:nvSpPr>
@@ -8901,7 +9069,7 @@
       </p:sp>
       <p:sp>
         <p:nvSpPr>
-          <p:cNvPr id="29" name="Shape 27"/>
+          <p:cNvPr id="30" name="Shape 27"/>
           <p:cNvSpPr/>
           <p:nvPr/>
         </p:nvSpPr>
@@ -8926,7 +9094,7 @@
       </p:sp>
       <p:sp>
         <p:nvSpPr>
-          <p:cNvPr id="30" name="Shape 28"/>
+          <p:cNvPr id="31" name="Shape 28"/>
           <p:cNvSpPr/>
           <p:nvPr/>
         </p:nvSpPr>
@@ -8951,7 +9119,7 @@
       </p:sp>
       <p:sp>
         <p:nvSpPr>
-          <p:cNvPr id="31" name="Shape 29"/>
+          <p:cNvPr id="32" name="Shape 29"/>
           <p:cNvSpPr/>
           <p:nvPr/>
         </p:nvSpPr>
@@ -8976,7 +9144,7 @@
       </p:sp>
       <p:sp>
         <p:nvSpPr>
-          <p:cNvPr id="32" name="Shape 30"/>
+          <p:cNvPr id="33" name="Shape 30"/>
           <p:cNvSpPr/>
           <p:nvPr/>
         </p:nvSpPr>
@@ -9001,7 +9169,7 @@
       </p:sp>
       <p:sp>
         <p:nvSpPr>
-          <p:cNvPr id="33" name="Shape 31"/>
+          <p:cNvPr id="34" name="Shape 31"/>
           <p:cNvSpPr/>
           <p:nvPr/>
         </p:nvSpPr>
@@ -9026,7 +9194,7 @@
       </p:sp>
       <p:sp>
         <p:nvSpPr>
-          <p:cNvPr id="34" name="Shape 32"/>
+          <p:cNvPr id="35" name="Shape 32"/>
           <p:cNvSpPr/>
           <p:nvPr/>
         </p:nvSpPr>
@@ -9051,7 +9219,7 @@
       </p:sp>
       <p:sp>
         <p:nvSpPr>
-          <p:cNvPr id="35" name="Shape 33"/>
+          <p:cNvPr id="36" name="Shape 33"/>
           <p:cNvSpPr/>
           <p:nvPr/>
         </p:nvSpPr>
@@ -9076,7 +9244,7 @@
       </p:sp>
       <p:sp>
         <p:nvSpPr>
-          <p:cNvPr id="36" name="Shape 34"/>
+          <p:cNvPr id="37" name="Shape 34"/>
           <p:cNvSpPr/>
           <p:nvPr/>
         </p:nvSpPr>
@@ -9101,23 +9269,23 @@
       </p:sp>
       <p:pic>
         <p:nvPicPr>
-          <p:cNvPr id="3" name="Media 0">
+          <p:cNvPr id="4" name="Media 0">
             <a:hlinkClick r:id="" action="ppaction://media"/>
           </p:cNvPr>
           <p:cNvPicPr>
             <a:picLocks noChangeAspect="1"/>
           </p:cNvPicPr>
           <p:nvPr>
-            <a:videoFile r:link="rId1"/>
+            <a:videoFile r:link="rId2"/>
             <p:extLst>
               <p:ext uri="{DAA4B4D4-6D71-4841-9C94-3DE7FCFB9230}">
-                <p14:media xmlns:p14="http://schemas.microsoft.com/office/powerpoint/2010/main" r:embed="rId2"/>
+                <p14:media xmlns:p14="http://schemas.microsoft.com/office/powerpoint/2010/main" r:embed="rId3"/>
               </p:ext>
             </p:extLst>
           </p:nvPr>
         </p:nvPicPr>
         <p:blipFill>
-          <a:blip r:embed="rId3"/>
+          <a:blip r:embed="rId4"/>
           <a:stretch>
             <a:fillRect/>
           </a:stretch>
@@ -9243,9 +9411,33 @@
           </a:p>
         </p:txBody>
       </p:sp>
-      <p:sp>
-        <p:nvSpPr>
-          <p:cNvPr id="5" name="Text 3"/>
+      <p:pic>
+        <p:nvPicPr>
+          <p:cNvPr id="5" name="Image 0" descr="icons/14.png">    </p:cNvPr>
+          <p:cNvPicPr>
+            <a:picLocks noChangeAspect="1"/>
+          </p:cNvPicPr>
+          <p:nvPr/>
+        </p:nvPicPr>
+        <p:blipFill>
+          <a:blip r:embed="rId1"/>
+          <a:stretch>
+            <a:fillRect/>
+          </a:stretch>
+        </p:blipFill>
+        <p:spPr>
+          <a:xfrm>
+            <a:off x="2514600" y="914400"/>
+            <a:ext cx="1188720" cy="1188720"/>
+          </a:xfrm>
+          <a:prstGeom prst="rect">
+            <a:avLst/>
+          </a:prstGeom>
+        </p:spPr>
+      </p:pic>
+      <p:sp>
+        <p:nvSpPr>
+          <p:cNvPr id="6" name="Text 3"/>
           <p:cNvSpPr txBox="1"/>
           <p:nvPr/>
         </p:nvSpPr>
@@ -9284,7 +9476,7 @@
       </p:sp>
       <p:sp>
         <p:nvSpPr>
-          <p:cNvPr id="6" name="Text 4"/>
+          <p:cNvPr id="7" name="Text 4"/>
           <p:cNvSpPr txBox="1"/>
           <p:nvPr/>
         </p:nvSpPr>
@@ -9323,7 +9515,7 @@
       </p:sp>
       <p:sp>
         <p:nvSpPr>
-          <p:cNvPr id="7" name="Text 5"/>
+          <p:cNvPr id="8" name="Text 5"/>
           <p:cNvSpPr txBox="1"/>
           <p:nvPr/>
         </p:nvSpPr>
@@ -9362,7 +9554,7 @@
       </p:sp>
       <p:sp>
         <p:nvSpPr>
-          <p:cNvPr id="8" name="Text 6"/>
+          <p:cNvPr id="9" name="Text 6"/>
           <p:cNvSpPr txBox="1"/>
           <p:nvPr/>
         </p:nvSpPr>
@@ -9401,7 +9593,7 @@
       </p:sp>
       <p:sp>
         <p:nvSpPr>
-          <p:cNvPr id="9" name="Text 7"/>
+          <p:cNvPr id="10" name="Text 7"/>
           <p:cNvSpPr txBox="1"/>
           <p:nvPr/>
         </p:nvSpPr>
@@ -9440,7 +9632,7 @@
       </p:sp>
       <p:sp>
         <p:nvSpPr>
-          <p:cNvPr id="10" name="Shape 8"/>
+          <p:cNvPr id="11" name="Shape 8"/>
           <p:cNvSpPr/>
           <p:nvPr/>
         </p:nvSpPr>
@@ -9460,7 +9652,7 @@
       </p:sp>
       <p:sp>
         <p:nvSpPr>
-          <p:cNvPr id="11" name="Text 9"/>
+          <p:cNvPr id="12" name="Text 9"/>
           <p:cNvSpPr txBox="1"/>
           <p:nvPr/>
         </p:nvSpPr>
@@ -9499,7 +9691,7 @@
       </p:sp>
       <p:sp>
         <p:nvSpPr>
-          <p:cNvPr id="12" name="Text 10"/>
+          <p:cNvPr id="13" name="Text 10"/>
           <p:cNvSpPr txBox="1"/>
           <p:nvPr/>
         </p:nvSpPr>
@@ -9538,7 +9730,7 @@
       </p:sp>
       <p:sp>
         <p:nvSpPr>
-          <p:cNvPr id="13" name="Shape 11"/>
+          <p:cNvPr id="14" name="Shape 11"/>
           <p:cNvSpPr/>
           <p:nvPr/>
         </p:nvSpPr>
@@ -9558,7 +9750,7 @@
       </p:sp>
       <p:sp>
         <p:nvSpPr>
-          <p:cNvPr id="14" name="Text 12"/>
+          <p:cNvPr id="15" name="Text 12"/>
           <p:cNvSpPr txBox="1"/>
           <p:nvPr/>
         </p:nvSpPr>
@@ -9597,7 +9789,7 @@
       </p:sp>
       <p:sp>
         <p:nvSpPr>
-          <p:cNvPr id="15" name="Text 13"/>
+          <p:cNvPr id="16" name="Text 13"/>
           <p:cNvSpPr txBox="1"/>
           <p:nvPr/>
         </p:nvSpPr>
@@ -9636,7 +9828,7 @@
       </p:sp>
       <p:sp>
         <p:nvSpPr>
-          <p:cNvPr id="16" name="Shape 14"/>
+          <p:cNvPr id="17" name="Shape 14"/>
           <p:cNvSpPr/>
           <p:nvPr/>
         </p:nvSpPr>
@@ -9656,7 +9848,7 @@
       </p:sp>
       <p:sp>
         <p:nvSpPr>
-          <p:cNvPr id="17" name="Text 15"/>
+          <p:cNvPr id="18" name="Text 15"/>
           <p:cNvSpPr txBox="1"/>
           <p:nvPr/>
         </p:nvSpPr>
@@ -9695,7 +9887,7 @@
       </p:sp>
       <p:sp>
         <p:nvSpPr>
-          <p:cNvPr id="18" name="Text 16"/>
+          <p:cNvPr id="19" name="Text 16"/>
           <p:cNvSpPr txBox="1"/>
           <p:nvPr/>
         </p:nvSpPr>
@@ -9734,7 +9926,7 @@
       </p:sp>
       <p:sp>
         <p:nvSpPr>
-          <p:cNvPr id="19" name="Shape 17"/>
+          <p:cNvPr id="20" name="Shape 17"/>
           <p:cNvSpPr/>
           <p:nvPr/>
         </p:nvSpPr>
@@ -9754,7 +9946,7 @@
       </p:sp>
       <p:sp>
         <p:nvSpPr>
-          <p:cNvPr id="20" name="Text 18"/>
+          <p:cNvPr id="21" name="Text 18"/>
           <p:cNvSpPr txBox="1"/>
           <p:nvPr/>
         </p:nvSpPr>
@@ -9793,7 +9985,7 @@
       </p:sp>
       <p:sp>
         <p:nvSpPr>
-          <p:cNvPr id="21" name="Text 19"/>
+          <p:cNvPr id="22" name="Text 19"/>
           <p:cNvSpPr txBox="1"/>
           <p:nvPr/>
         </p:nvSpPr>
@@ -9832,7 +10024,7 @@
       </p:sp>
       <p:sp>
         <p:nvSpPr>
-          <p:cNvPr id="22" name="Shape 20"/>
+          <p:cNvPr id="23" name="Shape 20"/>
           <p:cNvSpPr/>
           <p:nvPr/>
         </p:nvSpPr>
@@ -9855,7 +10047,7 @@
       </p:sp>
       <p:sp>
         <p:nvSpPr>
-          <p:cNvPr id="23" name="Shape 21"/>
+          <p:cNvPr id="24" name="Shape 21"/>
           <p:cNvSpPr/>
           <p:nvPr/>
         </p:nvSpPr>
@@ -9880,7 +10072,7 @@
       </p:sp>
       <p:sp>
         <p:nvSpPr>
-          <p:cNvPr id="24" name="Shape 22"/>
+          <p:cNvPr id="25" name="Shape 22"/>
           <p:cNvSpPr/>
           <p:nvPr/>
         </p:nvSpPr>
@@ -9905,7 +10097,7 @@
       </p:sp>
       <p:sp>
         <p:nvSpPr>
-          <p:cNvPr id="25" name="Shape 23"/>
+          <p:cNvPr id="26" name="Shape 23"/>
           <p:cNvSpPr/>
           <p:nvPr/>
         </p:nvSpPr>
@@ -9930,7 +10122,7 @@
       </p:sp>
       <p:sp>
         <p:nvSpPr>
-          <p:cNvPr id="26" name="Shape 24"/>
+          <p:cNvPr id="27" name="Shape 24"/>
           <p:cNvSpPr/>
           <p:nvPr/>
         </p:nvSpPr>
@@ -9955,7 +10147,7 @@
       </p:sp>
       <p:sp>
         <p:nvSpPr>
-          <p:cNvPr id="27" name="Shape 25"/>
+          <p:cNvPr id="28" name="Shape 25"/>
           <p:cNvSpPr/>
           <p:nvPr/>
         </p:nvSpPr>
@@ -9980,7 +10172,7 @@
       </p:sp>
       <p:sp>
         <p:nvSpPr>
-          <p:cNvPr id="28" name="Shape 26"/>
+          <p:cNvPr id="29" name="Shape 26"/>
           <p:cNvSpPr/>
           <p:nvPr/>
         </p:nvSpPr>
@@ -10005,7 +10197,7 @@
       </p:sp>
       <p:sp>
         <p:nvSpPr>
-          <p:cNvPr id="29" name="Shape 27"/>
+          <p:cNvPr id="30" name="Shape 27"/>
           <p:cNvSpPr/>
           <p:nvPr/>
         </p:nvSpPr>
@@ -10030,7 +10222,7 @@
       </p:sp>
       <p:sp>
         <p:nvSpPr>
-          <p:cNvPr id="30" name="Shape 28"/>
+          <p:cNvPr id="31" name="Shape 28"/>
           <p:cNvSpPr/>
           <p:nvPr/>
         </p:nvSpPr>
@@ -10055,7 +10247,7 @@
       </p:sp>
       <p:sp>
         <p:nvSpPr>
-          <p:cNvPr id="31" name="Shape 29"/>
+          <p:cNvPr id="32" name="Shape 29"/>
           <p:cNvSpPr/>
           <p:nvPr/>
         </p:nvSpPr>
@@ -10080,7 +10272,7 @@
       </p:sp>
       <p:sp>
         <p:nvSpPr>
-          <p:cNvPr id="32" name="Shape 30"/>
+          <p:cNvPr id="33" name="Shape 30"/>
           <p:cNvSpPr/>
           <p:nvPr/>
         </p:nvSpPr>
@@ -10105,7 +10297,7 @@
       </p:sp>
       <p:sp>
         <p:nvSpPr>
-          <p:cNvPr id="33" name="Shape 31"/>
+          <p:cNvPr id="34" name="Shape 31"/>
           <p:cNvSpPr/>
           <p:nvPr/>
         </p:nvSpPr>
@@ -10130,7 +10322,7 @@
       </p:sp>
       <p:sp>
         <p:nvSpPr>
-          <p:cNvPr id="34" name="Shape 32"/>
+          <p:cNvPr id="35" name="Shape 32"/>
           <p:cNvSpPr/>
           <p:nvPr/>
         </p:nvSpPr>
@@ -10155,7 +10347,7 @@
       </p:sp>
       <p:sp>
         <p:nvSpPr>
-          <p:cNvPr id="35" name="Shape 33"/>
+          <p:cNvPr id="36" name="Shape 33"/>
           <p:cNvSpPr/>
           <p:nvPr/>
         </p:nvSpPr>
@@ -10180,7 +10372,7 @@
       </p:sp>
       <p:sp>
         <p:nvSpPr>
-          <p:cNvPr id="36" name="Shape 34"/>
+          <p:cNvPr id="37" name="Shape 34"/>
           <p:cNvSpPr/>
           <p:nvPr/>
         </p:nvSpPr>
@@ -10205,23 +10397,23 @@
       </p:sp>
       <p:pic>
         <p:nvPicPr>
-          <p:cNvPr id="3" name="Media 0">
+          <p:cNvPr id="4" name="Media 0">
             <a:hlinkClick r:id="" action="ppaction://media"/>
           </p:cNvPr>
           <p:cNvPicPr>
             <a:picLocks noChangeAspect="1"/>
           </p:cNvPicPr>
           <p:nvPr>
-            <a:videoFile r:link="rId1"/>
+            <a:videoFile r:link="rId2"/>
             <p:extLst>
               <p:ext uri="{DAA4B4D4-6D71-4841-9C94-3DE7FCFB9230}">
-                <p14:media xmlns:p14="http://schemas.microsoft.com/office/powerpoint/2010/main" r:embed="rId2"/>
+                <p14:media xmlns:p14="http://schemas.microsoft.com/office/powerpoint/2010/main" r:embed="rId3"/>
               </p:ext>
             </p:extLst>
           </p:nvPr>
         </p:nvPicPr>
         <p:blipFill>
-          <a:blip r:embed="rId3"/>
+          <a:blip r:embed="rId4"/>
           <a:stretch>
             <a:fillRect/>
           </a:stretch>
@@ -10268,15 +10460,39 @@
           <a:chExt cx="0" cy="0"/>
         </a:xfrm>
       </p:grpSpPr>
-      <p:sp>
-        <p:nvSpPr>
-          <p:cNvPr id="2" name="Text 0"/>
-          <p:cNvSpPr txBox="1"/>
-          <p:nvPr/>
-        </p:nvSpPr>
-        <p:spPr>
-          <a:xfrm>
-            <a:off x="731520" y="1463040"/>
+      <p:pic>
+        <p:nvPicPr>
+          <p:cNvPr id="2" name="Image 0" descr="icons/cover.png">    </p:cNvPr>
+          <p:cNvPicPr>
+            <a:picLocks noChangeAspect="1"/>
+          </p:cNvPicPr>
+          <p:nvPr/>
+        </p:nvPicPr>
+        <p:blipFill>
+          <a:blip r:embed="rId1"/>
+          <a:stretch>
+            <a:fillRect/>
+          </a:stretch>
+        </p:blipFill>
+        <p:spPr>
+          <a:xfrm>
+            <a:off x="5547208" y="548640"/>
+            <a:ext cx="1097280" cy="1097280"/>
+          </a:xfrm>
+          <a:prstGeom prst="rect">
+            <a:avLst/>
+          </a:prstGeom>
+        </p:spPr>
+      </p:pic>
+      <p:sp>
+        <p:nvSpPr>
+          <p:cNvPr id="3" name="Text 0"/>
+          <p:cNvSpPr txBox="1"/>
+          <p:nvPr/>
+        </p:nvSpPr>
+        <p:spPr>
+          <a:xfrm>
+            <a:off x="731520" y="1920240"/>
             <a:ext cx="10728655" cy="914400"/>
           </a:xfrm>
           <a:prstGeom prst="rect">
@@ -10309,13 +10525,13 @@
       </p:sp>
       <p:sp>
         <p:nvSpPr>
-          <p:cNvPr id="3" name="Text 1"/>
-          <p:cNvSpPr txBox="1"/>
-          <p:nvPr/>
-        </p:nvSpPr>
-        <p:spPr>
-          <a:xfrm>
-            <a:off x="731520" y="2468880"/>
+          <p:cNvPr id="4" name="Text 1"/>
+          <p:cNvSpPr txBox="1"/>
+          <p:nvPr/>
+        </p:nvSpPr>
+        <p:spPr>
+          <a:xfrm>
+            <a:off x="731520" y="2834640"/>
             <a:ext cx="10728655" cy="914400"/>
           </a:xfrm>
           <a:prstGeom prst="rect">
@@ -10348,13 +10564,13 @@
       </p:sp>
       <p:sp>
         <p:nvSpPr>
-          <p:cNvPr id="4" name="Text 2"/>
-          <p:cNvSpPr txBox="1"/>
-          <p:nvPr/>
-        </p:nvSpPr>
-        <p:spPr>
-          <a:xfrm>
-            <a:off x="731520" y="3931920"/>
+          <p:cNvPr id="5" name="Text 2"/>
+          <p:cNvSpPr txBox="1"/>
+          <p:nvPr/>
+        </p:nvSpPr>
+        <p:spPr>
+          <a:xfrm>
+            <a:off x="731520" y="4206240"/>
             <a:ext cx="10728655" cy="640080"/>
           </a:xfrm>
           <a:prstGeom prst="rect">
@@ -10387,7 +10603,7 @@
       </p:sp>
       <p:sp>
         <p:nvSpPr>
-          <p:cNvPr id="5" name="Text 3"/>
+          <p:cNvPr id="6" name="Text 3"/>
           <p:cNvSpPr txBox="1"/>
           <p:nvPr/>
         </p:nvSpPr>
@@ -10426,23 +10642,23 @@
       </p:sp>
       <p:pic>
         <p:nvPicPr>
-          <p:cNvPr id="3" name="Media 0">
+          <p:cNvPr id="4" name="Media 0">
             <a:hlinkClick r:id="" action="ppaction://media"/>
           </p:cNvPr>
           <p:cNvPicPr>
             <a:picLocks noChangeAspect="1"/>
           </p:cNvPicPr>
           <p:nvPr>
-            <a:videoFile r:link="rId1"/>
+            <a:videoFile r:link="rId2"/>
             <p:extLst>
               <p:ext uri="{DAA4B4D4-6D71-4841-9C94-3DE7FCFB9230}">
-                <p14:media xmlns:p14="http://schemas.microsoft.com/office/powerpoint/2010/main" r:embed="rId2"/>
+                <p14:media xmlns:p14="http://schemas.microsoft.com/office/powerpoint/2010/main" r:embed="rId3"/>
               </p:ext>
             </p:extLst>
           </p:nvPr>
         </p:nvPicPr>
         <p:blipFill>
-          <a:blip r:embed="rId3"/>
+          <a:blip r:embed="rId4"/>
           <a:stretch>
             <a:fillRect/>
           </a:stretch>
@@ -10667,9 +10883,33 @@
           </a:p>
         </p:txBody>
       </p:sp>
-      <p:sp>
-        <p:nvSpPr>
-          <p:cNvPr id="7" name="Text 5"/>
+      <p:pic>
+        <p:nvPicPr>
+          <p:cNvPr id="7" name="Image 0" descr="icons/1.png">    </p:cNvPr>
+          <p:cNvPicPr>
+            <a:picLocks noChangeAspect="1"/>
+          </p:cNvPicPr>
+          <p:nvPr/>
+        </p:nvPicPr>
+        <p:blipFill>
+          <a:blip r:embed="rId1"/>
+          <a:stretch>
+            <a:fillRect/>
+          </a:stretch>
+        </p:blipFill>
+        <p:spPr>
+          <a:xfrm>
+            <a:off x="1526134" y="1965960"/>
+            <a:ext cx="365760" cy="365760"/>
+          </a:xfrm>
+          <a:prstGeom prst="rect">
+            <a:avLst/>
+          </a:prstGeom>
+        </p:spPr>
+      </p:pic>
+      <p:sp>
+        <p:nvSpPr>
+          <p:cNvPr id="8" name="Text 5"/>
           <p:cNvSpPr txBox="1"/>
           <p:nvPr/>
         </p:nvSpPr>
@@ -10708,7 +10948,7 @@
       </p:sp>
       <p:sp>
         <p:nvSpPr>
-          <p:cNvPr id="8" name="Text 6"/>
+          <p:cNvPr id="9" name="Text 6"/>
           <p:cNvSpPr txBox="1"/>
           <p:nvPr/>
         </p:nvSpPr>
@@ -10747,7 +10987,7 @@
       </p:sp>
       <p:sp>
         <p:nvSpPr>
-          <p:cNvPr id="9" name="Shape 7"/>
+          <p:cNvPr id="10" name="Shape 7"/>
           <p:cNvSpPr/>
           <p:nvPr/>
         </p:nvSpPr>
@@ -10774,7 +11014,7 @@
       </p:sp>
       <p:sp>
         <p:nvSpPr>
-          <p:cNvPr id="10" name="Shape 8"/>
+          <p:cNvPr id="11" name="Shape 8"/>
           <p:cNvSpPr/>
           <p:nvPr/>
         </p:nvSpPr>
@@ -10794,7 +11034,7 @@
       </p:sp>
       <p:sp>
         <p:nvSpPr>
-          <p:cNvPr id="11" name="Text 9"/>
+          <p:cNvPr id="12" name="Text 9"/>
           <p:cNvSpPr txBox="1"/>
           <p:nvPr/>
         </p:nvSpPr>
@@ -10831,9 +11071,33 @@
           </a:p>
         </p:txBody>
       </p:sp>
-      <p:sp>
-        <p:nvSpPr>
-          <p:cNvPr id="12" name="Text 10"/>
+      <p:pic>
+        <p:nvPicPr>
+          <p:cNvPr id="13" name="Image 1" descr="icons/2.png">    </p:cNvPr>
+          <p:cNvPicPr>
+            <a:picLocks noChangeAspect="1"/>
+          </p:cNvPicPr>
+          <p:nvPr/>
+        </p:nvPicPr>
+        <p:blipFill>
+          <a:blip r:embed="rId2"/>
+          <a:stretch>
+            <a:fillRect/>
+          </a:stretch>
+        </p:blipFill>
+        <p:spPr>
+          <a:xfrm>
+            <a:off x="3097987" y="1965960"/>
+            <a:ext cx="365760" cy="365760"/>
+          </a:xfrm>
+          <a:prstGeom prst="rect">
+            <a:avLst/>
+          </a:prstGeom>
+        </p:spPr>
+      </p:pic>
+      <p:sp>
+        <p:nvSpPr>
+          <p:cNvPr id="14" name="Text 10"/>
           <p:cNvSpPr txBox="1"/>
           <p:nvPr/>
         </p:nvSpPr>
@@ -10872,7 +11136,7 @@
       </p:sp>
       <p:sp>
         <p:nvSpPr>
-          <p:cNvPr id="13" name="Text 11"/>
+          <p:cNvPr id="15" name="Text 11"/>
           <p:cNvSpPr txBox="1"/>
           <p:nvPr/>
         </p:nvSpPr>
@@ -10911,7 +11175,7 @@
       </p:sp>
       <p:sp>
         <p:nvSpPr>
-          <p:cNvPr id="14" name="Shape 12"/>
+          <p:cNvPr id="16" name="Shape 12"/>
           <p:cNvSpPr/>
           <p:nvPr/>
         </p:nvSpPr>
@@ -10938,7 +11202,7 @@
       </p:sp>
       <p:sp>
         <p:nvSpPr>
-          <p:cNvPr id="15" name="Shape 13"/>
+          <p:cNvPr id="17" name="Shape 13"/>
           <p:cNvSpPr/>
           <p:nvPr/>
         </p:nvSpPr>
@@ -10958,7 +11222,7 @@
       </p:sp>
       <p:sp>
         <p:nvSpPr>
-          <p:cNvPr id="16" name="Text 14"/>
+          <p:cNvPr id="18" name="Text 14"/>
           <p:cNvSpPr txBox="1"/>
           <p:nvPr/>
         </p:nvSpPr>
@@ -10995,9 +11259,33 @@
           </a:p>
         </p:txBody>
       </p:sp>
-      <p:sp>
-        <p:nvSpPr>
-          <p:cNvPr id="17" name="Text 15"/>
+      <p:pic>
+        <p:nvPicPr>
+          <p:cNvPr id="19" name="Image 2" descr="icons/3.png">    </p:cNvPr>
+          <p:cNvPicPr>
+            <a:picLocks noChangeAspect="1"/>
+          </p:cNvPicPr>
+          <p:nvPr/>
+        </p:nvPicPr>
+        <p:blipFill>
+          <a:blip r:embed="rId3"/>
+          <a:stretch>
+            <a:fillRect/>
+          </a:stretch>
+        </p:blipFill>
+        <p:spPr>
+          <a:xfrm>
+            <a:off x="4669841" y="1965960"/>
+            <a:ext cx="365760" cy="365760"/>
+          </a:xfrm>
+          <a:prstGeom prst="rect">
+            <a:avLst/>
+          </a:prstGeom>
+        </p:spPr>
+      </p:pic>
+      <p:sp>
+        <p:nvSpPr>
+          <p:cNvPr id="20" name="Text 15"/>
           <p:cNvSpPr txBox="1"/>
           <p:nvPr/>
         </p:nvSpPr>
@@ -11036,7 +11324,7 @@
       </p:sp>
       <p:sp>
         <p:nvSpPr>
-          <p:cNvPr id="18" name="Text 16"/>
+          <p:cNvPr id="21" name="Text 16"/>
           <p:cNvSpPr txBox="1"/>
           <p:nvPr/>
         </p:nvSpPr>
@@ -11075,7 +11363,7 @@
       </p:sp>
       <p:sp>
         <p:nvSpPr>
-          <p:cNvPr id="19" name="Shape 17"/>
+          <p:cNvPr id="22" name="Shape 17"/>
           <p:cNvSpPr/>
           <p:nvPr/>
         </p:nvSpPr>
@@ -11102,7 +11390,7 @@
       </p:sp>
       <p:sp>
         <p:nvSpPr>
-          <p:cNvPr id="20" name="Shape 18"/>
+          <p:cNvPr id="23" name="Shape 18"/>
           <p:cNvSpPr/>
           <p:nvPr/>
         </p:nvSpPr>
@@ -11122,7 +11410,7 @@
       </p:sp>
       <p:sp>
         <p:nvSpPr>
-          <p:cNvPr id="21" name="Text 19"/>
+          <p:cNvPr id="24" name="Text 19"/>
           <p:cNvSpPr txBox="1"/>
           <p:nvPr/>
         </p:nvSpPr>
@@ -11159,9 +11447,33 @@
           </a:p>
         </p:txBody>
       </p:sp>
-      <p:sp>
-        <p:nvSpPr>
-          <p:cNvPr id="22" name="Text 20"/>
+      <p:pic>
+        <p:nvPicPr>
+          <p:cNvPr id="25" name="Image 3" descr="icons/4.png">    </p:cNvPr>
+          <p:cNvPicPr>
+            <a:picLocks noChangeAspect="1"/>
+          </p:cNvPicPr>
+          <p:nvPr/>
+        </p:nvPicPr>
+        <p:blipFill>
+          <a:blip r:embed="rId4"/>
+          <a:stretch>
+            <a:fillRect/>
+          </a:stretch>
+        </p:blipFill>
+        <p:spPr>
+          <a:xfrm>
+            <a:off x="6241694" y="1965960"/>
+            <a:ext cx="365760" cy="365760"/>
+          </a:xfrm>
+          <a:prstGeom prst="rect">
+            <a:avLst/>
+          </a:prstGeom>
+        </p:spPr>
+      </p:pic>
+      <p:sp>
+        <p:nvSpPr>
+          <p:cNvPr id="26" name="Text 20"/>
           <p:cNvSpPr txBox="1"/>
           <p:nvPr/>
         </p:nvSpPr>
@@ -11200,7 +11512,7 @@
       </p:sp>
       <p:sp>
         <p:nvSpPr>
-          <p:cNvPr id="23" name="Text 21"/>
+          <p:cNvPr id="27" name="Text 21"/>
           <p:cNvSpPr txBox="1"/>
           <p:nvPr/>
         </p:nvSpPr>
@@ -11239,7 +11551,7 @@
       </p:sp>
       <p:sp>
         <p:nvSpPr>
-          <p:cNvPr id="24" name="Shape 22"/>
+          <p:cNvPr id="28" name="Shape 22"/>
           <p:cNvSpPr/>
           <p:nvPr/>
         </p:nvSpPr>
@@ -11266,7 +11578,7 @@
       </p:sp>
       <p:sp>
         <p:nvSpPr>
-          <p:cNvPr id="25" name="Shape 23"/>
+          <p:cNvPr id="29" name="Shape 23"/>
           <p:cNvSpPr/>
           <p:nvPr/>
         </p:nvSpPr>
@@ -11286,7 +11598,7 @@
       </p:sp>
       <p:sp>
         <p:nvSpPr>
-          <p:cNvPr id="26" name="Text 24"/>
+          <p:cNvPr id="30" name="Text 24"/>
           <p:cNvSpPr txBox="1"/>
           <p:nvPr/>
         </p:nvSpPr>
@@ -11323,9 +11635,33 @@
           </a:p>
         </p:txBody>
       </p:sp>
-      <p:sp>
-        <p:nvSpPr>
-          <p:cNvPr id="27" name="Text 25"/>
+      <p:pic>
+        <p:nvPicPr>
+          <p:cNvPr id="31" name="Image 4" descr="icons/5.png">    </p:cNvPr>
+          <p:cNvPicPr>
+            <a:picLocks noChangeAspect="1"/>
+          </p:cNvPicPr>
+          <p:nvPr/>
+        </p:nvPicPr>
+        <p:blipFill>
+          <a:blip r:embed="rId5"/>
+          <a:stretch>
+            <a:fillRect/>
+          </a:stretch>
+        </p:blipFill>
+        <p:spPr>
+          <a:xfrm>
+            <a:off x="7813548" y="1965960"/>
+            <a:ext cx="365760" cy="365760"/>
+          </a:xfrm>
+          <a:prstGeom prst="rect">
+            <a:avLst/>
+          </a:prstGeom>
+        </p:spPr>
+      </p:pic>
+      <p:sp>
+        <p:nvSpPr>
+          <p:cNvPr id="32" name="Text 25"/>
           <p:cNvSpPr txBox="1"/>
           <p:nvPr/>
         </p:nvSpPr>
@@ -11364,7 +11700,7 @@
       </p:sp>
       <p:sp>
         <p:nvSpPr>
-          <p:cNvPr id="28" name="Text 26"/>
+          <p:cNvPr id="33" name="Text 26"/>
           <p:cNvSpPr txBox="1"/>
           <p:nvPr/>
         </p:nvSpPr>
@@ -11403,7 +11739,7 @@
       </p:sp>
       <p:sp>
         <p:nvSpPr>
-          <p:cNvPr id="29" name="Shape 27"/>
+          <p:cNvPr id="34" name="Shape 27"/>
           <p:cNvSpPr/>
           <p:nvPr/>
         </p:nvSpPr>
@@ -11430,7 +11766,7 @@
       </p:sp>
       <p:sp>
         <p:nvSpPr>
-          <p:cNvPr id="30" name="Shape 28"/>
+          <p:cNvPr id="35" name="Shape 28"/>
           <p:cNvSpPr/>
           <p:nvPr/>
         </p:nvSpPr>
@@ -11450,7 +11786,7 @@
       </p:sp>
       <p:sp>
         <p:nvSpPr>
-          <p:cNvPr id="31" name="Text 29"/>
+          <p:cNvPr id="36" name="Text 29"/>
           <p:cNvSpPr txBox="1"/>
           <p:nvPr/>
         </p:nvSpPr>
@@ -11487,9 +11823,33 @@
           </a:p>
         </p:txBody>
       </p:sp>
-      <p:sp>
-        <p:nvSpPr>
-          <p:cNvPr id="32" name="Text 30"/>
+      <p:pic>
+        <p:nvPicPr>
+          <p:cNvPr id="37" name="Image 5" descr="icons/6.png">    </p:cNvPr>
+          <p:cNvPicPr>
+            <a:picLocks noChangeAspect="1"/>
+          </p:cNvPicPr>
+          <p:nvPr/>
+        </p:nvPicPr>
+        <p:blipFill>
+          <a:blip r:embed="rId6"/>
+          <a:stretch>
+            <a:fillRect/>
+          </a:stretch>
+        </p:blipFill>
+        <p:spPr>
+          <a:xfrm>
+            <a:off x="9385402" y="1965960"/>
+            <a:ext cx="365760" cy="365760"/>
+          </a:xfrm>
+          <a:prstGeom prst="rect">
+            <a:avLst/>
+          </a:prstGeom>
+        </p:spPr>
+      </p:pic>
+      <p:sp>
+        <p:nvSpPr>
+          <p:cNvPr id="38" name="Text 30"/>
           <p:cNvSpPr txBox="1"/>
           <p:nvPr/>
         </p:nvSpPr>
@@ -11528,7 +11888,7 @@
       </p:sp>
       <p:sp>
         <p:nvSpPr>
-          <p:cNvPr id="33" name="Text 31"/>
+          <p:cNvPr id="39" name="Text 31"/>
           <p:cNvSpPr txBox="1"/>
           <p:nvPr/>
         </p:nvSpPr>
@@ -11567,7 +11927,7 @@
       </p:sp>
       <p:sp>
         <p:nvSpPr>
-          <p:cNvPr id="34" name="Shape 32"/>
+          <p:cNvPr id="40" name="Shape 32"/>
           <p:cNvSpPr/>
           <p:nvPr/>
         </p:nvSpPr>
@@ -11594,7 +11954,7 @@
       </p:sp>
       <p:sp>
         <p:nvSpPr>
-          <p:cNvPr id="35" name="Shape 33"/>
+          <p:cNvPr id="41" name="Shape 33"/>
           <p:cNvSpPr/>
           <p:nvPr/>
         </p:nvSpPr>
@@ -11614,7 +11974,7 @@
       </p:sp>
       <p:sp>
         <p:nvSpPr>
-          <p:cNvPr id="36" name="Text 34"/>
+          <p:cNvPr id="42" name="Text 34"/>
           <p:cNvSpPr txBox="1"/>
           <p:nvPr/>
         </p:nvSpPr>
@@ -11651,9 +12011,33 @@
           </a:p>
         </p:txBody>
       </p:sp>
-      <p:sp>
-        <p:nvSpPr>
-          <p:cNvPr id="37" name="Text 35"/>
+      <p:pic>
+        <p:nvPicPr>
+          <p:cNvPr id="43" name="Image 6" descr="icons/7.png">    </p:cNvPr>
+          <p:cNvPicPr>
+            <a:picLocks noChangeAspect="1"/>
+          </p:cNvPicPr>
+          <p:nvPr/>
+        </p:nvPicPr>
+        <p:blipFill>
+          <a:blip r:embed="rId7"/>
+          <a:stretch>
+            <a:fillRect/>
+          </a:stretch>
+        </p:blipFill>
+        <p:spPr>
+          <a:xfrm>
+            <a:off x="10957255" y="1965960"/>
+            <a:ext cx="365760" cy="365760"/>
+          </a:xfrm>
+          <a:prstGeom prst="rect">
+            <a:avLst/>
+          </a:prstGeom>
+        </p:spPr>
+      </p:pic>
+      <p:sp>
+        <p:nvSpPr>
+          <p:cNvPr id="44" name="Text 35"/>
           <p:cNvSpPr txBox="1"/>
           <p:nvPr/>
         </p:nvSpPr>
@@ -11692,7 +12076,7 @@
       </p:sp>
       <p:sp>
         <p:nvSpPr>
-          <p:cNvPr id="38" name="Text 36"/>
+          <p:cNvPr id="45" name="Text 36"/>
           <p:cNvSpPr txBox="1"/>
           <p:nvPr/>
         </p:nvSpPr>
@@ -11731,7 +12115,7 @@
       </p:sp>
       <p:sp>
         <p:nvSpPr>
-          <p:cNvPr id="39" name="Shape 37"/>
+          <p:cNvPr id="46" name="Shape 37"/>
           <p:cNvSpPr/>
           <p:nvPr/>
         </p:nvSpPr>
@@ -11758,7 +12142,7 @@
       </p:sp>
       <p:sp>
         <p:nvSpPr>
-          <p:cNvPr id="40" name="Shape 38"/>
+          <p:cNvPr id="47" name="Shape 38"/>
           <p:cNvSpPr/>
           <p:nvPr/>
         </p:nvSpPr>
@@ -11778,7 +12162,7 @@
       </p:sp>
       <p:sp>
         <p:nvSpPr>
-          <p:cNvPr id="41" name="Text 39"/>
+          <p:cNvPr id="48" name="Text 39"/>
           <p:cNvSpPr txBox="1"/>
           <p:nvPr/>
         </p:nvSpPr>
@@ -11815,9 +12199,33 @@
           </a:p>
         </p:txBody>
       </p:sp>
-      <p:sp>
-        <p:nvSpPr>
-          <p:cNvPr id="42" name="Text 40"/>
+      <p:pic>
+        <p:nvPicPr>
+          <p:cNvPr id="49" name="Image 7" descr="icons/8.png">    </p:cNvPr>
+          <p:cNvPicPr>
+            <a:picLocks noChangeAspect="1"/>
+          </p:cNvPicPr>
+          <p:nvPr/>
+        </p:nvPicPr>
+        <p:blipFill>
+          <a:blip r:embed="rId8"/>
+          <a:stretch>
+            <a:fillRect/>
+          </a:stretch>
+        </p:blipFill>
+        <p:spPr>
+          <a:xfrm>
+            <a:off x="1526134" y="4297680"/>
+            <a:ext cx="365760" cy="365760"/>
+          </a:xfrm>
+          <a:prstGeom prst="rect">
+            <a:avLst/>
+          </a:prstGeom>
+        </p:spPr>
+      </p:pic>
+      <p:sp>
+        <p:nvSpPr>
+          <p:cNvPr id="50" name="Text 40"/>
           <p:cNvSpPr txBox="1"/>
           <p:nvPr/>
         </p:nvSpPr>
@@ -11856,7 +12264,7 @@
       </p:sp>
       <p:sp>
         <p:nvSpPr>
-          <p:cNvPr id="43" name="Text 41"/>
+          <p:cNvPr id="51" name="Text 41"/>
           <p:cNvSpPr txBox="1"/>
           <p:nvPr/>
         </p:nvSpPr>
@@ -11895,7 +12303,7 @@
       </p:sp>
       <p:sp>
         <p:nvSpPr>
-          <p:cNvPr id="44" name="Shape 42"/>
+          <p:cNvPr id="52" name="Shape 42"/>
           <p:cNvSpPr/>
           <p:nvPr/>
         </p:nvSpPr>
@@ -11922,7 +12330,7 @@
       </p:sp>
       <p:sp>
         <p:nvSpPr>
-          <p:cNvPr id="45" name="Shape 43"/>
+          <p:cNvPr id="53" name="Shape 43"/>
           <p:cNvSpPr/>
           <p:nvPr/>
         </p:nvSpPr>
@@ -11942,7 +12350,7 @@
       </p:sp>
       <p:sp>
         <p:nvSpPr>
-          <p:cNvPr id="46" name="Text 44"/>
+          <p:cNvPr id="54" name="Text 44"/>
           <p:cNvSpPr txBox="1"/>
           <p:nvPr/>
         </p:nvSpPr>
@@ -11979,9 +12387,33 @@
           </a:p>
         </p:txBody>
       </p:sp>
-      <p:sp>
-        <p:nvSpPr>
-          <p:cNvPr id="47" name="Text 45"/>
+      <p:pic>
+        <p:nvPicPr>
+          <p:cNvPr id="55" name="Image 8" descr="icons/9.png">    </p:cNvPr>
+          <p:cNvPicPr>
+            <a:picLocks noChangeAspect="1"/>
+          </p:cNvPicPr>
+          <p:nvPr/>
+        </p:nvPicPr>
+        <p:blipFill>
+          <a:blip r:embed="rId9"/>
+          <a:stretch>
+            <a:fillRect/>
+          </a:stretch>
+        </p:blipFill>
+        <p:spPr>
+          <a:xfrm>
+            <a:off x="3097987" y="4297680"/>
+            <a:ext cx="365760" cy="365760"/>
+          </a:xfrm>
+          <a:prstGeom prst="rect">
+            <a:avLst/>
+          </a:prstGeom>
+        </p:spPr>
+      </p:pic>
+      <p:sp>
+        <p:nvSpPr>
+          <p:cNvPr id="56" name="Text 45"/>
           <p:cNvSpPr txBox="1"/>
           <p:nvPr/>
         </p:nvSpPr>
@@ -12020,7 +12452,7 @@
       </p:sp>
       <p:sp>
         <p:nvSpPr>
-          <p:cNvPr id="48" name="Text 46"/>
+          <p:cNvPr id="57" name="Text 46"/>
           <p:cNvSpPr txBox="1"/>
           <p:nvPr/>
         </p:nvSpPr>
@@ -12059,7 +12491,7 @@
       </p:sp>
       <p:sp>
         <p:nvSpPr>
-          <p:cNvPr id="49" name="Shape 47"/>
+          <p:cNvPr id="58" name="Shape 47"/>
           <p:cNvSpPr/>
           <p:nvPr/>
         </p:nvSpPr>
@@ -12086,7 +12518,7 @@
       </p:sp>
       <p:sp>
         <p:nvSpPr>
-          <p:cNvPr id="50" name="Shape 48"/>
+          <p:cNvPr id="59" name="Shape 48"/>
           <p:cNvSpPr/>
           <p:nvPr/>
         </p:nvSpPr>
@@ -12106,7 +12538,7 @@
       </p:sp>
       <p:sp>
         <p:nvSpPr>
-          <p:cNvPr id="51" name="Text 49"/>
+          <p:cNvPr id="60" name="Text 49"/>
           <p:cNvSpPr txBox="1"/>
           <p:nvPr/>
         </p:nvSpPr>
@@ -12143,9 +12575,33 @@
           </a:p>
         </p:txBody>
       </p:sp>
-      <p:sp>
-        <p:nvSpPr>
-          <p:cNvPr id="52" name="Text 50"/>
+      <p:pic>
+        <p:nvPicPr>
+          <p:cNvPr id="61" name="Image 9" descr="icons/10.png">    </p:cNvPr>
+          <p:cNvPicPr>
+            <a:picLocks noChangeAspect="1"/>
+          </p:cNvPicPr>
+          <p:nvPr/>
+        </p:nvPicPr>
+        <p:blipFill>
+          <a:blip r:embed="rId10"/>
+          <a:stretch>
+            <a:fillRect/>
+          </a:stretch>
+        </p:blipFill>
+        <p:spPr>
+          <a:xfrm>
+            <a:off x="4669841" y="4297680"/>
+            <a:ext cx="365760" cy="365760"/>
+          </a:xfrm>
+          <a:prstGeom prst="rect">
+            <a:avLst/>
+          </a:prstGeom>
+        </p:spPr>
+      </p:pic>
+      <p:sp>
+        <p:nvSpPr>
+          <p:cNvPr id="62" name="Text 50"/>
           <p:cNvSpPr txBox="1"/>
           <p:nvPr/>
         </p:nvSpPr>
@@ -12184,7 +12640,7 @@
       </p:sp>
       <p:sp>
         <p:nvSpPr>
-          <p:cNvPr id="53" name="Text 51"/>
+          <p:cNvPr id="63" name="Text 51"/>
           <p:cNvSpPr txBox="1"/>
           <p:nvPr/>
         </p:nvSpPr>
@@ -12223,7 +12679,7 @@
       </p:sp>
       <p:sp>
         <p:nvSpPr>
-          <p:cNvPr id="54" name="Shape 52"/>
+          <p:cNvPr id="64" name="Shape 52"/>
           <p:cNvSpPr/>
           <p:nvPr/>
         </p:nvSpPr>
@@ -12250,7 +12706,7 @@
       </p:sp>
       <p:sp>
         <p:nvSpPr>
-          <p:cNvPr id="55" name="Shape 53"/>
+          <p:cNvPr id="65" name="Shape 53"/>
           <p:cNvSpPr/>
           <p:nvPr/>
         </p:nvSpPr>
@@ -12270,7 +12726,7 @@
       </p:sp>
       <p:sp>
         <p:nvSpPr>
-          <p:cNvPr id="56" name="Text 54"/>
+          <p:cNvPr id="66" name="Text 54"/>
           <p:cNvSpPr txBox="1"/>
           <p:nvPr/>
         </p:nvSpPr>
@@ -12307,9 +12763,33 @@
           </a:p>
         </p:txBody>
       </p:sp>
-      <p:sp>
-        <p:nvSpPr>
-          <p:cNvPr id="57" name="Text 55"/>
+      <p:pic>
+        <p:nvPicPr>
+          <p:cNvPr id="67" name="Image 10" descr="icons/11.png">    </p:cNvPr>
+          <p:cNvPicPr>
+            <a:picLocks noChangeAspect="1"/>
+          </p:cNvPicPr>
+          <p:nvPr/>
+        </p:nvPicPr>
+        <p:blipFill>
+          <a:blip r:embed="rId11"/>
+          <a:stretch>
+            <a:fillRect/>
+          </a:stretch>
+        </p:blipFill>
+        <p:spPr>
+          <a:xfrm>
+            <a:off x="6241694" y="4297680"/>
+            <a:ext cx="365760" cy="365760"/>
+          </a:xfrm>
+          <a:prstGeom prst="rect">
+            <a:avLst/>
+          </a:prstGeom>
+        </p:spPr>
+      </p:pic>
+      <p:sp>
+        <p:nvSpPr>
+          <p:cNvPr id="68" name="Text 55"/>
           <p:cNvSpPr txBox="1"/>
           <p:nvPr/>
         </p:nvSpPr>
@@ -12348,7 +12828,7 @@
       </p:sp>
       <p:sp>
         <p:nvSpPr>
-          <p:cNvPr id="58" name="Text 56"/>
+          <p:cNvPr id="69" name="Text 56"/>
           <p:cNvSpPr txBox="1"/>
           <p:nvPr/>
         </p:nvSpPr>
@@ -12387,7 +12867,7 @@
       </p:sp>
       <p:sp>
         <p:nvSpPr>
-          <p:cNvPr id="59" name="Shape 57"/>
+          <p:cNvPr id="70" name="Shape 57"/>
           <p:cNvSpPr/>
           <p:nvPr/>
         </p:nvSpPr>
@@ -12414,7 +12894,7 @@
       </p:sp>
       <p:sp>
         <p:nvSpPr>
-          <p:cNvPr id="60" name="Shape 58"/>
+          <p:cNvPr id="71" name="Shape 58"/>
           <p:cNvSpPr/>
           <p:nvPr/>
         </p:nvSpPr>
@@ -12434,7 +12914,7 @@
       </p:sp>
       <p:sp>
         <p:nvSpPr>
-          <p:cNvPr id="61" name="Text 59"/>
+          <p:cNvPr id="72" name="Text 59"/>
           <p:cNvSpPr txBox="1"/>
           <p:nvPr/>
         </p:nvSpPr>
@@ -12471,9 +12951,33 @@
           </a:p>
         </p:txBody>
       </p:sp>
-      <p:sp>
-        <p:nvSpPr>
-          <p:cNvPr id="62" name="Text 60"/>
+      <p:pic>
+        <p:nvPicPr>
+          <p:cNvPr id="73" name="Image 11" descr="icons/12.png">    </p:cNvPr>
+          <p:cNvPicPr>
+            <a:picLocks noChangeAspect="1"/>
+          </p:cNvPicPr>
+          <p:nvPr/>
+        </p:nvPicPr>
+        <p:blipFill>
+          <a:blip r:embed="rId12"/>
+          <a:stretch>
+            <a:fillRect/>
+          </a:stretch>
+        </p:blipFill>
+        <p:spPr>
+          <a:xfrm>
+            <a:off x="7813548" y="4297680"/>
+            <a:ext cx="365760" cy="365760"/>
+          </a:xfrm>
+          <a:prstGeom prst="rect">
+            <a:avLst/>
+          </a:prstGeom>
+        </p:spPr>
+      </p:pic>
+      <p:sp>
+        <p:nvSpPr>
+          <p:cNvPr id="74" name="Text 60"/>
           <p:cNvSpPr txBox="1"/>
           <p:nvPr/>
         </p:nvSpPr>
@@ -12512,7 +13016,7 @@
       </p:sp>
       <p:sp>
         <p:nvSpPr>
-          <p:cNvPr id="63" name="Text 61"/>
+          <p:cNvPr id="75" name="Text 61"/>
           <p:cNvSpPr txBox="1"/>
           <p:nvPr/>
         </p:nvSpPr>
@@ -12551,7 +13055,7 @@
       </p:sp>
       <p:sp>
         <p:nvSpPr>
-          <p:cNvPr id="64" name="Shape 62"/>
+          <p:cNvPr id="76" name="Shape 62"/>
           <p:cNvSpPr/>
           <p:nvPr/>
         </p:nvSpPr>
@@ -12578,7 +13082,7 @@
       </p:sp>
       <p:sp>
         <p:nvSpPr>
-          <p:cNvPr id="65" name="Shape 63"/>
+          <p:cNvPr id="77" name="Shape 63"/>
           <p:cNvSpPr/>
           <p:nvPr/>
         </p:nvSpPr>
@@ -12598,7 +13102,7 @@
       </p:sp>
       <p:sp>
         <p:nvSpPr>
-          <p:cNvPr id="66" name="Text 64"/>
+          <p:cNvPr id="78" name="Text 64"/>
           <p:cNvSpPr txBox="1"/>
           <p:nvPr/>
         </p:nvSpPr>
@@ -12635,9 +13139,33 @@
           </a:p>
         </p:txBody>
       </p:sp>
-      <p:sp>
-        <p:nvSpPr>
-          <p:cNvPr id="67" name="Text 65"/>
+      <p:pic>
+        <p:nvPicPr>
+          <p:cNvPr id="79" name="Image 12" descr="icons/13.png">    </p:cNvPr>
+          <p:cNvPicPr>
+            <a:picLocks noChangeAspect="1"/>
+          </p:cNvPicPr>
+          <p:nvPr/>
+        </p:nvPicPr>
+        <p:blipFill>
+          <a:blip r:embed="rId13"/>
+          <a:stretch>
+            <a:fillRect/>
+          </a:stretch>
+        </p:blipFill>
+        <p:spPr>
+          <a:xfrm>
+            <a:off x="9385402" y="4297680"/>
+            <a:ext cx="365760" cy="365760"/>
+          </a:xfrm>
+          <a:prstGeom prst="rect">
+            <a:avLst/>
+          </a:prstGeom>
+        </p:spPr>
+      </p:pic>
+      <p:sp>
+        <p:nvSpPr>
+          <p:cNvPr id="80" name="Text 65"/>
           <p:cNvSpPr txBox="1"/>
           <p:nvPr/>
         </p:nvSpPr>
@@ -12676,7 +13204,7 @@
       </p:sp>
       <p:sp>
         <p:nvSpPr>
-          <p:cNvPr id="68" name="Text 66"/>
+          <p:cNvPr id="81" name="Text 66"/>
           <p:cNvSpPr txBox="1"/>
           <p:nvPr/>
         </p:nvSpPr>
@@ -12715,7 +13243,7 @@
       </p:sp>
       <p:sp>
         <p:nvSpPr>
-          <p:cNvPr id="69" name="Shape 67"/>
+          <p:cNvPr id="82" name="Shape 67"/>
           <p:cNvSpPr/>
           <p:nvPr/>
         </p:nvSpPr>
@@ -12742,7 +13270,7 @@
       </p:sp>
       <p:sp>
         <p:nvSpPr>
-          <p:cNvPr id="70" name="Shape 68"/>
+          <p:cNvPr id="83" name="Shape 68"/>
           <p:cNvSpPr/>
           <p:nvPr/>
         </p:nvSpPr>
@@ -12762,7 +13290,7 @@
       </p:sp>
       <p:sp>
         <p:nvSpPr>
-          <p:cNvPr id="71" name="Text 69"/>
+          <p:cNvPr id="84" name="Text 69"/>
           <p:cNvSpPr txBox="1"/>
           <p:nvPr/>
         </p:nvSpPr>
@@ -12799,9 +13327,33 @@
           </a:p>
         </p:txBody>
       </p:sp>
-      <p:sp>
-        <p:nvSpPr>
-          <p:cNvPr id="72" name="Text 70"/>
+      <p:pic>
+        <p:nvPicPr>
+          <p:cNvPr id="85" name="Image 13" descr="icons/14.png">    </p:cNvPr>
+          <p:cNvPicPr>
+            <a:picLocks noChangeAspect="1"/>
+          </p:cNvPicPr>
+          <p:nvPr/>
+        </p:nvPicPr>
+        <p:blipFill>
+          <a:blip r:embed="rId14"/>
+          <a:stretch>
+            <a:fillRect/>
+          </a:stretch>
+        </p:blipFill>
+        <p:spPr>
+          <a:xfrm>
+            <a:off x="10957255" y="4297680"/>
+            <a:ext cx="365760" cy="365760"/>
+          </a:xfrm>
+          <a:prstGeom prst="rect">
+            <a:avLst/>
+          </a:prstGeom>
+        </p:spPr>
+      </p:pic>
+      <p:sp>
+        <p:nvSpPr>
+          <p:cNvPr id="86" name="Text 70"/>
           <p:cNvSpPr txBox="1"/>
           <p:nvPr/>
         </p:nvSpPr>
@@ -12840,7 +13392,7 @@
       </p:sp>
       <p:sp>
         <p:nvSpPr>
-          <p:cNvPr id="73" name="Text 71"/>
+          <p:cNvPr id="87" name="Text 71"/>
           <p:cNvSpPr txBox="1"/>
           <p:nvPr/>
         </p:nvSpPr>
@@ -12879,23 +13431,23 @@
       </p:sp>
       <p:pic>
         <p:nvPicPr>
-          <p:cNvPr id="3" name="Media 0">
+          <p:cNvPr id="17" name="Media 0">
             <a:hlinkClick r:id="" action="ppaction://media"/>
           </p:cNvPr>
           <p:cNvPicPr>
             <a:picLocks noChangeAspect="1"/>
           </p:cNvPicPr>
           <p:nvPr>
-            <a:videoFile r:link="rId1"/>
+            <a:videoFile r:link="rId15"/>
             <p:extLst>
               <p:ext uri="{DAA4B4D4-6D71-4841-9C94-3DE7FCFB9230}">
-                <p14:media xmlns:p14="http://schemas.microsoft.com/office/powerpoint/2010/main" r:embed="rId2"/>
+                <p14:media xmlns:p14="http://schemas.microsoft.com/office/powerpoint/2010/main" r:embed="rId16"/>
               </p:ext>
             </p:extLst>
           </p:nvPr>
         </p:nvPicPr>
         <p:blipFill>
-          <a:blip r:embed="rId3"/>
+          <a:blip r:embed="rId17"/>
           <a:stretch>
             <a:fillRect/>
           </a:stretch>
@@ -13021,9 +13573,33 @@
           </a:p>
         </p:txBody>
       </p:sp>
-      <p:sp>
-        <p:nvSpPr>
-          <p:cNvPr id="5" name="Text 3"/>
+      <p:pic>
+        <p:nvPicPr>
+          <p:cNvPr id="5" name="Image 0" descr="icons/1.png">    </p:cNvPr>
+          <p:cNvPicPr>
+            <a:picLocks noChangeAspect="1"/>
+          </p:cNvPicPr>
+          <p:nvPr/>
+        </p:nvPicPr>
+        <p:blipFill>
+          <a:blip r:embed="rId1"/>
+          <a:stretch>
+            <a:fillRect/>
+          </a:stretch>
+        </p:blipFill>
+        <p:spPr>
+          <a:xfrm>
+            <a:off x="2514600" y="914400"/>
+            <a:ext cx="1188720" cy="1188720"/>
+          </a:xfrm>
+          <a:prstGeom prst="rect">
+            <a:avLst/>
+          </a:prstGeom>
+        </p:spPr>
+      </p:pic>
+      <p:sp>
+        <p:nvSpPr>
+          <p:cNvPr id="6" name="Text 3"/>
           <p:cNvSpPr txBox="1"/>
           <p:nvPr/>
         </p:nvSpPr>
@@ -13062,7 +13638,7 @@
       </p:sp>
       <p:sp>
         <p:nvSpPr>
-          <p:cNvPr id="6" name="Text 4"/>
+          <p:cNvPr id="7" name="Text 4"/>
           <p:cNvSpPr txBox="1"/>
           <p:nvPr/>
         </p:nvSpPr>
@@ -13101,7 +13677,7 @@
       </p:sp>
       <p:sp>
         <p:nvSpPr>
-          <p:cNvPr id="7" name="Text 5"/>
+          <p:cNvPr id="8" name="Text 5"/>
           <p:cNvSpPr txBox="1"/>
           <p:nvPr/>
         </p:nvSpPr>
@@ -13140,7 +13716,7 @@
       </p:sp>
       <p:sp>
         <p:nvSpPr>
-          <p:cNvPr id="8" name="Text 6"/>
+          <p:cNvPr id="9" name="Text 6"/>
           <p:cNvSpPr txBox="1"/>
           <p:nvPr/>
         </p:nvSpPr>
@@ -13179,7 +13755,7 @@
       </p:sp>
       <p:sp>
         <p:nvSpPr>
-          <p:cNvPr id="9" name="Text 7"/>
+          <p:cNvPr id="10" name="Text 7"/>
           <p:cNvSpPr txBox="1"/>
           <p:nvPr/>
         </p:nvSpPr>
@@ -13218,7 +13794,7 @@
       </p:sp>
       <p:sp>
         <p:nvSpPr>
-          <p:cNvPr id="10" name="Shape 8"/>
+          <p:cNvPr id="11" name="Shape 8"/>
           <p:cNvSpPr/>
           <p:nvPr/>
         </p:nvSpPr>
@@ -13238,7 +13814,7 @@
       </p:sp>
       <p:sp>
         <p:nvSpPr>
-          <p:cNvPr id="11" name="Text 9"/>
+          <p:cNvPr id="12" name="Text 9"/>
           <p:cNvSpPr txBox="1"/>
           <p:nvPr/>
         </p:nvSpPr>
@@ -13277,7 +13853,7 @@
       </p:sp>
       <p:sp>
         <p:nvSpPr>
-          <p:cNvPr id="12" name="Text 10"/>
+          <p:cNvPr id="13" name="Text 10"/>
           <p:cNvSpPr txBox="1"/>
           <p:nvPr/>
         </p:nvSpPr>
@@ -13316,7 +13892,7 @@
       </p:sp>
       <p:sp>
         <p:nvSpPr>
-          <p:cNvPr id="13" name="Shape 11"/>
+          <p:cNvPr id="14" name="Shape 11"/>
           <p:cNvSpPr/>
           <p:nvPr/>
         </p:nvSpPr>
@@ -13336,7 +13912,7 @@
       </p:sp>
       <p:sp>
         <p:nvSpPr>
-          <p:cNvPr id="14" name="Text 12"/>
+          <p:cNvPr id="15" name="Text 12"/>
           <p:cNvSpPr txBox="1"/>
           <p:nvPr/>
         </p:nvSpPr>
@@ -13375,7 +13951,7 @@
       </p:sp>
       <p:sp>
         <p:nvSpPr>
-          <p:cNvPr id="15" name="Text 13"/>
+          <p:cNvPr id="16" name="Text 13"/>
           <p:cNvSpPr txBox="1"/>
           <p:nvPr/>
         </p:nvSpPr>
@@ -13414,7 +13990,7 @@
       </p:sp>
       <p:sp>
         <p:nvSpPr>
-          <p:cNvPr id="16" name="Shape 14"/>
+          <p:cNvPr id="17" name="Shape 14"/>
           <p:cNvSpPr/>
           <p:nvPr/>
         </p:nvSpPr>
@@ -13434,7 +14010,7 @@
       </p:sp>
       <p:sp>
         <p:nvSpPr>
-          <p:cNvPr id="17" name="Text 15"/>
+          <p:cNvPr id="18" name="Text 15"/>
           <p:cNvSpPr txBox="1"/>
           <p:nvPr/>
         </p:nvSpPr>
@@ -13473,7 +14049,7 @@
       </p:sp>
       <p:sp>
         <p:nvSpPr>
-          <p:cNvPr id="18" name="Text 16"/>
+          <p:cNvPr id="19" name="Text 16"/>
           <p:cNvSpPr txBox="1"/>
           <p:nvPr/>
         </p:nvSpPr>
@@ -13512,7 +14088,7 @@
       </p:sp>
       <p:sp>
         <p:nvSpPr>
-          <p:cNvPr id="19" name="Shape 17"/>
+          <p:cNvPr id="20" name="Shape 17"/>
           <p:cNvSpPr/>
           <p:nvPr/>
         </p:nvSpPr>
@@ -13532,7 +14108,7 @@
       </p:sp>
       <p:sp>
         <p:nvSpPr>
-          <p:cNvPr id="20" name="Text 18"/>
+          <p:cNvPr id="21" name="Text 18"/>
           <p:cNvSpPr txBox="1"/>
           <p:nvPr/>
         </p:nvSpPr>
@@ -13571,7 +14147,7 @@
       </p:sp>
       <p:sp>
         <p:nvSpPr>
-          <p:cNvPr id="21" name="Text 19"/>
+          <p:cNvPr id="22" name="Text 19"/>
           <p:cNvSpPr txBox="1"/>
           <p:nvPr/>
         </p:nvSpPr>
@@ -13610,7 +14186,7 @@
       </p:sp>
       <p:sp>
         <p:nvSpPr>
-          <p:cNvPr id="22" name="Shape 20"/>
+          <p:cNvPr id="23" name="Shape 20"/>
           <p:cNvSpPr/>
           <p:nvPr/>
         </p:nvSpPr>
@@ -13633,7 +14209,7 @@
       </p:sp>
       <p:sp>
         <p:nvSpPr>
-          <p:cNvPr id="23" name="Shape 21"/>
+          <p:cNvPr id="24" name="Shape 21"/>
           <p:cNvSpPr/>
           <p:nvPr/>
         </p:nvSpPr>
@@ -13658,7 +14234,7 @@
       </p:sp>
       <p:sp>
         <p:nvSpPr>
-          <p:cNvPr id="24" name="Shape 22"/>
+          <p:cNvPr id="25" name="Shape 22"/>
           <p:cNvSpPr/>
           <p:nvPr/>
         </p:nvSpPr>
@@ -13683,7 +14259,7 @@
       </p:sp>
       <p:sp>
         <p:nvSpPr>
-          <p:cNvPr id="25" name="Shape 23"/>
+          <p:cNvPr id="26" name="Shape 23"/>
           <p:cNvSpPr/>
           <p:nvPr/>
         </p:nvSpPr>
@@ -13708,7 +14284,7 @@
       </p:sp>
       <p:sp>
         <p:nvSpPr>
-          <p:cNvPr id="26" name="Shape 24"/>
+          <p:cNvPr id="27" name="Shape 24"/>
           <p:cNvSpPr/>
           <p:nvPr/>
         </p:nvSpPr>
@@ -13733,7 +14309,7 @@
       </p:sp>
       <p:sp>
         <p:nvSpPr>
-          <p:cNvPr id="27" name="Shape 25"/>
+          <p:cNvPr id="28" name="Shape 25"/>
           <p:cNvSpPr/>
           <p:nvPr/>
         </p:nvSpPr>
@@ -13758,7 +14334,7 @@
       </p:sp>
       <p:sp>
         <p:nvSpPr>
-          <p:cNvPr id="28" name="Shape 26"/>
+          <p:cNvPr id="29" name="Shape 26"/>
           <p:cNvSpPr/>
           <p:nvPr/>
         </p:nvSpPr>
@@ -13783,7 +14359,7 @@
       </p:sp>
       <p:sp>
         <p:nvSpPr>
-          <p:cNvPr id="29" name="Shape 27"/>
+          <p:cNvPr id="30" name="Shape 27"/>
           <p:cNvSpPr/>
           <p:nvPr/>
         </p:nvSpPr>
@@ -13808,7 +14384,7 @@
       </p:sp>
       <p:sp>
         <p:nvSpPr>
-          <p:cNvPr id="30" name="Shape 28"/>
+          <p:cNvPr id="31" name="Shape 28"/>
           <p:cNvSpPr/>
           <p:nvPr/>
         </p:nvSpPr>
@@ -13833,7 +14409,7 @@
       </p:sp>
       <p:sp>
         <p:nvSpPr>
-          <p:cNvPr id="31" name="Shape 29"/>
+          <p:cNvPr id="32" name="Shape 29"/>
           <p:cNvSpPr/>
           <p:nvPr/>
         </p:nvSpPr>
@@ -13858,7 +14434,7 @@
       </p:sp>
       <p:sp>
         <p:nvSpPr>
-          <p:cNvPr id="32" name="Shape 30"/>
+          <p:cNvPr id="33" name="Shape 30"/>
           <p:cNvSpPr/>
           <p:nvPr/>
         </p:nvSpPr>
@@ -13883,7 +14459,7 @@
       </p:sp>
       <p:sp>
         <p:nvSpPr>
-          <p:cNvPr id="33" name="Shape 31"/>
+          <p:cNvPr id="34" name="Shape 31"/>
           <p:cNvSpPr/>
           <p:nvPr/>
         </p:nvSpPr>
@@ -13908,7 +14484,7 @@
       </p:sp>
       <p:sp>
         <p:nvSpPr>
-          <p:cNvPr id="34" name="Shape 32"/>
+          <p:cNvPr id="35" name="Shape 32"/>
           <p:cNvSpPr/>
           <p:nvPr/>
         </p:nvSpPr>
@@ -13933,7 +14509,7 @@
       </p:sp>
       <p:sp>
         <p:nvSpPr>
-          <p:cNvPr id="35" name="Shape 33"/>
+          <p:cNvPr id="36" name="Shape 33"/>
           <p:cNvSpPr/>
           <p:nvPr/>
         </p:nvSpPr>
@@ -13958,7 +14534,7 @@
       </p:sp>
       <p:sp>
         <p:nvSpPr>
-          <p:cNvPr id="36" name="Shape 34"/>
+          <p:cNvPr id="37" name="Shape 34"/>
           <p:cNvSpPr/>
           <p:nvPr/>
         </p:nvSpPr>
@@ -13983,23 +14559,23 @@
       </p:sp>
       <p:pic>
         <p:nvPicPr>
-          <p:cNvPr id="3" name="Media 0">
+          <p:cNvPr id="4" name="Media 0">
             <a:hlinkClick r:id="" action="ppaction://media"/>
           </p:cNvPr>
           <p:cNvPicPr>
             <a:picLocks noChangeAspect="1"/>
           </p:cNvPicPr>
           <p:nvPr>
-            <a:videoFile r:link="rId1"/>
+            <a:videoFile r:link="rId2"/>
             <p:extLst>
               <p:ext uri="{DAA4B4D4-6D71-4841-9C94-3DE7FCFB9230}">
-                <p14:media xmlns:p14="http://schemas.microsoft.com/office/powerpoint/2010/main" r:embed="rId2"/>
+                <p14:media xmlns:p14="http://schemas.microsoft.com/office/powerpoint/2010/main" r:embed="rId3"/>
               </p:ext>
             </p:extLst>
           </p:nvPr>
         </p:nvPicPr>
         <p:blipFill>
-          <a:blip r:embed="rId3"/>
+          <a:blip r:embed="rId4"/>
           <a:stretch>
             <a:fillRect/>
           </a:stretch>
@@ -14125,9 +14701,33 @@
           </a:p>
         </p:txBody>
       </p:sp>
-      <p:sp>
-        <p:nvSpPr>
-          <p:cNvPr id="5" name="Text 3"/>
+      <p:pic>
+        <p:nvPicPr>
+          <p:cNvPr id="5" name="Image 0" descr="icons/2.png">    </p:cNvPr>
+          <p:cNvPicPr>
+            <a:picLocks noChangeAspect="1"/>
+          </p:cNvPicPr>
+          <p:nvPr/>
+        </p:nvPicPr>
+        <p:blipFill>
+          <a:blip r:embed="rId1"/>
+          <a:stretch>
+            <a:fillRect/>
+          </a:stretch>
+        </p:blipFill>
+        <p:spPr>
+          <a:xfrm>
+            <a:off x="2514600" y="914400"/>
+            <a:ext cx="1188720" cy="1188720"/>
+          </a:xfrm>
+          <a:prstGeom prst="rect">
+            <a:avLst/>
+          </a:prstGeom>
+        </p:spPr>
+      </p:pic>
+      <p:sp>
+        <p:nvSpPr>
+          <p:cNvPr id="6" name="Text 3"/>
           <p:cNvSpPr txBox="1"/>
           <p:nvPr/>
         </p:nvSpPr>
@@ -14166,7 +14766,7 @@
       </p:sp>
       <p:sp>
         <p:nvSpPr>
-          <p:cNvPr id="6" name="Text 4"/>
+          <p:cNvPr id="7" name="Text 4"/>
           <p:cNvSpPr txBox="1"/>
           <p:nvPr/>
         </p:nvSpPr>
@@ -14205,7 +14805,7 @@
       </p:sp>
       <p:sp>
         <p:nvSpPr>
-          <p:cNvPr id="7" name="Text 5"/>
+          <p:cNvPr id="8" name="Text 5"/>
           <p:cNvSpPr txBox="1"/>
           <p:nvPr/>
         </p:nvSpPr>
@@ -14244,7 +14844,7 @@
       </p:sp>
       <p:sp>
         <p:nvSpPr>
-          <p:cNvPr id="8" name="Text 6"/>
+          <p:cNvPr id="9" name="Text 6"/>
           <p:cNvSpPr txBox="1"/>
           <p:nvPr/>
         </p:nvSpPr>
@@ -14283,7 +14883,7 @@
       </p:sp>
       <p:sp>
         <p:nvSpPr>
-          <p:cNvPr id="9" name="Text 7"/>
+          <p:cNvPr id="10" name="Text 7"/>
           <p:cNvSpPr txBox="1"/>
           <p:nvPr/>
         </p:nvSpPr>
@@ -14322,7 +14922,7 @@
       </p:sp>
       <p:sp>
         <p:nvSpPr>
-          <p:cNvPr id="10" name="Shape 8"/>
+          <p:cNvPr id="11" name="Shape 8"/>
           <p:cNvSpPr/>
           <p:nvPr/>
         </p:nvSpPr>
@@ -14342,7 +14942,7 @@
       </p:sp>
       <p:sp>
         <p:nvSpPr>
-          <p:cNvPr id="11" name="Text 9"/>
+          <p:cNvPr id="12" name="Text 9"/>
           <p:cNvSpPr txBox="1"/>
           <p:nvPr/>
         </p:nvSpPr>
@@ -14381,7 +14981,7 @@
       </p:sp>
       <p:sp>
         <p:nvSpPr>
-          <p:cNvPr id="12" name="Text 10"/>
+          <p:cNvPr id="13" name="Text 10"/>
           <p:cNvSpPr txBox="1"/>
           <p:nvPr/>
         </p:nvSpPr>
@@ -14420,7 +15020,7 @@
       </p:sp>
       <p:sp>
         <p:nvSpPr>
-          <p:cNvPr id="13" name="Shape 11"/>
+          <p:cNvPr id="14" name="Shape 11"/>
           <p:cNvSpPr/>
           <p:nvPr/>
         </p:nvSpPr>
@@ -14440,7 +15040,7 @@
       </p:sp>
       <p:sp>
         <p:nvSpPr>
-          <p:cNvPr id="14" name="Text 12"/>
+          <p:cNvPr id="15" name="Text 12"/>
           <p:cNvSpPr txBox="1"/>
           <p:nvPr/>
         </p:nvSpPr>
@@ -14479,7 +15079,7 @@
       </p:sp>
       <p:sp>
         <p:nvSpPr>
-          <p:cNvPr id="15" name="Text 13"/>
+          <p:cNvPr id="16" name="Text 13"/>
           <p:cNvSpPr txBox="1"/>
           <p:nvPr/>
         </p:nvSpPr>
@@ -14518,7 +15118,7 @@
       </p:sp>
       <p:sp>
         <p:nvSpPr>
-          <p:cNvPr id="16" name="Shape 14"/>
+          <p:cNvPr id="17" name="Shape 14"/>
           <p:cNvSpPr/>
           <p:nvPr/>
         </p:nvSpPr>
@@ -14538,7 +15138,7 @@
       </p:sp>
       <p:sp>
         <p:nvSpPr>
-          <p:cNvPr id="17" name="Text 15"/>
+          <p:cNvPr id="18" name="Text 15"/>
           <p:cNvSpPr txBox="1"/>
           <p:nvPr/>
         </p:nvSpPr>
@@ -14577,7 +15177,7 @@
       </p:sp>
       <p:sp>
         <p:nvSpPr>
-          <p:cNvPr id="18" name="Text 16"/>
+          <p:cNvPr id="19" name="Text 16"/>
           <p:cNvSpPr txBox="1"/>
           <p:nvPr/>
         </p:nvSpPr>
@@ -14616,7 +15216,7 @@
       </p:sp>
       <p:sp>
         <p:nvSpPr>
-          <p:cNvPr id="19" name="Shape 17"/>
+          <p:cNvPr id="20" name="Shape 17"/>
           <p:cNvSpPr/>
           <p:nvPr/>
         </p:nvSpPr>
@@ -14636,7 +15236,7 @@
       </p:sp>
       <p:sp>
         <p:nvSpPr>
-          <p:cNvPr id="20" name="Text 18"/>
+          <p:cNvPr id="21" name="Text 18"/>
           <p:cNvSpPr txBox="1"/>
           <p:nvPr/>
         </p:nvSpPr>
@@ -14675,7 +15275,7 @@
       </p:sp>
       <p:sp>
         <p:nvSpPr>
-          <p:cNvPr id="21" name="Text 19"/>
+          <p:cNvPr id="22" name="Text 19"/>
           <p:cNvSpPr txBox="1"/>
           <p:nvPr/>
         </p:nvSpPr>
@@ -14714,7 +15314,7 @@
       </p:sp>
       <p:sp>
         <p:nvSpPr>
-          <p:cNvPr id="22" name="Shape 20"/>
+          <p:cNvPr id="23" name="Shape 20"/>
           <p:cNvSpPr/>
           <p:nvPr/>
         </p:nvSpPr>
@@ -14737,7 +15337,7 @@
       </p:sp>
       <p:sp>
         <p:nvSpPr>
-          <p:cNvPr id="23" name="Shape 21"/>
+          <p:cNvPr id="24" name="Shape 21"/>
           <p:cNvSpPr/>
           <p:nvPr/>
         </p:nvSpPr>
@@ -14762,7 +15362,7 @@
       </p:sp>
       <p:sp>
         <p:nvSpPr>
-          <p:cNvPr id="24" name="Shape 22"/>
+          <p:cNvPr id="25" name="Shape 22"/>
           <p:cNvSpPr/>
           <p:nvPr/>
         </p:nvSpPr>
@@ -14787,7 +15387,7 @@
       </p:sp>
       <p:sp>
         <p:nvSpPr>
-          <p:cNvPr id="25" name="Shape 23"/>
+          <p:cNvPr id="26" name="Shape 23"/>
           <p:cNvSpPr/>
           <p:nvPr/>
         </p:nvSpPr>
@@ -14812,7 +15412,7 @@
       </p:sp>
       <p:sp>
         <p:nvSpPr>
-          <p:cNvPr id="26" name="Shape 24"/>
+          <p:cNvPr id="27" name="Shape 24"/>
           <p:cNvSpPr/>
           <p:nvPr/>
         </p:nvSpPr>
@@ -14837,7 +15437,7 @@
       </p:sp>
       <p:sp>
         <p:nvSpPr>
-          <p:cNvPr id="27" name="Shape 25"/>
+          <p:cNvPr id="28" name="Shape 25"/>
           <p:cNvSpPr/>
           <p:nvPr/>
         </p:nvSpPr>
@@ -14862,7 +15462,7 @@
       </p:sp>
       <p:sp>
         <p:nvSpPr>
-          <p:cNvPr id="28" name="Shape 26"/>
+          <p:cNvPr id="29" name="Shape 26"/>
           <p:cNvSpPr/>
           <p:nvPr/>
         </p:nvSpPr>
@@ -14887,7 +15487,7 @@
       </p:sp>
       <p:sp>
         <p:nvSpPr>
-          <p:cNvPr id="29" name="Shape 27"/>
+          <p:cNvPr id="30" name="Shape 27"/>
           <p:cNvSpPr/>
           <p:nvPr/>
         </p:nvSpPr>
@@ -14912,7 +15512,7 @@
       </p:sp>
       <p:sp>
         <p:nvSpPr>
-          <p:cNvPr id="30" name="Shape 28"/>
+          <p:cNvPr id="31" name="Shape 28"/>
           <p:cNvSpPr/>
           <p:nvPr/>
         </p:nvSpPr>
@@ -14937,7 +15537,7 @@
       </p:sp>
       <p:sp>
         <p:nvSpPr>
-          <p:cNvPr id="31" name="Shape 29"/>
+          <p:cNvPr id="32" name="Shape 29"/>
           <p:cNvSpPr/>
           <p:nvPr/>
         </p:nvSpPr>
@@ -14962,7 +15562,7 @@
       </p:sp>
       <p:sp>
         <p:nvSpPr>
-          <p:cNvPr id="32" name="Shape 30"/>
+          <p:cNvPr id="33" name="Shape 30"/>
           <p:cNvSpPr/>
           <p:nvPr/>
         </p:nvSpPr>
@@ -14987,7 +15587,7 @@
       </p:sp>
       <p:sp>
         <p:nvSpPr>
-          <p:cNvPr id="33" name="Shape 31"/>
+          <p:cNvPr id="34" name="Shape 31"/>
           <p:cNvSpPr/>
           <p:nvPr/>
         </p:nvSpPr>
@@ -15012,7 +15612,7 @@
       </p:sp>
       <p:sp>
         <p:nvSpPr>
-          <p:cNvPr id="34" name="Shape 32"/>
+          <p:cNvPr id="35" name="Shape 32"/>
           <p:cNvSpPr/>
           <p:nvPr/>
         </p:nvSpPr>
@@ -15037,7 +15637,7 @@
       </p:sp>
       <p:sp>
         <p:nvSpPr>
-          <p:cNvPr id="35" name="Shape 33"/>
+          <p:cNvPr id="36" name="Shape 33"/>
           <p:cNvSpPr/>
           <p:nvPr/>
         </p:nvSpPr>
@@ -15062,7 +15662,7 @@
       </p:sp>
       <p:sp>
         <p:nvSpPr>
-          <p:cNvPr id="36" name="Shape 34"/>
+          <p:cNvPr id="37" name="Shape 34"/>
           <p:cNvSpPr/>
           <p:nvPr/>
         </p:nvSpPr>
@@ -15087,23 +15687,23 @@
       </p:sp>
       <p:pic>
         <p:nvPicPr>
-          <p:cNvPr id="3" name="Media 0">
+          <p:cNvPr id="4" name="Media 0">
             <a:hlinkClick r:id="" action="ppaction://media"/>
           </p:cNvPr>
           <p:cNvPicPr>
             <a:picLocks noChangeAspect="1"/>
           </p:cNvPicPr>
           <p:nvPr>
-            <a:videoFile r:link="rId1"/>
+            <a:videoFile r:link="rId2"/>
             <p:extLst>
               <p:ext uri="{DAA4B4D4-6D71-4841-9C94-3DE7FCFB9230}">
-                <p14:media xmlns:p14="http://schemas.microsoft.com/office/powerpoint/2010/main" r:embed="rId2"/>
+                <p14:media xmlns:p14="http://schemas.microsoft.com/office/powerpoint/2010/main" r:embed="rId3"/>
               </p:ext>
             </p:extLst>
           </p:nvPr>
         </p:nvPicPr>
         <p:blipFill>
-          <a:blip r:embed="rId3"/>
+          <a:blip r:embed="rId4"/>
           <a:stretch>
             <a:fillRect/>
           </a:stretch>
@@ -15229,9 +15829,33 @@
           </a:p>
         </p:txBody>
       </p:sp>
-      <p:sp>
-        <p:nvSpPr>
-          <p:cNvPr id="5" name="Text 3"/>
+      <p:pic>
+        <p:nvPicPr>
+          <p:cNvPr id="5" name="Image 0" descr="icons/3.png">    </p:cNvPr>
+          <p:cNvPicPr>
+            <a:picLocks noChangeAspect="1"/>
+          </p:cNvPicPr>
+          <p:nvPr/>
+        </p:nvPicPr>
+        <p:blipFill>
+          <a:blip r:embed="rId1"/>
+          <a:stretch>
+            <a:fillRect/>
+          </a:stretch>
+        </p:blipFill>
+        <p:spPr>
+          <a:xfrm>
+            <a:off x="2514600" y="914400"/>
+            <a:ext cx="1188720" cy="1188720"/>
+          </a:xfrm>
+          <a:prstGeom prst="rect">
+            <a:avLst/>
+          </a:prstGeom>
+        </p:spPr>
+      </p:pic>
+      <p:sp>
+        <p:nvSpPr>
+          <p:cNvPr id="6" name="Text 3"/>
           <p:cNvSpPr txBox="1"/>
           <p:nvPr/>
         </p:nvSpPr>
@@ -15270,7 +15894,7 @@
       </p:sp>
       <p:sp>
         <p:nvSpPr>
-          <p:cNvPr id="6" name="Text 4"/>
+          <p:cNvPr id="7" name="Text 4"/>
           <p:cNvSpPr txBox="1"/>
           <p:nvPr/>
         </p:nvSpPr>
@@ -15309,7 +15933,7 @@
       </p:sp>
       <p:sp>
         <p:nvSpPr>
-          <p:cNvPr id="7" name="Text 5"/>
+          <p:cNvPr id="8" name="Text 5"/>
           <p:cNvSpPr txBox="1"/>
           <p:nvPr/>
         </p:nvSpPr>
@@ -15348,7 +15972,7 @@
       </p:sp>
       <p:sp>
         <p:nvSpPr>
-          <p:cNvPr id="8" name="Text 6"/>
+          <p:cNvPr id="9" name="Text 6"/>
           <p:cNvSpPr txBox="1"/>
           <p:nvPr/>
         </p:nvSpPr>
@@ -15387,7 +16011,7 @@
       </p:sp>
       <p:sp>
         <p:nvSpPr>
-          <p:cNvPr id="9" name="Text 7"/>
+          <p:cNvPr id="10" name="Text 7"/>
           <p:cNvSpPr txBox="1"/>
           <p:nvPr/>
         </p:nvSpPr>
@@ -15426,7 +16050,7 @@
       </p:sp>
       <p:sp>
         <p:nvSpPr>
-          <p:cNvPr id="10" name="Shape 8"/>
+          <p:cNvPr id="11" name="Shape 8"/>
           <p:cNvSpPr/>
           <p:nvPr/>
         </p:nvSpPr>
@@ -15446,7 +16070,7 @@
       </p:sp>
       <p:sp>
         <p:nvSpPr>
-          <p:cNvPr id="11" name="Text 9"/>
+          <p:cNvPr id="12" name="Text 9"/>
           <p:cNvSpPr txBox="1"/>
           <p:nvPr/>
         </p:nvSpPr>
@@ -15485,7 +16109,7 @@
       </p:sp>
       <p:sp>
         <p:nvSpPr>
-          <p:cNvPr id="12" name="Text 10"/>
+          <p:cNvPr id="13" name="Text 10"/>
           <p:cNvSpPr txBox="1"/>
           <p:nvPr/>
         </p:nvSpPr>
@@ -15524,7 +16148,7 @@
       </p:sp>
       <p:sp>
         <p:nvSpPr>
-          <p:cNvPr id="13" name="Shape 11"/>
+          <p:cNvPr id="14" name="Shape 11"/>
           <p:cNvSpPr/>
           <p:nvPr/>
         </p:nvSpPr>
@@ -15544,7 +16168,7 @@
       </p:sp>
       <p:sp>
         <p:nvSpPr>
-          <p:cNvPr id="14" name="Text 12"/>
+          <p:cNvPr id="15" name="Text 12"/>
           <p:cNvSpPr txBox="1"/>
           <p:nvPr/>
         </p:nvSpPr>
@@ -15583,7 +16207,7 @@
       </p:sp>
       <p:sp>
         <p:nvSpPr>
-          <p:cNvPr id="15" name="Text 13"/>
+          <p:cNvPr id="16" name="Text 13"/>
           <p:cNvSpPr txBox="1"/>
           <p:nvPr/>
         </p:nvSpPr>
@@ -15622,7 +16246,7 @@
       </p:sp>
       <p:sp>
         <p:nvSpPr>
-          <p:cNvPr id="16" name="Shape 14"/>
+          <p:cNvPr id="17" name="Shape 14"/>
           <p:cNvSpPr/>
           <p:nvPr/>
         </p:nvSpPr>
@@ -15642,7 +16266,7 @@
       </p:sp>
       <p:sp>
         <p:nvSpPr>
-          <p:cNvPr id="17" name="Text 15"/>
+          <p:cNvPr id="18" name="Text 15"/>
           <p:cNvSpPr txBox="1"/>
           <p:nvPr/>
         </p:nvSpPr>
@@ -15681,7 +16305,7 @@
       </p:sp>
       <p:sp>
         <p:nvSpPr>
-          <p:cNvPr id="18" name="Text 16"/>
+          <p:cNvPr id="19" name="Text 16"/>
           <p:cNvSpPr txBox="1"/>
           <p:nvPr/>
         </p:nvSpPr>
@@ -15720,7 +16344,7 @@
       </p:sp>
       <p:sp>
         <p:nvSpPr>
-          <p:cNvPr id="19" name="Shape 17"/>
+          <p:cNvPr id="20" name="Shape 17"/>
           <p:cNvSpPr/>
           <p:nvPr/>
         </p:nvSpPr>
@@ -15740,7 +16364,7 @@
       </p:sp>
       <p:sp>
         <p:nvSpPr>
-          <p:cNvPr id="20" name="Text 18"/>
+          <p:cNvPr id="21" name="Text 18"/>
           <p:cNvSpPr txBox="1"/>
           <p:nvPr/>
         </p:nvSpPr>
@@ -15779,7 +16403,7 @@
       </p:sp>
       <p:sp>
         <p:nvSpPr>
-          <p:cNvPr id="21" name="Text 19"/>
+          <p:cNvPr id="22" name="Text 19"/>
           <p:cNvSpPr txBox="1"/>
           <p:nvPr/>
         </p:nvSpPr>
@@ -15818,7 +16442,7 @@
       </p:sp>
       <p:sp>
         <p:nvSpPr>
-          <p:cNvPr id="22" name="Shape 20"/>
+          <p:cNvPr id="23" name="Shape 20"/>
           <p:cNvSpPr/>
           <p:nvPr/>
         </p:nvSpPr>
@@ -15841,7 +16465,7 @@
       </p:sp>
       <p:sp>
         <p:nvSpPr>
-          <p:cNvPr id="23" name="Shape 21"/>
+          <p:cNvPr id="24" name="Shape 21"/>
           <p:cNvSpPr/>
           <p:nvPr/>
         </p:nvSpPr>
@@ -15866,7 +16490,7 @@
       </p:sp>
       <p:sp>
         <p:nvSpPr>
-          <p:cNvPr id="24" name="Shape 22"/>
+          <p:cNvPr id="25" name="Shape 22"/>
           <p:cNvSpPr/>
           <p:nvPr/>
         </p:nvSpPr>
@@ -15891,7 +16515,7 @@
       </p:sp>
       <p:sp>
         <p:nvSpPr>
-          <p:cNvPr id="25" name="Shape 23"/>
+          <p:cNvPr id="26" name="Shape 23"/>
           <p:cNvSpPr/>
           <p:nvPr/>
         </p:nvSpPr>
@@ -15916,7 +16540,7 @@
       </p:sp>
       <p:sp>
         <p:nvSpPr>
-          <p:cNvPr id="26" name="Shape 24"/>
+          <p:cNvPr id="27" name="Shape 24"/>
           <p:cNvSpPr/>
           <p:nvPr/>
         </p:nvSpPr>
@@ -15941,7 +16565,7 @@
       </p:sp>
       <p:sp>
         <p:nvSpPr>
-          <p:cNvPr id="27" name="Shape 25"/>
+          <p:cNvPr id="28" name="Shape 25"/>
           <p:cNvSpPr/>
           <p:nvPr/>
         </p:nvSpPr>
@@ -15966,7 +16590,7 @@
       </p:sp>
       <p:sp>
         <p:nvSpPr>
-          <p:cNvPr id="28" name="Shape 26"/>
+          <p:cNvPr id="29" name="Shape 26"/>
           <p:cNvSpPr/>
           <p:nvPr/>
         </p:nvSpPr>
@@ -15991,7 +16615,7 @@
       </p:sp>
       <p:sp>
         <p:nvSpPr>
-          <p:cNvPr id="29" name="Shape 27"/>
+          <p:cNvPr id="30" name="Shape 27"/>
           <p:cNvSpPr/>
           <p:nvPr/>
         </p:nvSpPr>
@@ -16016,7 +16640,7 @@
       </p:sp>
       <p:sp>
         <p:nvSpPr>
-          <p:cNvPr id="30" name="Shape 28"/>
+          <p:cNvPr id="31" name="Shape 28"/>
           <p:cNvSpPr/>
           <p:nvPr/>
         </p:nvSpPr>
@@ -16041,7 +16665,7 @@
       </p:sp>
       <p:sp>
         <p:nvSpPr>
-          <p:cNvPr id="31" name="Shape 29"/>
+          <p:cNvPr id="32" name="Shape 29"/>
           <p:cNvSpPr/>
           <p:nvPr/>
         </p:nvSpPr>
@@ -16066,7 +16690,7 @@
       </p:sp>
       <p:sp>
         <p:nvSpPr>
-          <p:cNvPr id="32" name="Shape 30"/>
+          <p:cNvPr id="33" name="Shape 30"/>
           <p:cNvSpPr/>
           <p:nvPr/>
         </p:nvSpPr>
@@ -16091,7 +16715,7 @@
       </p:sp>
       <p:sp>
         <p:nvSpPr>
-          <p:cNvPr id="33" name="Shape 31"/>
+          <p:cNvPr id="34" name="Shape 31"/>
           <p:cNvSpPr/>
           <p:nvPr/>
         </p:nvSpPr>
@@ -16116,7 +16740,7 @@
       </p:sp>
       <p:sp>
         <p:nvSpPr>
-          <p:cNvPr id="34" name="Shape 32"/>
+          <p:cNvPr id="35" name="Shape 32"/>
           <p:cNvSpPr/>
           <p:nvPr/>
         </p:nvSpPr>
@@ -16141,7 +16765,7 @@
       </p:sp>
       <p:sp>
         <p:nvSpPr>
-          <p:cNvPr id="35" name="Shape 33"/>
+          <p:cNvPr id="36" name="Shape 33"/>
           <p:cNvSpPr/>
           <p:nvPr/>
         </p:nvSpPr>
@@ -16166,7 +16790,7 @@
       </p:sp>
       <p:sp>
         <p:nvSpPr>
-          <p:cNvPr id="36" name="Shape 34"/>
+          <p:cNvPr id="37" name="Shape 34"/>
           <p:cNvSpPr/>
           <p:nvPr/>
         </p:nvSpPr>
@@ -16191,23 +16815,23 @@
       </p:sp>
       <p:pic>
         <p:nvPicPr>
-          <p:cNvPr id="3" name="Media 0">
+          <p:cNvPr id="4" name="Media 0">
             <a:hlinkClick r:id="" action="ppaction://media"/>
           </p:cNvPr>
           <p:cNvPicPr>
             <a:picLocks noChangeAspect="1"/>
           </p:cNvPicPr>
           <p:nvPr>
-            <a:videoFile r:link="rId1"/>
+            <a:videoFile r:link="rId2"/>
             <p:extLst>
               <p:ext uri="{DAA4B4D4-6D71-4841-9C94-3DE7FCFB9230}">
-                <p14:media xmlns:p14="http://schemas.microsoft.com/office/powerpoint/2010/main" r:embed="rId2"/>
+                <p14:media xmlns:p14="http://schemas.microsoft.com/office/powerpoint/2010/main" r:embed="rId3"/>
               </p:ext>
             </p:extLst>
           </p:nvPr>
         </p:nvPicPr>
         <p:blipFill>
-          <a:blip r:embed="rId3"/>
+          <a:blip r:embed="rId4"/>
           <a:stretch>
             <a:fillRect/>
           </a:stretch>
@@ -16333,9 +16957,33 @@
           </a:p>
         </p:txBody>
       </p:sp>
-      <p:sp>
-        <p:nvSpPr>
-          <p:cNvPr id="5" name="Text 3"/>
+      <p:pic>
+        <p:nvPicPr>
+          <p:cNvPr id="5" name="Image 0" descr="icons/4.png">    </p:cNvPr>
+          <p:cNvPicPr>
+            <a:picLocks noChangeAspect="1"/>
+          </p:cNvPicPr>
+          <p:nvPr/>
+        </p:nvPicPr>
+        <p:blipFill>
+          <a:blip r:embed="rId1"/>
+          <a:stretch>
+            <a:fillRect/>
+          </a:stretch>
+        </p:blipFill>
+        <p:spPr>
+          <a:xfrm>
+            <a:off x="2514600" y="914400"/>
+            <a:ext cx="1188720" cy="1188720"/>
+          </a:xfrm>
+          <a:prstGeom prst="rect">
+            <a:avLst/>
+          </a:prstGeom>
+        </p:spPr>
+      </p:pic>
+      <p:sp>
+        <p:nvSpPr>
+          <p:cNvPr id="6" name="Text 3"/>
           <p:cNvSpPr txBox="1"/>
           <p:nvPr/>
         </p:nvSpPr>
@@ -16374,7 +17022,7 @@
       </p:sp>
       <p:sp>
         <p:nvSpPr>
-          <p:cNvPr id="6" name="Text 4"/>
+          <p:cNvPr id="7" name="Text 4"/>
           <p:cNvSpPr txBox="1"/>
           <p:nvPr/>
         </p:nvSpPr>
@@ -16413,7 +17061,7 @@
       </p:sp>
       <p:sp>
         <p:nvSpPr>
-          <p:cNvPr id="7" name="Text 5"/>
+          <p:cNvPr id="8" name="Text 5"/>
           <p:cNvSpPr txBox="1"/>
           <p:nvPr/>
         </p:nvSpPr>
@@ -16452,7 +17100,7 @@
       </p:sp>
       <p:sp>
         <p:nvSpPr>
-          <p:cNvPr id="8" name="Text 6"/>
+          <p:cNvPr id="9" name="Text 6"/>
           <p:cNvSpPr txBox="1"/>
           <p:nvPr/>
         </p:nvSpPr>
@@ -16491,7 +17139,7 @@
       </p:sp>
       <p:sp>
         <p:nvSpPr>
-          <p:cNvPr id="9" name="Text 7"/>
+          <p:cNvPr id="10" name="Text 7"/>
           <p:cNvSpPr txBox="1"/>
           <p:nvPr/>
         </p:nvSpPr>
@@ -16530,7 +17178,7 @@
       </p:sp>
       <p:sp>
         <p:nvSpPr>
-          <p:cNvPr id="10" name="Shape 8"/>
+          <p:cNvPr id="11" name="Shape 8"/>
           <p:cNvSpPr/>
           <p:nvPr/>
         </p:nvSpPr>
@@ -16550,7 +17198,7 @@
       </p:sp>
       <p:sp>
         <p:nvSpPr>
-          <p:cNvPr id="11" name="Text 9"/>
+          <p:cNvPr id="12" name="Text 9"/>
           <p:cNvSpPr txBox="1"/>
           <p:nvPr/>
         </p:nvSpPr>
@@ -16589,7 +17237,7 @@
       </p:sp>
       <p:sp>
         <p:nvSpPr>
-          <p:cNvPr id="12" name="Text 10"/>
+          <p:cNvPr id="13" name="Text 10"/>
           <p:cNvSpPr txBox="1"/>
           <p:nvPr/>
         </p:nvSpPr>
@@ -16628,7 +17276,7 @@
       </p:sp>
       <p:sp>
         <p:nvSpPr>
-          <p:cNvPr id="13" name="Shape 11"/>
+          <p:cNvPr id="14" name="Shape 11"/>
           <p:cNvSpPr/>
           <p:nvPr/>
         </p:nvSpPr>
@@ -16648,7 +17296,7 @@
       </p:sp>
       <p:sp>
         <p:nvSpPr>
-          <p:cNvPr id="14" name="Text 12"/>
+          <p:cNvPr id="15" name="Text 12"/>
           <p:cNvSpPr txBox="1"/>
           <p:nvPr/>
         </p:nvSpPr>
@@ -16687,7 +17335,7 @@
       </p:sp>
       <p:sp>
         <p:nvSpPr>
-          <p:cNvPr id="15" name="Text 13"/>
+          <p:cNvPr id="16" name="Text 13"/>
           <p:cNvSpPr txBox="1"/>
           <p:nvPr/>
         </p:nvSpPr>
@@ -16726,7 +17374,7 @@
       </p:sp>
       <p:sp>
         <p:nvSpPr>
-          <p:cNvPr id="16" name="Shape 14"/>
+          <p:cNvPr id="17" name="Shape 14"/>
           <p:cNvSpPr/>
           <p:nvPr/>
         </p:nvSpPr>
@@ -16746,7 +17394,7 @@
       </p:sp>
       <p:sp>
         <p:nvSpPr>
-          <p:cNvPr id="17" name="Text 15"/>
+          <p:cNvPr id="18" name="Text 15"/>
           <p:cNvSpPr txBox="1"/>
           <p:nvPr/>
         </p:nvSpPr>
@@ -16785,7 +17433,7 @@
       </p:sp>
       <p:sp>
         <p:nvSpPr>
-          <p:cNvPr id="18" name="Text 16"/>
+          <p:cNvPr id="19" name="Text 16"/>
           <p:cNvSpPr txBox="1"/>
           <p:nvPr/>
         </p:nvSpPr>
@@ -16824,7 +17472,7 @@
       </p:sp>
       <p:sp>
         <p:nvSpPr>
-          <p:cNvPr id="19" name="Shape 17"/>
+          <p:cNvPr id="20" name="Shape 17"/>
           <p:cNvSpPr/>
           <p:nvPr/>
         </p:nvSpPr>
@@ -16844,7 +17492,7 @@
       </p:sp>
       <p:sp>
         <p:nvSpPr>
-          <p:cNvPr id="20" name="Text 18"/>
+          <p:cNvPr id="21" name="Text 18"/>
           <p:cNvSpPr txBox="1"/>
           <p:nvPr/>
         </p:nvSpPr>
@@ -16883,7 +17531,7 @@
       </p:sp>
       <p:sp>
         <p:nvSpPr>
-          <p:cNvPr id="21" name="Text 19"/>
+          <p:cNvPr id="22" name="Text 19"/>
           <p:cNvSpPr txBox="1"/>
           <p:nvPr/>
         </p:nvSpPr>
@@ -16922,7 +17570,7 @@
       </p:sp>
       <p:sp>
         <p:nvSpPr>
-          <p:cNvPr id="22" name="Shape 20"/>
+          <p:cNvPr id="23" name="Shape 20"/>
           <p:cNvSpPr/>
           <p:nvPr/>
         </p:nvSpPr>
@@ -16945,7 +17593,7 @@
       </p:sp>
       <p:sp>
         <p:nvSpPr>
-          <p:cNvPr id="23" name="Shape 21"/>
+          <p:cNvPr id="24" name="Shape 21"/>
           <p:cNvSpPr/>
           <p:nvPr/>
         </p:nvSpPr>
@@ -16970,7 +17618,7 @@
       </p:sp>
       <p:sp>
         <p:nvSpPr>
-          <p:cNvPr id="24" name="Shape 22"/>
+          <p:cNvPr id="25" name="Shape 22"/>
           <p:cNvSpPr/>
           <p:nvPr/>
         </p:nvSpPr>
@@ -16995,7 +17643,7 @@
       </p:sp>
       <p:sp>
         <p:nvSpPr>
-          <p:cNvPr id="25" name="Shape 23"/>
+          <p:cNvPr id="26" name="Shape 23"/>
           <p:cNvSpPr/>
           <p:nvPr/>
         </p:nvSpPr>
@@ -17020,7 +17668,7 @@
       </p:sp>
       <p:sp>
         <p:nvSpPr>
-          <p:cNvPr id="26" name="Shape 24"/>
+          <p:cNvPr id="27" name="Shape 24"/>
           <p:cNvSpPr/>
           <p:nvPr/>
         </p:nvSpPr>
@@ -17045,7 +17693,7 @@
       </p:sp>
       <p:sp>
         <p:nvSpPr>
-          <p:cNvPr id="27" name="Shape 25"/>
+          <p:cNvPr id="28" name="Shape 25"/>
           <p:cNvSpPr/>
           <p:nvPr/>
         </p:nvSpPr>
@@ -17070,7 +17718,7 @@
       </p:sp>
       <p:sp>
         <p:nvSpPr>
-          <p:cNvPr id="28" name="Shape 26"/>
+          <p:cNvPr id="29" name="Shape 26"/>
           <p:cNvSpPr/>
           <p:nvPr/>
         </p:nvSpPr>
@@ -17095,7 +17743,7 @@
       </p:sp>
       <p:sp>
         <p:nvSpPr>
-          <p:cNvPr id="29" name="Shape 27"/>
+          <p:cNvPr id="30" name="Shape 27"/>
           <p:cNvSpPr/>
           <p:nvPr/>
         </p:nvSpPr>
@@ -17120,7 +17768,7 @@
       </p:sp>
       <p:sp>
         <p:nvSpPr>
-          <p:cNvPr id="30" name="Shape 28"/>
+          <p:cNvPr id="31" name="Shape 28"/>
           <p:cNvSpPr/>
           <p:nvPr/>
         </p:nvSpPr>
@@ -17145,7 +17793,7 @@
       </p:sp>
       <p:sp>
         <p:nvSpPr>
-          <p:cNvPr id="31" name="Shape 29"/>
+          <p:cNvPr id="32" name="Shape 29"/>
           <p:cNvSpPr/>
           <p:nvPr/>
         </p:nvSpPr>
@@ -17170,7 +17818,7 @@
       </p:sp>
       <p:sp>
         <p:nvSpPr>
-          <p:cNvPr id="32" name="Shape 30"/>
+          <p:cNvPr id="33" name="Shape 30"/>
           <p:cNvSpPr/>
           <p:nvPr/>
         </p:nvSpPr>
@@ -17195,7 +17843,7 @@
       </p:sp>
       <p:sp>
         <p:nvSpPr>
-          <p:cNvPr id="33" name="Shape 31"/>
+          <p:cNvPr id="34" name="Shape 31"/>
           <p:cNvSpPr/>
           <p:nvPr/>
         </p:nvSpPr>
@@ -17220,7 +17868,7 @@
       </p:sp>
       <p:sp>
         <p:nvSpPr>
-          <p:cNvPr id="34" name="Shape 32"/>
+          <p:cNvPr id="35" name="Shape 32"/>
           <p:cNvSpPr/>
           <p:nvPr/>
         </p:nvSpPr>
@@ -17245,7 +17893,7 @@
       </p:sp>
       <p:sp>
         <p:nvSpPr>
-          <p:cNvPr id="35" name="Shape 33"/>
+          <p:cNvPr id="36" name="Shape 33"/>
           <p:cNvSpPr/>
           <p:nvPr/>
         </p:nvSpPr>
@@ -17270,7 +17918,7 @@
       </p:sp>
       <p:sp>
         <p:nvSpPr>
-          <p:cNvPr id="36" name="Shape 34"/>
+          <p:cNvPr id="37" name="Shape 34"/>
           <p:cNvSpPr/>
           <p:nvPr/>
         </p:nvSpPr>
@@ -17295,23 +17943,23 @@
       </p:sp>
       <p:pic>
         <p:nvPicPr>
-          <p:cNvPr id="3" name="Media 0">
+          <p:cNvPr id="4" name="Media 0">
             <a:hlinkClick r:id="" action="ppaction://media"/>
           </p:cNvPr>
           <p:cNvPicPr>
             <a:picLocks noChangeAspect="1"/>
           </p:cNvPicPr>
           <p:nvPr>
-            <a:videoFile r:link="rId1"/>
+            <a:videoFile r:link="rId2"/>
             <p:extLst>
               <p:ext uri="{DAA4B4D4-6D71-4841-9C94-3DE7FCFB9230}">
-                <p14:media xmlns:p14="http://schemas.microsoft.com/office/powerpoint/2010/main" r:embed="rId2"/>
+                <p14:media xmlns:p14="http://schemas.microsoft.com/office/powerpoint/2010/main" r:embed="rId3"/>
               </p:ext>
             </p:extLst>
           </p:nvPr>
         </p:nvPicPr>
         <p:blipFill>
-          <a:blip r:embed="rId3"/>
+          <a:blip r:embed="rId4"/>
           <a:stretch>
             <a:fillRect/>
           </a:stretch>
@@ -17437,9 +18085,33 @@
           </a:p>
         </p:txBody>
       </p:sp>
-      <p:sp>
-        <p:nvSpPr>
-          <p:cNvPr id="5" name="Text 3"/>
+      <p:pic>
+        <p:nvPicPr>
+          <p:cNvPr id="5" name="Image 0" descr="icons/5.png">    </p:cNvPr>
+          <p:cNvPicPr>
+            <a:picLocks noChangeAspect="1"/>
+          </p:cNvPicPr>
+          <p:nvPr/>
+        </p:nvPicPr>
+        <p:blipFill>
+          <a:blip r:embed="rId1"/>
+          <a:stretch>
+            <a:fillRect/>
+          </a:stretch>
+        </p:blipFill>
+        <p:spPr>
+          <a:xfrm>
+            <a:off x="2514600" y="914400"/>
+            <a:ext cx="1188720" cy="1188720"/>
+          </a:xfrm>
+          <a:prstGeom prst="rect">
+            <a:avLst/>
+          </a:prstGeom>
+        </p:spPr>
+      </p:pic>
+      <p:sp>
+        <p:nvSpPr>
+          <p:cNvPr id="6" name="Text 3"/>
           <p:cNvSpPr txBox="1"/>
           <p:nvPr/>
         </p:nvSpPr>
@@ -17478,7 +18150,7 @@
       </p:sp>
       <p:sp>
         <p:nvSpPr>
-          <p:cNvPr id="6" name="Text 4"/>
+          <p:cNvPr id="7" name="Text 4"/>
           <p:cNvSpPr txBox="1"/>
           <p:nvPr/>
         </p:nvSpPr>
@@ -17517,7 +18189,7 @@
       </p:sp>
       <p:sp>
         <p:nvSpPr>
-          <p:cNvPr id="7" name="Text 5"/>
+          <p:cNvPr id="8" name="Text 5"/>
           <p:cNvSpPr txBox="1"/>
           <p:nvPr/>
         </p:nvSpPr>
@@ -17556,7 +18228,7 @@
       </p:sp>
       <p:sp>
         <p:nvSpPr>
-          <p:cNvPr id="8" name="Text 6"/>
+          <p:cNvPr id="9" name="Text 6"/>
           <p:cNvSpPr txBox="1"/>
           <p:nvPr/>
         </p:nvSpPr>
@@ -17595,7 +18267,7 @@
       </p:sp>
       <p:sp>
         <p:nvSpPr>
-          <p:cNvPr id="9" name="Text 7"/>
+          <p:cNvPr id="10" name="Text 7"/>
           <p:cNvSpPr txBox="1"/>
           <p:nvPr/>
         </p:nvSpPr>
@@ -17634,7 +18306,7 @@
       </p:sp>
       <p:sp>
         <p:nvSpPr>
-          <p:cNvPr id="10" name="Shape 8"/>
+          <p:cNvPr id="11" name="Shape 8"/>
           <p:cNvSpPr/>
           <p:nvPr/>
         </p:nvSpPr>
@@ -17654,7 +18326,7 @@
       </p:sp>
       <p:sp>
         <p:nvSpPr>
-          <p:cNvPr id="11" name="Text 9"/>
+          <p:cNvPr id="12" name="Text 9"/>
           <p:cNvSpPr txBox="1"/>
           <p:nvPr/>
         </p:nvSpPr>
@@ -17693,7 +18365,7 @@
       </p:sp>
       <p:sp>
         <p:nvSpPr>
-          <p:cNvPr id="12" name="Text 10"/>
+          <p:cNvPr id="13" name="Text 10"/>
           <p:cNvSpPr txBox="1"/>
           <p:nvPr/>
         </p:nvSpPr>
@@ -17732,7 +18404,7 @@
       </p:sp>
       <p:sp>
         <p:nvSpPr>
-          <p:cNvPr id="13" name="Shape 11"/>
+          <p:cNvPr id="14" name="Shape 11"/>
           <p:cNvSpPr/>
           <p:nvPr/>
         </p:nvSpPr>
@@ -17752,7 +18424,7 @@
       </p:sp>
       <p:sp>
         <p:nvSpPr>
-          <p:cNvPr id="14" name="Text 12"/>
+          <p:cNvPr id="15" name="Text 12"/>
           <p:cNvSpPr txBox="1"/>
           <p:nvPr/>
         </p:nvSpPr>
@@ -17791,7 +18463,7 @@
       </p:sp>
       <p:sp>
         <p:nvSpPr>
-          <p:cNvPr id="15" name="Text 13"/>
+          <p:cNvPr id="16" name="Text 13"/>
           <p:cNvSpPr txBox="1"/>
           <p:nvPr/>
         </p:nvSpPr>
@@ -17830,7 +18502,7 @@
       </p:sp>
       <p:sp>
         <p:nvSpPr>
-          <p:cNvPr id="16" name="Shape 14"/>
+          <p:cNvPr id="17" name="Shape 14"/>
           <p:cNvSpPr/>
           <p:nvPr/>
         </p:nvSpPr>
@@ -17850,7 +18522,7 @@
       </p:sp>
       <p:sp>
         <p:nvSpPr>
-          <p:cNvPr id="17" name="Text 15"/>
+          <p:cNvPr id="18" name="Text 15"/>
           <p:cNvSpPr txBox="1"/>
           <p:nvPr/>
         </p:nvSpPr>
@@ -17889,7 +18561,7 @@
       </p:sp>
       <p:sp>
         <p:nvSpPr>
-          <p:cNvPr id="18" name="Text 16"/>
+          <p:cNvPr id="19" name="Text 16"/>
           <p:cNvSpPr txBox="1"/>
           <p:nvPr/>
         </p:nvSpPr>
@@ -17928,7 +18600,7 @@
       </p:sp>
       <p:sp>
         <p:nvSpPr>
-          <p:cNvPr id="19" name="Shape 17"/>
+          <p:cNvPr id="20" name="Shape 17"/>
           <p:cNvSpPr/>
           <p:nvPr/>
         </p:nvSpPr>
@@ -17948,7 +18620,7 @@
       </p:sp>
       <p:sp>
         <p:nvSpPr>
-          <p:cNvPr id="20" name="Text 18"/>
+          <p:cNvPr id="21" name="Text 18"/>
           <p:cNvSpPr txBox="1"/>
           <p:nvPr/>
         </p:nvSpPr>
@@ -17987,7 +18659,7 @@
       </p:sp>
       <p:sp>
         <p:nvSpPr>
-          <p:cNvPr id="21" name="Text 19"/>
+          <p:cNvPr id="22" name="Text 19"/>
           <p:cNvSpPr txBox="1"/>
           <p:nvPr/>
         </p:nvSpPr>
@@ -18026,7 +18698,7 @@
       </p:sp>
       <p:sp>
         <p:nvSpPr>
-          <p:cNvPr id="22" name="Shape 20"/>
+          <p:cNvPr id="23" name="Shape 20"/>
           <p:cNvSpPr/>
           <p:nvPr/>
         </p:nvSpPr>
@@ -18049,7 +18721,7 @@
       </p:sp>
       <p:sp>
         <p:nvSpPr>
-          <p:cNvPr id="23" name="Shape 21"/>
+          <p:cNvPr id="24" name="Shape 21"/>
           <p:cNvSpPr/>
           <p:nvPr/>
         </p:nvSpPr>
@@ -18074,7 +18746,7 @@
       </p:sp>
       <p:sp>
         <p:nvSpPr>
-          <p:cNvPr id="24" name="Shape 22"/>
+          <p:cNvPr id="25" name="Shape 22"/>
           <p:cNvSpPr/>
           <p:nvPr/>
         </p:nvSpPr>
@@ -18099,7 +18771,7 @@
       </p:sp>
       <p:sp>
         <p:nvSpPr>
-          <p:cNvPr id="25" name="Shape 23"/>
+          <p:cNvPr id="26" name="Shape 23"/>
           <p:cNvSpPr/>
           <p:nvPr/>
         </p:nvSpPr>
@@ -18124,7 +18796,7 @@
       </p:sp>
       <p:sp>
         <p:nvSpPr>
-          <p:cNvPr id="26" name="Shape 24"/>
+          <p:cNvPr id="27" name="Shape 24"/>
           <p:cNvSpPr/>
           <p:nvPr/>
         </p:nvSpPr>
@@ -18149,7 +18821,7 @@
       </p:sp>
       <p:sp>
         <p:nvSpPr>
-          <p:cNvPr id="27" name="Shape 25"/>
+          <p:cNvPr id="28" name="Shape 25"/>
           <p:cNvSpPr/>
           <p:nvPr/>
         </p:nvSpPr>
@@ -18174,7 +18846,7 @@
       </p:sp>
       <p:sp>
         <p:nvSpPr>
-          <p:cNvPr id="28" name="Shape 26"/>
+          <p:cNvPr id="29" name="Shape 26"/>
           <p:cNvSpPr/>
           <p:nvPr/>
         </p:nvSpPr>
@@ -18199,7 +18871,7 @@
       </p:sp>
       <p:sp>
         <p:nvSpPr>
-          <p:cNvPr id="29" name="Shape 27"/>
+          <p:cNvPr id="30" name="Shape 27"/>
           <p:cNvSpPr/>
           <p:nvPr/>
         </p:nvSpPr>
@@ -18224,7 +18896,7 @@
       </p:sp>
       <p:sp>
         <p:nvSpPr>
-          <p:cNvPr id="30" name="Shape 28"/>
+          <p:cNvPr id="31" name="Shape 28"/>
           <p:cNvSpPr/>
           <p:nvPr/>
         </p:nvSpPr>
@@ -18249,7 +18921,7 @@
       </p:sp>
       <p:sp>
         <p:nvSpPr>
-          <p:cNvPr id="31" name="Shape 29"/>
+          <p:cNvPr id="32" name="Shape 29"/>
           <p:cNvSpPr/>
           <p:nvPr/>
         </p:nvSpPr>
@@ -18274,7 +18946,7 @@
       </p:sp>
       <p:sp>
         <p:nvSpPr>
-          <p:cNvPr id="32" name="Shape 30"/>
+          <p:cNvPr id="33" name="Shape 30"/>
           <p:cNvSpPr/>
           <p:nvPr/>
         </p:nvSpPr>
@@ -18299,7 +18971,7 @@
       </p:sp>
       <p:sp>
         <p:nvSpPr>
-          <p:cNvPr id="33" name="Shape 31"/>
+          <p:cNvPr id="34" name="Shape 31"/>
           <p:cNvSpPr/>
           <p:nvPr/>
         </p:nvSpPr>
@@ -18324,7 +18996,7 @@
       </p:sp>
       <p:sp>
         <p:nvSpPr>
-          <p:cNvPr id="34" name="Shape 32"/>
+          <p:cNvPr id="35" name="Shape 32"/>
           <p:cNvSpPr/>
           <p:nvPr/>
         </p:nvSpPr>
@@ -18349,7 +19021,7 @@
       </p:sp>
       <p:sp>
         <p:nvSpPr>
-          <p:cNvPr id="35" name="Shape 33"/>
+          <p:cNvPr id="36" name="Shape 33"/>
           <p:cNvSpPr/>
           <p:nvPr/>
         </p:nvSpPr>
@@ -18374,7 +19046,7 @@
       </p:sp>
       <p:sp>
         <p:nvSpPr>
-          <p:cNvPr id="36" name="Shape 34"/>
+          <p:cNvPr id="37" name="Shape 34"/>
           <p:cNvSpPr/>
           <p:nvPr/>
         </p:nvSpPr>
@@ -18399,23 +19071,23 @@
       </p:sp>
       <p:pic>
         <p:nvPicPr>
-          <p:cNvPr id="3" name="Media 0">
+          <p:cNvPr id="4" name="Media 0">
             <a:hlinkClick r:id="" action="ppaction://media"/>
           </p:cNvPr>
           <p:cNvPicPr>
             <a:picLocks noChangeAspect="1"/>
           </p:cNvPicPr>
           <p:nvPr>
-            <a:videoFile r:link="rId1"/>
+            <a:videoFile r:link="rId2"/>
             <p:extLst>
               <p:ext uri="{DAA4B4D4-6D71-4841-9C94-3DE7FCFB9230}">
-                <p14:media xmlns:p14="http://schemas.microsoft.com/office/powerpoint/2010/main" r:embed="rId2"/>
+                <p14:media xmlns:p14="http://schemas.microsoft.com/office/powerpoint/2010/main" r:embed="rId3"/>
               </p:ext>
             </p:extLst>
           </p:nvPr>
         </p:nvPicPr>
         <p:blipFill>
-          <a:blip r:embed="rId3"/>
+          <a:blip r:embed="rId4"/>
           <a:stretch>
             <a:fillRect/>
           </a:stretch>
@@ -18541,9 +19213,33 @@
           </a:p>
         </p:txBody>
       </p:sp>
-      <p:sp>
-        <p:nvSpPr>
-          <p:cNvPr id="5" name="Text 3"/>
+      <p:pic>
+        <p:nvPicPr>
+          <p:cNvPr id="5" name="Image 0" descr="icons/6.png">    </p:cNvPr>
+          <p:cNvPicPr>
+            <a:picLocks noChangeAspect="1"/>
+          </p:cNvPicPr>
+          <p:nvPr/>
+        </p:nvPicPr>
+        <p:blipFill>
+          <a:blip r:embed="rId1"/>
+          <a:stretch>
+            <a:fillRect/>
+          </a:stretch>
+        </p:blipFill>
+        <p:spPr>
+          <a:xfrm>
+            <a:off x="2514600" y="914400"/>
+            <a:ext cx="1188720" cy="1188720"/>
+          </a:xfrm>
+          <a:prstGeom prst="rect">
+            <a:avLst/>
+          </a:prstGeom>
+        </p:spPr>
+      </p:pic>
+      <p:sp>
+        <p:nvSpPr>
+          <p:cNvPr id="6" name="Text 3"/>
           <p:cNvSpPr txBox="1"/>
           <p:nvPr/>
         </p:nvSpPr>
@@ -18582,7 +19278,7 @@
       </p:sp>
       <p:sp>
         <p:nvSpPr>
-          <p:cNvPr id="6" name="Text 4"/>
+          <p:cNvPr id="7" name="Text 4"/>
           <p:cNvSpPr txBox="1"/>
           <p:nvPr/>
         </p:nvSpPr>
@@ -18621,7 +19317,7 @@
       </p:sp>
       <p:sp>
         <p:nvSpPr>
-          <p:cNvPr id="7" name="Text 5"/>
+          <p:cNvPr id="8" name="Text 5"/>
           <p:cNvSpPr txBox="1"/>
           <p:nvPr/>
         </p:nvSpPr>
@@ -18660,7 +19356,7 @@
       </p:sp>
       <p:sp>
         <p:nvSpPr>
-          <p:cNvPr id="8" name="Text 6"/>
+          <p:cNvPr id="9" name="Text 6"/>
           <p:cNvSpPr txBox="1"/>
           <p:nvPr/>
         </p:nvSpPr>
@@ -18699,7 +19395,7 @@
       </p:sp>
       <p:sp>
         <p:nvSpPr>
-          <p:cNvPr id="9" name="Text 7"/>
+          <p:cNvPr id="10" name="Text 7"/>
           <p:cNvSpPr txBox="1"/>
           <p:nvPr/>
         </p:nvSpPr>
@@ -18738,7 +19434,7 @@
       </p:sp>
       <p:sp>
         <p:nvSpPr>
-          <p:cNvPr id="10" name="Shape 8"/>
+          <p:cNvPr id="11" name="Shape 8"/>
           <p:cNvSpPr/>
           <p:nvPr/>
         </p:nvSpPr>
@@ -18758,7 +19454,7 @@
       </p:sp>
       <p:sp>
         <p:nvSpPr>
-          <p:cNvPr id="11" name="Text 9"/>
+          <p:cNvPr id="12" name="Text 9"/>
           <p:cNvSpPr txBox="1"/>
           <p:nvPr/>
         </p:nvSpPr>
@@ -18797,7 +19493,7 @@
       </p:sp>
       <p:sp>
         <p:nvSpPr>
-          <p:cNvPr id="12" name="Text 10"/>
+          <p:cNvPr id="13" name="Text 10"/>
           <p:cNvSpPr txBox="1"/>
           <p:nvPr/>
         </p:nvSpPr>
@@ -18836,7 +19532,7 @@
       </p:sp>
       <p:sp>
         <p:nvSpPr>
-          <p:cNvPr id="13" name="Shape 11"/>
+          <p:cNvPr id="14" name="Shape 11"/>
           <p:cNvSpPr/>
           <p:nvPr/>
         </p:nvSpPr>
@@ -18856,7 +19552,7 @@
       </p:sp>
       <p:sp>
         <p:nvSpPr>
-          <p:cNvPr id="14" name="Text 12"/>
+          <p:cNvPr id="15" name="Text 12"/>
           <p:cNvSpPr txBox="1"/>
           <p:nvPr/>
         </p:nvSpPr>
@@ -18895,7 +19591,7 @@
       </p:sp>
       <p:sp>
         <p:nvSpPr>
-          <p:cNvPr id="15" name="Text 13"/>
+          <p:cNvPr id="16" name="Text 13"/>
           <p:cNvSpPr txBox="1"/>
           <p:nvPr/>
         </p:nvSpPr>
@@ -18934,7 +19630,7 @@
       </p:sp>
       <p:sp>
         <p:nvSpPr>
-          <p:cNvPr id="16" name="Shape 14"/>
+          <p:cNvPr id="17" name="Shape 14"/>
           <p:cNvSpPr/>
           <p:nvPr/>
         </p:nvSpPr>
@@ -18954,7 +19650,7 @@
       </p:sp>
       <p:sp>
         <p:nvSpPr>
-          <p:cNvPr id="17" name="Text 15"/>
+          <p:cNvPr id="18" name="Text 15"/>
           <p:cNvSpPr txBox="1"/>
           <p:nvPr/>
         </p:nvSpPr>
@@ -18993,7 +19689,7 @@
       </p:sp>
       <p:sp>
         <p:nvSpPr>
-          <p:cNvPr id="18" name="Text 16"/>
+          <p:cNvPr id="19" name="Text 16"/>
           <p:cNvSpPr txBox="1"/>
           <p:nvPr/>
         </p:nvSpPr>
@@ -19032,7 +19728,7 @@
       </p:sp>
       <p:sp>
         <p:nvSpPr>
-          <p:cNvPr id="19" name="Shape 17"/>
+          <p:cNvPr id="20" name="Shape 17"/>
           <p:cNvSpPr/>
           <p:nvPr/>
         </p:nvSpPr>
@@ -19052,7 +19748,7 @@
       </p:sp>
       <p:sp>
         <p:nvSpPr>
-          <p:cNvPr id="20" name="Text 18"/>
+          <p:cNvPr id="21" name="Text 18"/>
           <p:cNvSpPr txBox="1"/>
           <p:nvPr/>
         </p:nvSpPr>
@@ -19091,7 +19787,7 @@
       </p:sp>
       <p:sp>
         <p:nvSpPr>
-          <p:cNvPr id="21" name="Text 19"/>
+          <p:cNvPr id="22" name="Text 19"/>
           <p:cNvSpPr txBox="1"/>
           <p:nvPr/>
         </p:nvSpPr>
@@ -19130,7 +19826,7 @@
       </p:sp>
       <p:sp>
         <p:nvSpPr>
-          <p:cNvPr id="22" name="Shape 20"/>
+          <p:cNvPr id="23" name="Shape 20"/>
           <p:cNvSpPr/>
           <p:nvPr/>
         </p:nvSpPr>
@@ -19153,7 +19849,7 @@
       </p:sp>
       <p:sp>
         <p:nvSpPr>
-          <p:cNvPr id="23" name="Shape 21"/>
+          <p:cNvPr id="24" name="Shape 21"/>
           <p:cNvSpPr/>
           <p:nvPr/>
         </p:nvSpPr>
@@ -19178,7 +19874,7 @@
       </p:sp>
       <p:sp>
         <p:nvSpPr>
-          <p:cNvPr id="24" name="Shape 22"/>
+          <p:cNvPr id="25" name="Shape 22"/>
           <p:cNvSpPr/>
           <p:nvPr/>
         </p:nvSpPr>
@@ -19203,7 +19899,7 @@
       </p:sp>
       <p:sp>
         <p:nvSpPr>
-          <p:cNvPr id="25" name="Shape 23"/>
+          <p:cNvPr id="26" name="Shape 23"/>
           <p:cNvSpPr/>
           <p:nvPr/>
         </p:nvSpPr>
@@ -19228,7 +19924,7 @@
       </p:sp>
       <p:sp>
         <p:nvSpPr>
-          <p:cNvPr id="26" name="Shape 24"/>
+          <p:cNvPr id="27" name="Shape 24"/>
           <p:cNvSpPr/>
           <p:nvPr/>
         </p:nvSpPr>
@@ -19253,7 +19949,7 @@
       </p:sp>
       <p:sp>
         <p:nvSpPr>
-          <p:cNvPr id="27" name="Shape 25"/>
+          <p:cNvPr id="28" name="Shape 25"/>
           <p:cNvSpPr/>
           <p:nvPr/>
         </p:nvSpPr>
@@ -19278,7 +19974,7 @@
       </p:sp>
       <p:sp>
         <p:nvSpPr>
-          <p:cNvPr id="28" name="Shape 26"/>
+          <p:cNvPr id="29" name="Shape 26"/>
           <p:cNvSpPr/>
           <p:nvPr/>
         </p:nvSpPr>
@@ -19303,7 +19999,7 @@
       </p:sp>
       <p:sp>
         <p:nvSpPr>
-          <p:cNvPr id="29" name="Shape 27"/>
+          <p:cNvPr id="30" name="Shape 27"/>
           <p:cNvSpPr/>
           <p:nvPr/>
         </p:nvSpPr>
@@ -19328,7 +20024,7 @@
       </p:sp>
       <p:sp>
         <p:nvSpPr>
-          <p:cNvPr id="30" name="Shape 28"/>
+          <p:cNvPr id="31" name="Shape 28"/>
           <p:cNvSpPr/>
           <p:nvPr/>
         </p:nvSpPr>
@@ -19353,7 +20049,7 @@
       </p:sp>
       <p:sp>
         <p:nvSpPr>
-          <p:cNvPr id="31" name="Shape 29"/>
+          <p:cNvPr id="32" name="Shape 29"/>
           <p:cNvSpPr/>
           <p:nvPr/>
         </p:nvSpPr>
@@ -19378,7 +20074,7 @@
       </p:sp>
       <p:sp>
         <p:nvSpPr>
-          <p:cNvPr id="32" name="Shape 30"/>
+          <p:cNvPr id="33" name="Shape 30"/>
           <p:cNvSpPr/>
           <p:nvPr/>
         </p:nvSpPr>
@@ -19403,7 +20099,7 @@
       </p:sp>
       <p:sp>
         <p:nvSpPr>
-          <p:cNvPr id="33" name="Shape 31"/>
+          <p:cNvPr id="34" name="Shape 31"/>
           <p:cNvSpPr/>
           <p:nvPr/>
         </p:nvSpPr>
@@ -19428,7 +20124,7 @@
       </p:sp>
       <p:sp>
         <p:nvSpPr>
-          <p:cNvPr id="34" name="Shape 32"/>
+          <p:cNvPr id="35" name="Shape 32"/>
           <p:cNvSpPr/>
           <p:nvPr/>
         </p:nvSpPr>
@@ -19453,7 +20149,7 @@
       </p:sp>
       <p:sp>
         <p:nvSpPr>
-          <p:cNvPr id="35" name="Shape 33"/>
+          <p:cNvPr id="36" name="Shape 33"/>
           <p:cNvSpPr/>
           <p:nvPr/>
         </p:nvSpPr>
@@ -19478,7 +20174,7 @@
       </p:sp>
       <p:sp>
         <p:nvSpPr>
-          <p:cNvPr id="36" name="Shape 34"/>
+          <p:cNvPr id="37" name="Shape 34"/>
           <p:cNvSpPr/>
           <p:nvPr/>
         </p:nvSpPr>
@@ -19503,23 +20199,23 @@
       </p:sp>
       <p:pic>
         <p:nvPicPr>
-          <p:cNvPr id="3" name="Media 0">
+          <p:cNvPr id="4" name="Media 0">
             <a:hlinkClick r:id="" action="ppaction://media"/>
           </p:cNvPr>
           <p:cNvPicPr>
             <a:picLocks noChangeAspect="1"/>
           </p:cNvPicPr>
           <p:nvPr>
-            <a:videoFile r:link="rId1"/>
+            <a:videoFile r:link="rId2"/>
             <p:extLst>
               <p:ext uri="{DAA4B4D4-6D71-4841-9C94-3DE7FCFB9230}">
-                <p14:media xmlns:p14="http://schemas.microsoft.com/office/powerpoint/2010/main" r:embed="rId2"/>
+                <p14:media xmlns:p14="http://schemas.microsoft.com/office/powerpoint/2010/main" r:embed="rId3"/>
               </p:ext>
             </p:extLst>
           </p:nvPr>
         </p:nvPicPr>
         <p:blipFill>
-          <a:blip r:embed="rId3"/>
+          <a:blip r:embed="rId4"/>
           <a:stretch>
             <a:fillRect/>
           </a:stretch>
@@ -19645,9 +20341,33 @@
           </a:p>
         </p:txBody>
       </p:sp>
-      <p:sp>
-        <p:nvSpPr>
-          <p:cNvPr id="5" name="Text 3"/>
+      <p:pic>
+        <p:nvPicPr>
+          <p:cNvPr id="5" name="Image 0" descr="icons/7.png">    </p:cNvPr>
+          <p:cNvPicPr>
+            <a:picLocks noChangeAspect="1"/>
+          </p:cNvPicPr>
+          <p:nvPr/>
+        </p:nvPicPr>
+        <p:blipFill>
+          <a:blip r:embed="rId1"/>
+          <a:stretch>
+            <a:fillRect/>
+          </a:stretch>
+        </p:blipFill>
+        <p:spPr>
+          <a:xfrm>
+            <a:off x="2514600" y="914400"/>
+            <a:ext cx="1188720" cy="1188720"/>
+          </a:xfrm>
+          <a:prstGeom prst="rect">
+            <a:avLst/>
+          </a:prstGeom>
+        </p:spPr>
+      </p:pic>
+      <p:sp>
+        <p:nvSpPr>
+          <p:cNvPr id="6" name="Text 3"/>
           <p:cNvSpPr txBox="1"/>
           <p:nvPr/>
         </p:nvSpPr>
@@ -19686,7 +20406,7 @@
       </p:sp>
       <p:sp>
         <p:nvSpPr>
-          <p:cNvPr id="6" name="Text 4"/>
+          <p:cNvPr id="7" name="Text 4"/>
           <p:cNvSpPr txBox="1"/>
           <p:nvPr/>
         </p:nvSpPr>
@@ -19725,7 +20445,7 @@
       </p:sp>
       <p:sp>
         <p:nvSpPr>
-          <p:cNvPr id="7" name="Text 5"/>
+          <p:cNvPr id="8" name="Text 5"/>
           <p:cNvSpPr txBox="1"/>
           <p:nvPr/>
         </p:nvSpPr>
@@ -19764,7 +20484,7 @@
       </p:sp>
       <p:sp>
         <p:nvSpPr>
-          <p:cNvPr id="8" name="Text 6"/>
+          <p:cNvPr id="9" name="Text 6"/>
           <p:cNvSpPr txBox="1"/>
           <p:nvPr/>
         </p:nvSpPr>
@@ -19803,7 +20523,7 @@
       </p:sp>
       <p:sp>
         <p:nvSpPr>
-          <p:cNvPr id="9" name="Text 7"/>
+          <p:cNvPr id="10" name="Text 7"/>
           <p:cNvSpPr txBox="1"/>
           <p:nvPr/>
         </p:nvSpPr>
@@ -19842,7 +20562,7 @@
       </p:sp>
       <p:sp>
         <p:nvSpPr>
-          <p:cNvPr id="10" name="Shape 8"/>
+          <p:cNvPr id="11" name="Shape 8"/>
           <p:cNvSpPr/>
           <p:nvPr/>
         </p:nvSpPr>
@@ -19862,7 +20582,7 @@
       </p:sp>
       <p:sp>
         <p:nvSpPr>
-          <p:cNvPr id="11" name="Text 9"/>
+          <p:cNvPr id="12" name="Text 9"/>
           <p:cNvSpPr txBox="1"/>
           <p:nvPr/>
         </p:nvSpPr>
@@ -19901,7 +20621,7 @@
       </p:sp>
       <p:sp>
         <p:nvSpPr>
-          <p:cNvPr id="12" name="Text 10"/>
+          <p:cNvPr id="13" name="Text 10"/>
           <p:cNvSpPr txBox="1"/>
           <p:nvPr/>
         </p:nvSpPr>
@@ -19940,7 +20660,7 @@
       </p:sp>
       <p:sp>
         <p:nvSpPr>
-          <p:cNvPr id="13" name="Shape 11"/>
+          <p:cNvPr id="14" name="Shape 11"/>
           <p:cNvSpPr/>
           <p:nvPr/>
         </p:nvSpPr>
@@ -19960,7 +20680,7 @@
       </p:sp>
       <p:sp>
         <p:nvSpPr>
-          <p:cNvPr id="14" name="Text 12"/>
+          <p:cNvPr id="15" name="Text 12"/>
           <p:cNvSpPr txBox="1"/>
           <p:nvPr/>
         </p:nvSpPr>
@@ -19999,7 +20719,7 @@
       </p:sp>
       <p:sp>
         <p:nvSpPr>
-          <p:cNvPr id="15" name="Text 13"/>
+          <p:cNvPr id="16" name="Text 13"/>
           <p:cNvSpPr txBox="1"/>
           <p:nvPr/>
         </p:nvSpPr>
@@ -20038,7 +20758,7 @@
       </p:sp>
       <p:sp>
         <p:nvSpPr>
-          <p:cNvPr id="16" name="Shape 14"/>
+          <p:cNvPr id="17" name="Shape 14"/>
           <p:cNvSpPr/>
           <p:nvPr/>
         </p:nvSpPr>
@@ -20058,7 +20778,7 @@
       </p:sp>
       <p:sp>
         <p:nvSpPr>
-          <p:cNvPr id="17" name="Text 15"/>
+          <p:cNvPr id="18" name="Text 15"/>
           <p:cNvSpPr txBox="1"/>
           <p:nvPr/>
         </p:nvSpPr>
@@ -20097,7 +20817,7 @@
       </p:sp>
       <p:sp>
         <p:nvSpPr>
-          <p:cNvPr id="18" name="Text 16"/>
+          <p:cNvPr id="19" name="Text 16"/>
           <p:cNvSpPr txBox="1"/>
           <p:nvPr/>
         </p:nvSpPr>
@@ -20136,7 +20856,7 @@
       </p:sp>
       <p:sp>
         <p:nvSpPr>
-          <p:cNvPr id="19" name="Shape 17"/>
+          <p:cNvPr id="20" name="Shape 17"/>
           <p:cNvSpPr/>
           <p:nvPr/>
         </p:nvSpPr>
@@ -20156,7 +20876,7 @@
       </p:sp>
       <p:sp>
         <p:nvSpPr>
-          <p:cNvPr id="20" name="Text 18"/>
+          <p:cNvPr id="21" name="Text 18"/>
           <p:cNvSpPr txBox="1"/>
           <p:nvPr/>
         </p:nvSpPr>
@@ -20195,7 +20915,7 @@
       </p:sp>
       <p:sp>
         <p:nvSpPr>
-          <p:cNvPr id="21" name="Text 19"/>
+          <p:cNvPr id="22" name="Text 19"/>
           <p:cNvSpPr txBox="1"/>
           <p:nvPr/>
         </p:nvSpPr>
@@ -20234,7 +20954,7 @@
       </p:sp>
       <p:sp>
         <p:nvSpPr>
-          <p:cNvPr id="22" name="Shape 20"/>
+          <p:cNvPr id="23" name="Shape 20"/>
           <p:cNvSpPr/>
           <p:nvPr/>
         </p:nvSpPr>
@@ -20257,7 +20977,7 @@
       </p:sp>
       <p:sp>
         <p:nvSpPr>
-          <p:cNvPr id="23" name="Shape 21"/>
+          <p:cNvPr id="24" name="Shape 21"/>
           <p:cNvSpPr/>
           <p:nvPr/>
         </p:nvSpPr>
@@ -20282,7 +21002,7 @@
       </p:sp>
       <p:sp>
         <p:nvSpPr>
-          <p:cNvPr id="24" name="Shape 22"/>
+          <p:cNvPr id="25" name="Shape 22"/>
           <p:cNvSpPr/>
           <p:nvPr/>
         </p:nvSpPr>
@@ -20307,7 +21027,7 @@
       </p:sp>
       <p:sp>
         <p:nvSpPr>
-          <p:cNvPr id="25" name="Shape 23"/>
+          <p:cNvPr id="26" name="Shape 23"/>
           <p:cNvSpPr/>
           <p:nvPr/>
         </p:nvSpPr>
@@ -20332,7 +21052,7 @@
       </p:sp>
       <p:sp>
         <p:nvSpPr>
-          <p:cNvPr id="26" name="Shape 24"/>
+          <p:cNvPr id="27" name="Shape 24"/>
           <p:cNvSpPr/>
           <p:nvPr/>
         </p:nvSpPr>
@@ -20357,7 +21077,7 @@
       </p:sp>
       <p:sp>
         <p:nvSpPr>
-          <p:cNvPr id="27" name="Shape 25"/>
+          <p:cNvPr id="28" name="Shape 25"/>
           <p:cNvSpPr/>
           <p:nvPr/>
         </p:nvSpPr>
@@ -20382,7 +21102,7 @@
       </p:sp>
       <p:sp>
         <p:nvSpPr>
-          <p:cNvPr id="28" name="Shape 26"/>
+          <p:cNvPr id="29" name="Shape 26"/>
           <p:cNvSpPr/>
           <p:nvPr/>
         </p:nvSpPr>
@@ -20407,7 +21127,7 @@
       </p:sp>
       <p:sp>
         <p:nvSpPr>
-          <p:cNvPr id="29" name="Shape 27"/>
+          <p:cNvPr id="30" name="Shape 27"/>
           <p:cNvSpPr/>
           <p:nvPr/>
         </p:nvSpPr>
@@ -20432,7 +21152,7 @@
       </p:sp>
       <p:sp>
         <p:nvSpPr>
-          <p:cNvPr id="30" name="Shape 28"/>
+          <p:cNvPr id="31" name="Shape 28"/>
           <p:cNvSpPr/>
           <p:nvPr/>
         </p:nvSpPr>
@@ -20457,7 +21177,7 @@
       </p:sp>
       <p:sp>
         <p:nvSpPr>
-          <p:cNvPr id="31" name="Shape 29"/>
+          <p:cNvPr id="32" name="Shape 29"/>
           <p:cNvSpPr/>
           <p:nvPr/>
         </p:nvSpPr>
@@ -20482,7 +21202,7 @@
       </p:sp>
       <p:sp>
         <p:nvSpPr>
-          <p:cNvPr id="32" name="Shape 30"/>
+          <p:cNvPr id="33" name="Shape 30"/>
           <p:cNvSpPr/>
           <p:nvPr/>
         </p:nvSpPr>
@@ -20507,7 +21227,7 @@
       </p:sp>
       <p:sp>
         <p:nvSpPr>
-          <p:cNvPr id="33" name="Shape 31"/>
+          <p:cNvPr id="34" name="Shape 31"/>
           <p:cNvSpPr/>
           <p:nvPr/>
         </p:nvSpPr>
@@ -20532,7 +21252,7 @@
       </p:sp>
       <p:sp>
         <p:nvSpPr>
-          <p:cNvPr id="34" name="Shape 32"/>
+          <p:cNvPr id="35" name="Shape 32"/>
           <p:cNvSpPr/>
           <p:nvPr/>
         </p:nvSpPr>
@@ -20557,7 +21277,7 @@
       </p:sp>
       <p:sp>
         <p:nvSpPr>
-          <p:cNvPr id="35" name="Shape 33"/>
+          <p:cNvPr id="36" name="Shape 33"/>
           <p:cNvSpPr/>
           <p:nvPr/>
         </p:nvSpPr>
@@ -20582,7 +21302,7 @@
       </p:sp>
       <p:sp>
         <p:nvSpPr>
-          <p:cNvPr id="36" name="Shape 34"/>
+          <p:cNvPr id="37" name="Shape 34"/>
           <p:cNvSpPr/>
           <p:nvPr/>
         </p:nvSpPr>
@@ -20607,23 +21327,23 @@
       </p:sp>
       <p:pic>
         <p:nvPicPr>
-          <p:cNvPr id="3" name="Media 0">
+          <p:cNvPr id="4" name="Media 0">
             <a:hlinkClick r:id="" action="ppaction://media"/>
           </p:cNvPr>
           <p:cNvPicPr>
             <a:picLocks noChangeAspect="1"/>
           </p:cNvPicPr>
           <p:nvPr>
-            <a:videoFile r:link="rId1"/>
+            <a:videoFile r:link="rId2"/>
             <p:extLst>
               <p:ext uri="{DAA4B4D4-6D71-4841-9C94-3DE7FCFB9230}">
-                <p14:media xmlns:p14="http://schemas.microsoft.com/office/powerpoint/2010/main" r:embed="rId2"/>
+                <p14:media xmlns:p14="http://schemas.microsoft.com/office/powerpoint/2010/main" r:embed="rId3"/>
               </p:ext>
             </p:extLst>
           </p:nvPr>
         </p:nvPicPr>
         <p:blipFill>
-          <a:blip r:embed="rId3"/>
+          <a:blip r:embed="rId4"/>
           <a:stretch>
             <a:fillRect/>
           </a:stretch>

--- a/Bible-Timeline.pptx
+++ b/Bible-Timeline.pptx
@@ -2454,7 +2454,7 @@
                 <a:ea typeface="Calibri" pitchFamily="34" charset="-122"/>
                 <a:cs typeface="Calibri" pitchFamily="34" charset="-120"/>
               </a:rPr>
-              <a:t>Made with Claude Sonnet 5 · Effort: Low</a:t>
+              <a:t>Made with Claude Sonnet 5 · Effort: Ultracode</a:t>
             </a:r>
             <a:endParaRPr lang="en-US" sz="1400" dirty="0"/>
           </a:p>
